--- a/F_Présentation_Groupe_F.pptx
+++ b/F_Présentation_Groupe_F.pptx
@@ -2,18 +2,23 @@
 <file path=ppt/presentation.xml><?xml version="1.0" encoding="utf-8"?>
 <p:presentation xmlns:a="http://schemas.openxmlformats.org/drawingml/2006/main" xmlns:r="http://schemas.openxmlformats.org/officeDocument/2006/relationships" xmlns:p="http://schemas.openxmlformats.org/presentationml/2006/main" saveSubsetFonts="1">
   <p:sldMasterIdLst>
-    <p:sldMasterId id="2147483648" r:id="rId1"/>
+    <p:sldMasterId id="2147483731" r:id="rId1"/>
   </p:sldMasterIdLst>
   <p:sldIdLst>
     <p:sldId id="256" r:id="rId2"/>
+    <p:sldId id="257" r:id="rId3"/>
+    <p:sldId id="260" r:id="rId4"/>
+    <p:sldId id="258" r:id="rId5"/>
+    <p:sldId id="259" r:id="rId6"/>
+    <p:sldId id="261" r:id="rId7"/>
   </p:sldIdLst>
   <p:sldSz cx="12192000" cy="6858000"/>
   <p:notesSz cx="6858000" cy="9144000"/>
   <p:defaultTextStyle>
     <a:defPPr>
-      <a:defRPr lang="fr-FR"/>
+      <a:defRPr lang="en-US"/>
     </a:defPPr>
-    <a:lvl1pPr marL="0" algn="l" defTabSz="914400" rtl="0" eaLnBrk="1" latinLnBrk="0" hangingPunct="1">
+    <a:lvl1pPr marL="0" algn="l" defTabSz="457200" rtl="0" eaLnBrk="1" latinLnBrk="0" hangingPunct="1">
       <a:defRPr sz="1800" kern="1200">
         <a:solidFill>
           <a:schemeClr val="tx1"/>
@@ -23,7 +28,7 @@
         <a:cs typeface="+mn-cs"/>
       </a:defRPr>
     </a:lvl1pPr>
-    <a:lvl2pPr marL="457200" algn="l" defTabSz="914400" rtl="0" eaLnBrk="1" latinLnBrk="0" hangingPunct="1">
+    <a:lvl2pPr marL="457200" algn="l" defTabSz="457200" rtl="0" eaLnBrk="1" latinLnBrk="0" hangingPunct="1">
       <a:defRPr sz="1800" kern="1200">
         <a:solidFill>
           <a:schemeClr val="tx1"/>
@@ -33,7 +38,7 @@
         <a:cs typeface="+mn-cs"/>
       </a:defRPr>
     </a:lvl2pPr>
-    <a:lvl3pPr marL="914400" algn="l" defTabSz="914400" rtl="0" eaLnBrk="1" latinLnBrk="0" hangingPunct="1">
+    <a:lvl3pPr marL="914400" algn="l" defTabSz="457200" rtl="0" eaLnBrk="1" latinLnBrk="0" hangingPunct="1">
       <a:defRPr sz="1800" kern="1200">
         <a:solidFill>
           <a:schemeClr val="tx1"/>
@@ -43,7 +48,7 @@
         <a:cs typeface="+mn-cs"/>
       </a:defRPr>
     </a:lvl3pPr>
-    <a:lvl4pPr marL="1371600" algn="l" defTabSz="914400" rtl="0" eaLnBrk="1" latinLnBrk="0" hangingPunct="1">
+    <a:lvl4pPr marL="1371600" algn="l" defTabSz="457200" rtl="0" eaLnBrk="1" latinLnBrk="0" hangingPunct="1">
       <a:defRPr sz="1800" kern="1200">
         <a:solidFill>
           <a:schemeClr val="tx1"/>
@@ -53,7 +58,7 @@
         <a:cs typeface="+mn-cs"/>
       </a:defRPr>
     </a:lvl4pPr>
-    <a:lvl5pPr marL="1828800" algn="l" defTabSz="914400" rtl="0" eaLnBrk="1" latinLnBrk="0" hangingPunct="1">
+    <a:lvl5pPr marL="1828800" algn="l" defTabSz="457200" rtl="0" eaLnBrk="1" latinLnBrk="0" hangingPunct="1">
       <a:defRPr sz="1800" kern="1200">
         <a:solidFill>
           <a:schemeClr val="tx1"/>
@@ -63,7 +68,7 @@
         <a:cs typeface="+mn-cs"/>
       </a:defRPr>
     </a:lvl5pPr>
-    <a:lvl6pPr marL="2286000" algn="l" defTabSz="914400" rtl="0" eaLnBrk="1" latinLnBrk="0" hangingPunct="1">
+    <a:lvl6pPr marL="2286000" algn="l" defTabSz="457200" rtl="0" eaLnBrk="1" latinLnBrk="0" hangingPunct="1">
       <a:defRPr sz="1800" kern="1200">
         <a:solidFill>
           <a:schemeClr val="tx1"/>
@@ -73,7 +78,7 @@
         <a:cs typeface="+mn-cs"/>
       </a:defRPr>
     </a:lvl6pPr>
-    <a:lvl7pPr marL="2743200" algn="l" defTabSz="914400" rtl="0" eaLnBrk="1" latinLnBrk="0" hangingPunct="1">
+    <a:lvl7pPr marL="2743200" algn="l" defTabSz="457200" rtl="0" eaLnBrk="1" latinLnBrk="0" hangingPunct="1">
       <a:defRPr sz="1800" kern="1200">
         <a:solidFill>
           <a:schemeClr val="tx1"/>
@@ -83,7 +88,7 @@
         <a:cs typeface="+mn-cs"/>
       </a:defRPr>
     </a:lvl7pPr>
-    <a:lvl8pPr marL="3200400" algn="l" defTabSz="914400" rtl="0" eaLnBrk="1" latinLnBrk="0" hangingPunct="1">
+    <a:lvl8pPr marL="3200400" algn="l" defTabSz="457200" rtl="0" eaLnBrk="1" latinLnBrk="0" hangingPunct="1">
       <a:defRPr sz="1800" kern="1200">
         <a:solidFill>
           <a:schemeClr val="tx1"/>
@@ -93,7 +98,7 @@
         <a:cs typeface="+mn-cs"/>
       </a:defRPr>
     </a:lvl8pPr>
-    <a:lvl9pPr marL="3657600" algn="l" defTabSz="914400" rtl="0" eaLnBrk="1" latinLnBrk="0" hangingPunct="1">
+    <a:lvl9pPr marL="3657600" algn="l" defTabSz="457200" rtl="0" eaLnBrk="1" latinLnBrk="0" hangingPunct="1">
       <a:defRPr sz="1800" kern="1200">
         <a:solidFill>
           <a:schemeClr val="tx1"/>
@@ -104,11 +109,16 @@
       </a:defRPr>
     </a:lvl9pPr>
   </p:defaultTextStyle>
+  <p:extLst>
+    <p:ext uri="{EFAFB233-063F-42B5-8137-9DF3F51BA10A}">
+      <p15:sldGuideLst xmlns:p15="http://schemas.microsoft.com/office/powerpoint/2012/main"/>
+    </p:ext>
+  </p:extLst>
 </p:presentation>
 </file>
 
 <file path=ppt/slideLayouts/slideLayout1.xml><?xml version="1.0" encoding="utf-8"?>
-<p:sldLayout xmlns:a="http://schemas.openxmlformats.org/drawingml/2006/main" xmlns:r="http://schemas.openxmlformats.org/officeDocument/2006/relationships" xmlns:p="http://schemas.openxmlformats.org/presentationml/2006/main" type="title" preserve="1">
+<p:sldLayout xmlns:a="http://schemas.openxmlformats.org/drawingml/2006/main" xmlns:r="http://schemas.openxmlformats.org/officeDocument/2006/relationships" xmlns:p="http://schemas.openxmlformats.org/presentationml/2006/main" showMasterSp="0" type="title" preserve="1">
   <p:cSld name="Diapositive de titre">
     <p:spTree>
       <p:nvGrpSpPr>
@@ -124,15 +134,539 @@
           <a:chExt cx="0" cy="0"/>
         </a:xfrm>
       </p:grpSpPr>
-      <p:sp>
-        <p:nvSpPr>
-          <p:cNvPr id="2" name="Titre 1">
-            <a:extLst>
-              <a:ext uri="{FF2B5EF4-FFF2-40B4-BE49-F238E27FC236}">
-                <a16:creationId xmlns:a16="http://schemas.microsoft.com/office/drawing/2014/main" id="{B80CD032-273A-D16F-BF53-37D5CBCE33CB}"/>
-              </a:ext>
-            </a:extLst>
-          </p:cNvPr>
+      <p:grpSp>
+        <p:nvGrpSpPr>
+          <p:cNvPr id="7" name="Group 6"/>
+          <p:cNvGrpSpPr/>
+          <p:nvPr/>
+        </p:nvGrpSpPr>
+        <p:grpSpPr>
+          <a:xfrm>
+            <a:off x="0" y="-8467"/>
+            <a:ext cx="12192000" cy="6866467"/>
+            <a:chOff x="0" y="-8467"/>
+            <a:chExt cx="12192000" cy="6866467"/>
+          </a:xfrm>
+        </p:grpSpPr>
+        <p:cxnSp>
+          <p:nvCxnSpPr>
+            <p:cNvPr id="32" name="Straight Connector 31"/>
+            <p:cNvCxnSpPr/>
+            <p:nvPr/>
+          </p:nvCxnSpPr>
+          <p:spPr>
+            <a:xfrm>
+              <a:off x="9371012" y="0"/>
+              <a:ext cx="1219200" cy="6858000"/>
+            </a:xfrm>
+            <a:prstGeom prst="line">
+              <a:avLst/>
+            </a:prstGeom>
+            <a:ln w="9525">
+              <a:solidFill>
+                <a:schemeClr val="bg1">
+                  <a:lumMod val="75000"/>
+                </a:schemeClr>
+              </a:solidFill>
+            </a:ln>
+          </p:spPr>
+          <p:style>
+            <a:lnRef idx="2">
+              <a:schemeClr val="accent1"/>
+            </a:lnRef>
+            <a:fillRef idx="0">
+              <a:schemeClr val="accent1"/>
+            </a:fillRef>
+            <a:effectRef idx="1">
+              <a:schemeClr val="accent1"/>
+            </a:effectRef>
+            <a:fontRef idx="minor">
+              <a:schemeClr val="tx1"/>
+            </a:fontRef>
+          </p:style>
+        </p:cxnSp>
+        <p:cxnSp>
+          <p:nvCxnSpPr>
+            <p:cNvPr id="21" name="Straight Connector 20"/>
+            <p:cNvCxnSpPr/>
+            <p:nvPr/>
+          </p:nvCxnSpPr>
+          <p:spPr>
+            <a:xfrm flipH="1">
+              <a:off x="7425267" y="3681413"/>
+              <a:ext cx="4763558" cy="3176587"/>
+            </a:xfrm>
+            <a:prstGeom prst="line">
+              <a:avLst/>
+            </a:prstGeom>
+            <a:ln w="9525">
+              <a:solidFill>
+                <a:schemeClr val="bg1">
+                  <a:lumMod val="85000"/>
+                </a:schemeClr>
+              </a:solidFill>
+            </a:ln>
+          </p:spPr>
+          <p:style>
+            <a:lnRef idx="2">
+              <a:schemeClr val="accent1"/>
+            </a:lnRef>
+            <a:fillRef idx="0">
+              <a:schemeClr val="accent1"/>
+            </a:fillRef>
+            <a:effectRef idx="1">
+              <a:schemeClr val="accent1"/>
+            </a:effectRef>
+            <a:fontRef idx="minor">
+              <a:schemeClr val="tx1"/>
+            </a:fontRef>
+          </p:style>
+        </p:cxnSp>
+        <p:sp>
+          <p:nvSpPr>
+            <p:cNvPr id="24" name="Rectangle 23"/>
+            <p:cNvSpPr/>
+            <p:nvPr/>
+          </p:nvSpPr>
+          <p:spPr>
+            <a:xfrm>
+              <a:off x="9181476" y="-8467"/>
+              <a:ext cx="3007349" cy="6866467"/>
+            </a:xfrm>
+            <a:custGeom>
+              <a:avLst/>
+              <a:gdLst/>
+              <a:ahLst/>
+              <a:cxnLst/>
+              <a:rect l="l" t="t" r="r" b="b"/>
+              <a:pathLst>
+                <a:path w="3007349" h="6866467">
+                  <a:moveTo>
+                    <a:pt x="2045532" y="0"/>
+                  </a:moveTo>
+                  <a:lnTo>
+                    <a:pt x="3007349" y="0"/>
+                  </a:lnTo>
+                  <a:lnTo>
+                    <a:pt x="3007349" y="6866467"/>
+                  </a:lnTo>
+                  <a:lnTo>
+                    <a:pt x="0" y="6866467"/>
+                  </a:lnTo>
+                  <a:lnTo>
+                    <a:pt x="2045532" y="0"/>
+                  </a:lnTo>
+                  <a:close/>
+                </a:path>
+              </a:pathLst>
+            </a:custGeom>
+            <a:solidFill>
+              <a:schemeClr val="accent1">
+                <a:alpha val="30000"/>
+              </a:schemeClr>
+            </a:solidFill>
+            <a:ln>
+              <a:noFill/>
+            </a:ln>
+            <a:effectLst/>
+          </p:spPr>
+          <p:style>
+            <a:lnRef idx="1">
+              <a:schemeClr val="accent1"/>
+            </a:lnRef>
+            <a:fillRef idx="3">
+              <a:schemeClr val="accent1"/>
+            </a:fillRef>
+            <a:effectRef idx="2">
+              <a:schemeClr val="accent1"/>
+            </a:effectRef>
+            <a:fontRef idx="minor">
+              <a:schemeClr val="lt1"/>
+            </a:fontRef>
+          </p:style>
+        </p:sp>
+        <p:sp>
+          <p:nvSpPr>
+            <p:cNvPr id="26" name="Rectangle 25"/>
+            <p:cNvSpPr/>
+            <p:nvPr/>
+          </p:nvSpPr>
+          <p:spPr>
+            <a:xfrm>
+              <a:off x="9603442" y="-8467"/>
+              <a:ext cx="2588558" cy="6866467"/>
+            </a:xfrm>
+            <a:custGeom>
+              <a:avLst/>
+              <a:gdLst/>
+              <a:ahLst/>
+              <a:cxnLst/>
+              <a:rect l="l" t="t" r="r" b="b"/>
+              <a:pathLst>
+                <a:path w="2573311" h="6866467">
+                  <a:moveTo>
+                    <a:pt x="0" y="0"/>
+                  </a:moveTo>
+                  <a:lnTo>
+                    <a:pt x="2573311" y="0"/>
+                  </a:lnTo>
+                  <a:lnTo>
+                    <a:pt x="2573311" y="6866467"/>
+                  </a:lnTo>
+                  <a:lnTo>
+                    <a:pt x="1202336" y="6866467"/>
+                  </a:lnTo>
+                  <a:lnTo>
+                    <a:pt x="0" y="0"/>
+                  </a:lnTo>
+                  <a:close/>
+                </a:path>
+              </a:pathLst>
+            </a:custGeom>
+            <a:solidFill>
+              <a:schemeClr val="accent1">
+                <a:alpha val="20000"/>
+              </a:schemeClr>
+            </a:solidFill>
+            <a:ln>
+              <a:noFill/>
+            </a:ln>
+            <a:effectLst/>
+          </p:spPr>
+          <p:style>
+            <a:lnRef idx="1">
+              <a:schemeClr val="accent1"/>
+            </a:lnRef>
+            <a:fillRef idx="3">
+              <a:schemeClr val="accent1"/>
+            </a:fillRef>
+            <a:effectRef idx="2">
+              <a:schemeClr val="accent1"/>
+            </a:effectRef>
+            <a:fontRef idx="minor">
+              <a:schemeClr val="lt1"/>
+            </a:fontRef>
+          </p:style>
+        </p:sp>
+        <p:sp>
+          <p:nvSpPr>
+            <p:cNvPr id="27" name="Isosceles Triangle 26"/>
+            <p:cNvSpPr/>
+            <p:nvPr/>
+          </p:nvSpPr>
+          <p:spPr>
+            <a:xfrm>
+              <a:off x="8932333" y="3048000"/>
+              <a:ext cx="3259667" cy="3810000"/>
+            </a:xfrm>
+            <a:prstGeom prst="triangle">
+              <a:avLst>
+                <a:gd name="adj" fmla="val 100000"/>
+              </a:avLst>
+            </a:prstGeom>
+            <a:solidFill>
+              <a:schemeClr val="accent2">
+                <a:alpha val="72000"/>
+              </a:schemeClr>
+            </a:solidFill>
+            <a:ln>
+              <a:noFill/>
+            </a:ln>
+            <a:effectLst/>
+          </p:spPr>
+          <p:style>
+            <a:lnRef idx="1">
+              <a:schemeClr val="accent1"/>
+            </a:lnRef>
+            <a:fillRef idx="3">
+              <a:schemeClr val="accent1"/>
+            </a:fillRef>
+            <a:effectRef idx="2">
+              <a:schemeClr val="accent1"/>
+            </a:effectRef>
+            <a:fontRef idx="minor">
+              <a:schemeClr val="lt1"/>
+            </a:fontRef>
+          </p:style>
+        </p:sp>
+        <p:sp>
+          <p:nvSpPr>
+            <p:cNvPr id="28" name="Rectangle 27"/>
+            <p:cNvSpPr/>
+            <p:nvPr/>
+          </p:nvSpPr>
+          <p:spPr>
+            <a:xfrm>
+              <a:off x="9334500" y="-8467"/>
+              <a:ext cx="2854326" cy="6866467"/>
+            </a:xfrm>
+            <a:custGeom>
+              <a:avLst/>
+              <a:gdLst/>
+              <a:ahLst/>
+              <a:cxnLst/>
+              <a:rect l="l" t="t" r="r" b="b"/>
+              <a:pathLst>
+                <a:path w="2858013" h="6866467">
+                  <a:moveTo>
+                    <a:pt x="0" y="0"/>
+                  </a:moveTo>
+                  <a:lnTo>
+                    <a:pt x="2858013" y="0"/>
+                  </a:lnTo>
+                  <a:lnTo>
+                    <a:pt x="2858013" y="6866467"/>
+                  </a:lnTo>
+                  <a:lnTo>
+                    <a:pt x="2473942" y="6866467"/>
+                  </a:lnTo>
+                  <a:lnTo>
+                    <a:pt x="0" y="0"/>
+                  </a:lnTo>
+                  <a:close/>
+                </a:path>
+              </a:pathLst>
+            </a:custGeom>
+            <a:solidFill>
+              <a:schemeClr val="accent2">
+                <a:lumMod val="75000"/>
+                <a:alpha val="70000"/>
+              </a:schemeClr>
+            </a:solidFill>
+            <a:ln>
+              <a:noFill/>
+            </a:ln>
+            <a:effectLst/>
+          </p:spPr>
+          <p:style>
+            <a:lnRef idx="1">
+              <a:schemeClr val="accent1"/>
+            </a:lnRef>
+            <a:fillRef idx="3">
+              <a:schemeClr val="accent1"/>
+            </a:fillRef>
+            <a:effectRef idx="2">
+              <a:schemeClr val="accent1"/>
+            </a:effectRef>
+            <a:fontRef idx="minor">
+              <a:schemeClr val="lt1"/>
+            </a:fontRef>
+          </p:style>
+        </p:sp>
+        <p:sp>
+          <p:nvSpPr>
+            <p:cNvPr id="29" name="Rectangle 28"/>
+            <p:cNvSpPr/>
+            <p:nvPr/>
+          </p:nvSpPr>
+          <p:spPr>
+            <a:xfrm>
+              <a:off x="10898730" y="-8467"/>
+              <a:ext cx="1290094" cy="6866467"/>
+            </a:xfrm>
+            <a:custGeom>
+              <a:avLst/>
+              <a:gdLst/>
+              <a:ahLst/>
+              <a:cxnLst/>
+              <a:rect l="l" t="t" r="r" b="b"/>
+              <a:pathLst>
+                <a:path w="1290094" h="6858000">
+                  <a:moveTo>
+                    <a:pt x="1019735" y="0"/>
+                  </a:moveTo>
+                  <a:lnTo>
+                    <a:pt x="1290094" y="0"/>
+                  </a:lnTo>
+                  <a:lnTo>
+                    <a:pt x="1290094" y="6858000"/>
+                  </a:lnTo>
+                  <a:lnTo>
+                    <a:pt x="0" y="6858000"/>
+                  </a:lnTo>
+                  <a:lnTo>
+                    <a:pt x="1019735" y="0"/>
+                  </a:lnTo>
+                  <a:close/>
+                </a:path>
+              </a:pathLst>
+            </a:custGeom>
+            <a:solidFill>
+              <a:schemeClr val="accent1">
+                <a:lumMod val="60000"/>
+                <a:lumOff val="40000"/>
+                <a:alpha val="70000"/>
+              </a:schemeClr>
+            </a:solidFill>
+            <a:ln>
+              <a:noFill/>
+            </a:ln>
+            <a:effectLst/>
+          </p:spPr>
+          <p:style>
+            <a:lnRef idx="1">
+              <a:schemeClr val="accent1"/>
+            </a:lnRef>
+            <a:fillRef idx="3">
+              <a:schemeClr val="accent1"/>
+            </a:fillRef>
+            <a:effectRef idx="2">
+              <a:schemeClr val="accent1"/>
+            </a:effectRef>
+            <a:fontRef idx="minor">
+              <a:schemeClr val="lt1"/>
+            </a:fontRef>
+          </p:style>
+        </p:sp>
+        <p:sp>
+          <p:nvSpPr>
+            <p:cNvPr id="30" name="Rectangle 29"/>
+            <p:cNvSpPr/>
+            <p:nvPr/>
+          </p:nvSpPr>
+          <p:spPr>
+            <a:xfrm>
+              <a:off x="10938999" y="-8467"/>
+              <a:ext cx="1249825" cy="6866467"/>
+            </a:xfrm>
+            <a:custGeom>
+              <a:avLst/>
+              <a:gdLst/>
+              <a:ahLst/>
+              <a:cxnLst/>
+              <a:rect l="l" t="t" r="r" b="b"/>
+              <a:pathLst>
+                <a:path w="1249825" h="6858000">
+                  <a:moveTo>
+                    <a:pt x="0" y="0"/>
+                  </a:moveTo>
+                  <a:lnTo>
+                    <a:pt x="1249825" y="0"/>
+                  </a:lnTo>
+                  <a:lnTo>
+                    <a:pt x="1249825" y="6858000"/>
+                  </a:lnTo>
+                  <a:lnTo>
+                    <a:pt x="1109382" y="6858000"/>
+                  </a:lnTo>
+                  <a:lnTo>
+                    <a:pt x="0" y="0"/>
+                  </a:lnTo>
+                  <a:close/>
+                </a:path>
+              </a:pathLst>
+            </a:custGeom>
+            <a:solidFill>
+              <a:schemeClr val="accent1">
+                <a:alpha val="65000"/>
+              </a:schemeClr>
+            </a:solidFill>
+            <a:ln>
+              <a:noFill/>
+            </a:ln>
+            <a:effectLst/>
+          </p:spPr>
+          <p:style>
+            <a:lnRef idx="1">
+              <a:schemeClr val="accent1"/>
+            </a:lnRef>
+            <a:fillRef idx="3">
+              <a:schemeClr val="accent1"/>
+            </a:fillRef>
+            <a:effectRef idx="2">
+              <a:schemeClr val="accent1"/>
+            </a:effectRef>
+            <a:fontRef idx="minor">
+              <a:schemeClr val="lt1"/>
+            </a:fontRef>
+          </p:style>
+        </p:sp>
+        <p:sp>
+          <p:nvSpPr>
+            <p:cNvPr id="31" name="Isosceles Triangle 30"/>
+            <p:cNvSpPr/>
+            <p:nvPr/>
+          </p:nvSpPr>
+          <p:spPr>
+            <a:xfrm>
+              <a:off x="10371666" y="3589867"/>
+              <a:ext cx="1817159" cy="3268133"/>
+            </a:xfrm>
+            <a:prstGeom prst="triangle">
+              <a:avLst>
+                <a:gd name="adj" fmla="val 100000"/>
+              </a:avLst>
+            </a:prstGeom>
+            <a:solidFill>
+              <a:schemeClr val="accent1">
+                <a:alpha val="80000"/>
+              </a:schemeClr>
+            </a:solidFill>
+            <a:ln>
+              <a:noFill/>
+            </a:ln>
+            <a:effectLst/>
+          </p:spPr>
+          <p:style>
+            <a:lnRef idx="1">
+              <a:schemeClr val="accent1"/>
+            </a:lnRef>
+            <a:fillRef idx="3">
+              <a:schemeClr val="accent1"/>
+            </a:fillRef>
+            <a:effectRef idx="2">
+              <a:schemeClr val="accent1"/>
+            </a:effectRef>
+            <a:fontRef idx="minor">
+              <a:schemeClr val="lt1"/>
+            </a:fontRef>
+          </p:style>
+        </p:sp>
+        <p:sp>
+          <p:nvSpPr>
+            <p:cNvPr id="19" name="Isosceles Triangle 18"/>
+            <p:cNvSpPr/>
+            <p:nvPr/>
+          </p:nvSpPr>
+          <p:spPr>
+            <a:xfrm rot="10800000">
+              <a:off x="0" y="0"/>
+              <a:ext cx="842596" cy="5666154"/>
+            </a:xfrm>
+            <a:prstGeom prst="triangle">
+              <a:avLst>
+                <a:gd name="adj" fmla="val 100000"/>
+              </a:avLst>
+            </a:prstGeom>
+            <a:solidFill>
+              <a:schemeClr val="accent1">
+                <a:alpha val="85000"/>
+              </a:schemeClr>
+            </a:solidFill>
+            <a:ln>
+              <a:noFill/>
+            </a:ln>
+            <a:effectLst/>
+          </p:spPr>
+          <p:style>
+            <a:lnRef idx="1">
+              <a:schemeClr val="accent1"/>
+            </a:lnRef>
+            <a:fillRef idx="3">
+              <a:schemeClr val="accent1"/>
+            </a:fillRef>
+            <a:effectRef idx="2">
+              <a:schemeClr val="accent1"/>
+            </a:effectRef>
+            <a:fontRef idx="minor">
+              <a:schemeClr val="lt1"/>
+            </a:fontRef>
+          </p:style>
+        </p:sp>
+      </p:grpSp>
+      <p:sp>
+        <p:nvSpPr>
+          <p:cNvPr id="2" name="Title 1"/>
           <p:cNvSpPr>
             <a:spLocks noGrp="1"/>
           </p:cNvSpPr>
@@ -142,15 +676,21 @@
         </p:nvSpPr>
         <p:spPr>
           <a:xfrm>
-            <a:off x="1524000" y="1122363"/>
-            <a:ext cx="9144000" cy="2387600"/>
+            <a:off x="1507067" y="2404534"/>
+            <a:ext cx="7766936" cy="1646302"/>
           </a:xfrm>
         </p:spPr>
         <p:txBody>
-          <a:bodyPr anchor="b"/>
+          <a:bodyPr anchor="b">
+            <a:noAutofit/>
+          </a:bodyPr>
           <a:lstStyle>
-            <a:lvl1pPr algn="ctr">
-              <a:defRPr sz="6000"/>
+            <a:lvl1pPr algn="r">
+              <a:defRPr sz="5400">
+                <a:solidFill>
+                  <a:schemeClr val="accent1"/>
+                </a:solidFill>
+              </a:defRPr>
             </a:lvl1pPr>
           </a:lstStyle>
           <a:p>
@@ -158,18 +698,13 @@
               <a:rPr lang="fr-FR"/>
               <a:t>Modifiez le style du titre</a:t>
             </a:r>
-          </a:p>
-        </p:txBody>
-      </p:sp>
-      <p:sp>
-        <p:nvSpPr>
-          <p:cNvPr id="3" name="Sous-titre 2">
-            <a:extLst>
-              <a:ext uri="{FF2B5EF4-FFF2-40B4-BE49-F238E27FC236}">
-                <a16:creationId xmlns:a16="http://schemas.microsoft.com/office/drawing/2014/main" id="{7906735F-4971-558F-0685-2BEF2ECE5FDA}"/>
-              </a:ext>
-            </a:extLst>
-          </p:cNvPr>
+            <a:endParaRPr lang="en-US" dirty="0"/>
+          </a:p>
+        </p:txBody>
+      </p:sp>
+      <p:sp>
+        <p:nvSpPr>
+          <p:cNvPr id="3" name="Subtitle 2"/>
           <p:cNvSpPr>
             <a:spLocks noGrp="1"/>
           </p:cNvSpPr>
@@ -179,48 +714,103 @@
         </p:nvSpPr>
         <p:spPr>
           <a:xfrm>
-            <a:off x="1524000" y="3602038"/>
-            <a:ext cx="9144000" cy="1655762"/>
+            <a:off x="1507067" y="4050833"/>
+            <a:ext cx="7766936" cy="1096899"/>
           </a:xfrm>
         </p:spPr>
         <p:txBody>
-          <a:bodyPr/>
+          <a:bodyPr anchor="t"/>
           <a:lstStyle>
-            <a:lvl1pPr marL="0" indent="0" algn="ctr">
-              <a:buNone/>
-              <a:defRPr sz="2400"/>
+            <a:lvl1pPr marL="0" indent="0" algn="r">
+              <a:buNone/>
+              <a:defRPr>
+                <a:solidFill>
+                  <a:schemeClr val="tx1">
+                    <a:lumMod val="50000"/>
+                    <a:lumOff val="50000"/>
+                  </a:schemeClr>
+                </a:solidFill>
+              </a:defRPr>
             </a:lvl1pPr>
             <a:lvl2pPr marL="457200" indent="0" algn="ctr">
               <a:buNone/>
-              <a:defRPr sz="2000"/>
+              <a:defRPr>
+                <a:solidFill>
+                  <a:schemeClr val="tx1">
+                    <a:tint val="75000"/>
+                  </a:schemeClr>
+                </a:solidFill>
+              </a:defRPr>
             </a:lvl2pPr>
             <a:lvl3pPr marL="914400" indent="0" algn="ctr">
               <a:buNone/>
-              <a:defRPr sz="1800"/>
+              <a:defRPr>
+                <a:solidFill>
+                  <a:schemeClr val="tx1">
+                    <a:tint val="75000"/>
+                  </a:schemeClr>
+                </a:solidFill>
+              </a:defRPr>
             </a:lvl3pPr>
             <a:lvl4pPr marL="1371600" indent="0" algn="ctr">
               <a:buNone/>
-              <a:defRPr sz="1600"/>
+              <a:defRPr>
+                <a:solidFill>
+                  <a:schemeClr val="tx1">
+                    <a:tint val="75000"/>
+                  </a:schemeClr>
+                </a:solidFill>
+              </a:defRPr>
             </a:lvl4pPr>
             <a:lvl5pPr marL="1828800" indent="0" algn="ctr">
               <a:buNone/>
-              <a:defRPr sz="1600"/>
+              <a:defRPr>
+                <a:solidFill>
+                  <a:schemeClr val="tx1">
+                    <a:tint val="75000"/>
+                  </a:schemeClr>
+                </a:solidFill>
+              </a:defRPr>
             </a:lvl5pPr>
             <a:lvl6pPr marL="2286000" indent="0" algn="ctr">
               <a:buNone/>
-              <a:defRPr sz="1600"/>
+              <a:defRPr>
+                <a:solidFill>
+                  <a:schemeClr val="tx1">
+                    <a:tint val="75000"/>
+                  </a:schemeClr>
+                </a:solidFill>
+              </a:defRPr>
             </a:lvl6pPr>
             <a:lvl7pPr marL="2743200" indent="0" algn="ctr">
               <a:buNone/>
-              <a:defRPr sz="1600"/>
+              <a:defRPr>
+                <a:solidFill>
+                  <a:schemeClr val="tx1">
+                    <a:tint val="75000"/>
+                  </a:schemeClr>
+                </a:solidFill>
+              </a:defRPr>
             </a:lvl7pPr>
             <a:lvl8pPr marL="3200400" indent="0" algn="ctr">
               <a:buNone/>
-              <a:defRPr sz="1600"/>
+              <a:defRPr>
+                <a:solidFill>
+                  <a:schemeClr val="tx1">
+                    <a:tint val="75000"/>
+                  </a:schemeClr>
+                </a:solidFill>
+              </a:defRPr>
             </a:lvl8pPr>
             <a:lvl9pPr marL="3657600" indent="0" algn="ctr">
               <a:buNone/>
-              <a:defRPr sz="1600"/>
+              <a:defRPr>
+                <a:solidFill>
+                  <a:schemeClr val="tx1">
+                    <a:tint val="75000"/>
+                  </a:schemeClr>
+                </a:solidFill>
+              </a:defRPr>
             </a:lvl9pPr>
           </a:lstStyle>
           <a:p>
@@ -228,18 +818,13 @@
               <a:rPr lang="fr-FR"/>
               <a:t>Modifiez le style des sous-titres du masque</a:t>
             </a:r>
-          </a:p>
-        </p:txBody>
-      </p:sp>
-      <p:sp>
-        <p:nvSpPr>
-          <p:cNvPr id="4" name="Espace réservé de la date 3">
-            <a:extLst>
-              <a:ext uri="{FF2B5EF4-FFF2-40B4-BE49-F238E27FC236}">
-                <a16:creationId xmlns:a16="http://schemas.microsoft.com/office/drawing/2014/main" id="{27671E6B-53CE-6E2A-98E7-C191AAE0D0C9}"/>
-              </a:ext>
-            </a:extLst>
-          </p:cNvPr>
+            <a:endParaRPr lang="en-US" dirty="0"/>
+          </a:p>
+        </p:txBody>
+      </p:sp>
+      <p:sp>
+        <p:nvSpPr>
+          <p:cNvPr id="4" name="Date Placeholder 3"/>
           <p:cNvSpPr>
             <a:spLocks noGrp="1"/>
           </p:cNvSpPr>
@@ -262,13 +847,7 @@
       </p:sp>
       <p:sp>
         <p:nvSpPr>
-          <p:cNvPr id="5" name="Espace réservé du pied de page 4">
-            <a:extLst>
-              <a:ext uri="{FF2B5EF4-FFF2-40B4-BE49-F238E27FC236}">
-                <a16:creationId xmlns:a16="http://schemas.microsoft.com/office/drawing/2014/main" id="{765A6AC3-AAF2-50FD-55B4-2318217CED20}"/>
-              </a:ext>
-            </a:extLst>
-          </p:cNvPr>
+          <p:cNvPr id="5" name="Footer Placeholder 4"/>
           <p:cNvSpPr>
             <a:spLocks noGrp="1"/>
           </p:cNvSpPr>
@@ -287,13 +866,7 @@
       </p:sp>
       <p:sp>
         <p:nvSpPr>
-          <p:cNvPr id="6" name="Espace réservé du numéro de diapositive 5">
-            <a:extLst>
-              <a:ext uri="{FF2B5EF4-FFF2-40B4-BE49-F238E27FC236}">
-                <a16:creationId xmlns:a16="http://schemas.microsoft.com/office/drawing/2014/main" id="{E9D8F586-4B0E-A020-7DE9-95D52E769F2E}"/>
-              </a:ext>
-            </a:extLst>
-          </p:cNvPr>
+          <p:cNvPr id="6" name="Slide Number Placeholder 5"/>
           <p:cNvSpPr>
             <a:spLocks noGrp="1"/>
           </p:cNvSpPr>
@@ -317,7 +890,7 @@
     </p:spTree>
     <p:extLst>
       <p:ext uri="{BB962C8B-B14F-4D97-AF65-F5344CB8AC3E}">
-        <p14:creationId xmlns:p14="http://schemas.microsoft.com/office/powerpoint/2010/main" val="3238655202"/>
+        <p14:creationId xmlns:p14="http://schemas.microsoft.com/office/powerpoint/2010/main" val="1035143143"/>
       </p:ext>
     </p:extLst>
   </p:cSld>
@@ -328,6 +901,1619 @@
 </file>
 
 <file path=ppt/slideLayouts/slideLayout10.xml><?xml version="1.0" encoding="utf-8"?>
+<p:sldLayout xmlns:a="http://schemas.openxmlformats.org/drawingml/2006/main" xmlns:r="http://schemas.openxmlformats.org/officeDocument/2006/relationships" xmlns:p="http://schemas.openxmlformats.org/presentationml/2006/main" preserve="1">
+  <p:cSld name="Titre et légende">
+    <p:spTree>
+      <p:nvGrpSpPr>
+        <p:cNvPr id="1" name=""/>
+        <p:cNvGrpSpPr/>
+        <p:nvPr/>
+      </p:nvGrpSpPr>
+      <p:grpSpPr>
+        <a:xfrm>
+          <a:off x="0" y="0"/>
+          <a:ext cx="0" cy="0"/>
+          <a:chOff x="0" y="0"/>
+          <a:chExt cx="0" cy="0"/>
+        </a:xfrm>
+      </p:grpSpPr>
+      <p:sp>
+        <p:nvSpPr>
+          <p:cNvPr id="2" name="Title 1"/>
+          <p:cNvSpPr>
+            <a:spLocks noGrp="1"/>
+          </p:cNvSpPr>
+          <p:nvPr>
+            <p:ph type="title"/>
+          </p:nvPr>
+        </p:nvSpPr>
+        <p:spPr>
+          <a:xfrm>
+            <a:off x="677335" y="609600"/>
+            <a:ext cx="8596668" cy="3403600"/>
+          </a:xfrm>
+        </p:spPr>
+        <p:txBody>
+          <a:bodyPr anchor="ctr">
+            <a:normAutofit/>
+          </a:bodyPr>
+          <a:lstStyle>
+            <a:lvl1pPr algn="l">
+              <a:defRPr sz="4400" b="0" cap="none"/>
+            </a:lvl1pPr>
+          </a:lstStyle>
+          <a:p>
+            <a:r>
+              <a:rPr lang="fr-FR"/>
+              <a:t>Modifiez le style du titre</a:t>
+            </a:r>
+            <a:endParaRPr lang="en-US" dirty="0"/>
+          </a:p>
+        </p:txBody>
+      </p:sp>
+      <p:sp>
+        <p:nvSpPr>
+          <p:cNvPr id="3" name="Text Placeholder 2"/>
+          <p:cNvSpPr>
+            <a:spLocks noGrp="1"/>
+          </p:cNvSpPr>
+          <p:nvPr>
+            <p:ph type="body" idx="1"/>
+          </p:nvPr>
+        </p:nvSpPr>
+        <p:spPr>
+          <a:xfrm>
+            <a:off x="677335" y="4470400"/>
+            <a:ext cx="8596668" cy="1570962"/>
+          </a:xfrm>
+        </p:spPr>
+        <p:txBody>
+          <a:bodyPr anchor="ctr">
+            <a:normAutofit/>
+          </a:bodyPr>
+          <a:lstStyle>
+            <a:lvl1pPr marL="0" indent="0" algn="l">
+              <a:buNone/>
+              <a:defRPr sz="1800">
+                <a:solidFill>
+                  <a:schemeClr val="tx1">
+                    <a:lumMod val="75000"/>
+                    <a:lumOff val="25000"/>
+                  </a:schemeClr>
+                </a:solidFill>
+              </a:defRPr>
+            </a:lvl1pPr>
+            <a:lvl2pPr marL="457200" indent="0">
+              <a:buNone/>
+              <a:defRPr sz="1800">
+                <a:solidFill>
+                  <a:schemeClr val="tx1">
+                    <a:tint val="75000"/>
+                  </a:schemeClr>
+                </a:solidFill>
+              </a:defRPr>
+            </a:lvl2pPr>
+            <a:lvl3pPr marL="914400" indent="0">
+              <a:buNone/>
+              <a:defRPr sz="1600">
+                <a:solidFill>
+                  <a:schemeClr val="tx1">
+                    <a:tint val="75000"/>
+                  </a:schemeClr>
+                </a:solidFill>
+              </a:defRPr>
+            </a:lvl3pPr>
+            <a:lvl4pPr marL="1371600" indent="0">
+              <a:buNone/>
+              <a:defRPr sz="1400">
+                <a:solidFill>
+                  <a:schemeClr val="tx1">
+                    <a:tint val="75000"/>
+                  </a:schemeClr>
+                </a:solidFill>
+              </a:defRPr>
+            </a:lvl4pPr>
+            <a:lvl5pPr marL="1828800" indent="0">
+              <a:buNone/>
+              <a:defRPr sz="1400">
+                <a:solidFill>
+                  <a:schemeClr val="tx1">
+                    <a:tint val="75000"/>
+                  </a:schemeClr>
+                </a:solidFill>
+              </a:defRPr>
+            </a:lvl5pPr>
+            <a:lvl6pPr marL="2286000" indent="0">
+              <a:buNone/>
+              <a:defRPr sz="1400">
+                <a:solidFill>
+                  <a:schemeClr val="tx1">
+                    <a:tint val="75000"/>
+                  </a:schemeClr>
+                </a:solidFill>
+              </a:defRPr>
+            </a:lvl6pPr>
+            <a:lvl7pPr marL="2743200" indent="0">
+              <a:buNone/>
+              <a:defRPr sz="1400">
+                <a:solidFill>
+                  <a:schemeClr val="tx1">
+                    <a:tint val="75000"/>
+                  </a:schemeClr>
+                </a:solidFill>
+              </a:defRPr>
+            </a:lvl7pPr>
+            <a:lvl8pPr marL="3200400" indent="0">
+              <a:buNone/>
+              <a:defRPr sz="1400">
+                <a:solidFill>
+                  <a:schemeClr val="tx1">
+                    <a:tint val="75000"/>
+                  </a:schemeClr>
+                </a:solidFill>
+              </a:defRPr>
+            </a:lvl8pPr>
+            <a:lvl9pPr marL="3657600" indent="0">
+              <a:buNone/>
+              <a:defRPr sz="1400">
+                <a:solidFill>
+                  <a:schemeClr val="tx1">
+                    <a:tint val="75000"/>
+                  </a:schemeClr>
+                </a:solidFill>
+              </a:defRPr>
+            </a:lvl9pPr>
+          </a:lstStyle>
+          <a:p>
+            <a:pPr lvl="0"/>
+            <a:r>
+              <a:rPr lang="fr-FR"/>
+              <a:t>Cliquez pour modifier les styles du texte du masque</a:t>
+            </a:r>
+          </a:p>
+        </p:txBody>
+      </p:sp>
+      <p:sp>
+        <p:nvSpPr>
+          <p:cNvPr id="4" name="Date Placeholder 3"/>
+          <p:cNvSpPr>
+            <a:spLocks noGrp="1"/>
+          </p:cNvSpPr>
+          <p:nvPr>
+            <p:ph type="dt" sz="half" idx="10"/>
+          </p:nvPr>
+        </p:nvSpPr>
+        <p:spPr/>
+        <p:txBody>
+          <a:bodyPr/>
+          <a:lstStyle/>
+          <a:p>
+            <a:fld id="{3BA94F33-6080-47D9-B8B5-681216ACC957}" type="datetimeFigureOut">
+              <a:rPr lang="fr-FR" smtClean="0"/>
+              <a:t>17/06/2026</a:t>
+            </a:fld>
+            <a:endParaRPr lang="fr-FR"/>
+          </a:p>
+        </p:txBody>
+      </p:sp>
+      <p:sp>
+        <p:nvSpPr>
+          <p:cNvPr id="5" name="Footer Placeholder 4"/>
+          <p:cNvSpPr>
+            <a:spLocks noGrp="1"/>
+          </p:cNvSpPr>
+          <p:nvPr>
+            <p:ph type="ftr" sz="quarter" idx="11"/>
+          </p:nvPr>
+        </p:nvSpPr>
+        <p:spPr/>
+        <p:txBody>
+          <a:bodyPr/>
+          <a:lstStyle/>
+          <a:p>
+            <a:endParaRPr lang="fr-FR"/>
+          </a:p>
+        </p:txBody>
+      </p:sp>
+      <p:sp>
+        <p:nvSpPr>
+          <p:cNvPr id="6" name="Slide Number Placeholder 5"/>
+          <p:cNvSpPr>
+            <a:spLocks noGrp="1"/>
+          </p:cNvSpPr>
+          <p:nvPr>
+            <p:ph type="sldNum" sz="quarter" idx="12"/>
+          </p:nvPr>
+        </p:nvSpPr>
+        <p:spPr/>
+        <p:txBody>
+          <a:bodyPr/>
+          <a:lstStyle/>
+          <a:p>
+            <a:fld id="{93D90F89-4B1F-4F5D-8426-D4D6BAAE4DDE}" type="slidenum">
+              <a:rPr lang="fr-FR" smtClean="0"/>
+              <a:t>‹N°›</a:t>
+            </a:fld>
+            <a:endParaRPr lang="fr-FR"/>
+          </a:p>
+        </p:txBody>
+      </p:sp>
+    </p:spTree>
+    <p:extLst>
+      <p:ext uri="{BB962C8B-B14F-4D97-AF65-F5344CB8AC3E}">
+        <p14:creationId xmlns:p14="http://schemas.microsoft.com/office/powerpoint/2010/main" val="3754653227"/>
+      </p:ext>
+    </p:extLst>
+  </p:cSld>
+  <p:clrMapOvr>
+    <a:masterClrMapping/>
+  </p:clrMapOvr>
+</p:sldLayout>
+</file>
+
+<file path=ppt/slideLayouts/slideLayout11.xml><?xml version="1.0" encoding="utf-8"?>
+<p:sldLayout xmlns:a="http://schemas.openxmlformats.org/drawingml/2006/main" xmlns:r="http://schemas.openxmlformats.org/officeDocument/2006/relationships" xmlns:p="http://schemas.openxmlformats.org/presentationml/2006/main" preserve="1">
+  <p:cSld name="Citation avec légende">
+    <p:spTree>
+      <p:nvGrpSpPr>
+        <p:cNvPr id="1" name=""/>
+        <p:cNvGrpSpPr/>
+        <p:nvPr/>
+      </p:nvGrpSpPr>
+      <p:grpSpPr>
+        <a:xfrm>
+          <a:off x="0" y="0"/>
+          <a:ext cx="0" cy="0"/>
+          <a:chOff x="0" y="0"/>
+          <a:chExt cx="0" cy="0"/>
+        </a:xfrm>
+      </p:grpSpPr>
+      <p:sp>
+        <p:nvSpPr>
+          <p:cNvPr id="2" name="Title 1"/>
+          <p:cNvSpPr>
+            <a:spLocks noGrp="1"/>
+          </p:cNvSpPr>
+          <p:nvPr>
+            <p:ph type="title"/>
+          </p:nvPr>
+        </p:nvSpPr>
+        <p:spPr>
+          <a:xfrm>
+            <a:off x="931334" y="609600"/>
+            <a:ext cx="8094134" cy="3022600"/>
+          </a:xfrm>
+        </p:spPr>
+        <p:txBody>
+          <a:bodyPr anchor="ctr">
+            <a:normAutofit/>
+          </a:bodyPr>
+          <a:lstStyle>
+            <a:lvl1pPr algn="l">
+              <a:defRPr sz="4400" b="0" cap="none"/>
+            </a:lvl1pPr>
+          </a:lstStyle>
+          <a:p>
+            <a:r>
+              <a:rPr lang="fr-FR"/>
+              <a:t>Modifiez le style du titre</a:t>
+            </a:r>
+            <a:endParaRPr lang="en-US" dirty="0"/>
+          </a:p>
+        </p:txBody>
+      </p:sp>
+      <p:sp>
+        <p:nvSpPr>
+          <p:cNvPr id="23" name="Text Placeholder 9"/>
+          <p:cNvSpPr>
+            <a:spLocks noGrp="1"/>
+          </p:cNvSpPr>
+          <p:nvPr>
+            <p:ph type="body" sz="quarter" idx="13"/>
+          </p:nvPr>
+        </p:nvSpPr>
+        <p:spPr>
+          <a:xfrm>
+            <a:off x="1366139" y="3632200"/>
+            <a:ext cx="7224524" cy="381000"/>
+          </a:xfrm>
+        </p:spPr>
+        <p:txBody>
+          <a:bodyPr anchor="ctr">
+            <a:noAutofit/>
+          </a:bodyPr>
+          <a:lstStyle>
+            <a:lvl1pPr marL="0" indent="0">
+              <a:buFontTx/>
+              <a:buNone/>
+              <a:defRPr sz="1600">
+                <a:solidFill>
+                  <a:schemeClr val="tx1">
+                    <a:lumMod val="50000"/>
+                    <a:lumOff val="50000"/>
+                  </a:schemeClr>
+                </a:solidFill>
+              </a:defRPr>
+            </a:lvl1pPr>
+            <a:lvl2pPr marL="457200" indent="0">
+              <a:buFontTx/>
+              <a:buNone/>
+              <a:defRPr/>
+            </a:lvl2pPr>
+            <a:lvl3pPr marL="914400" indent="0">
+              <a:buFontTx/>
+              <a:buNone/>
+              <a:defRPr/>
+            </a:lvl3pPr>
+            <a:lvl4pPr marL="1371600" indent="0">
+              <a:buFontTx/>
+              <a:buNone/>
+              <a:defRPr/>
+            </a:lvl4pPr>
+            <a:lvl5pPr marL="1828800" indent="0">
+              <a:buFontTx/>
+              <a:buNone/>
+              <a:defRPr/>
+            </a:lvl5pPr>
+          </a:lstStyle>
+          <a:p>
+            <a:pPr lvl="0"/>
+            <a:r>
+              <a:rPr lang="fr-FR"/>
+              <a:t>Cliquez pour modifier les styles du texte du masque</a:t>
+            </a:r>
+          </a:p>
+        </p:txBody>
+      </p:sp>
+      <p:sp>
+        <p:nvSpPr>
+          <p:cNvPr id="3" name="Text Placeholder 2"/>
+          <p:cNvSpPr>
+            <a:spLocks noGrp="1"/>
+          </p:cNvSpPr>
+          <p:nvPr>
+            <p:ph type="body" idx="1"/>
+          </p:nvPr>
+        </p:nvSpPr>
+        <p:spPr>
+          <a:xfrm>
+            <a:off x="677335" y="4470400"/>
+            <a:ext cx="8596668" cy="1570962"/>
+          </a:xfrm>
+        </p:spPr>
+        <p:txBody>
+          <a:bodyPr anchor="ctr">
+            <a:normAutofit/>
+          </a:bodyPr>
+          <a:lstStyle>
+            <a:lvl1pPr marL="0" indent="0" algn="l">
+              <a:buNone/>
+              <a:defRPr sz="1800">
+                <a:solidFill>
+                  <a:schemeClr val="tx1">
+                    <a:lumMod val="75000"/>
+                    <a:lumOff val="25000"/>
+                  </a:schemeClr>
+                </a:solidFill>
+              </a:defRPr>
+            </a:lvl1pPr>
+            <a:lvl2pPr marL="457200" indent="0">
+              <a:buNone/>
+              <a:defRPr sz="1800">
+                <a:solidFill>
+                  <a:schemeClr val="tx1">
+                    <a:tint val="75000"/>
+                  </a:schemeClr>
+                </a:solidFill>
+              </a:defRPr>
+            </a:lvl2pPr>
+            <a:lvl3pPr marL="914400" indent="0">
+              <a:buNone/>
+              <a:defRPr sz="1600">
+                <a:solidFill>
+                  <a:schemeClr val="tx1">
+                    <a:tint val="75000"/>
+                  </a:schemeClr>
+                </a:solidFill>
+              </a:defRPr>
+            </a:lvl3pPr>
+            <a:lvl4pPr marL="1371600" indent="0">
+              <a:buNone/>
+              <a:defRPr sz="1400">
+                <a:solidFill>
+                  <a:schemeClr val="tx1">
+                    <a:tint val="75000"/>
+                  </a:schemeClr>
+                </a:solidFill>
+              </a:defRPr>
+            </a:lvl4pPr>
+            <a:lvl5pPr marL="1828800" indent="0">
+              <a:buNone/>
+              <a:defRPr sz="1400">
+                <a:solidFill>
+                  <a:schemeClr val="tx1">
+                    <a:tint val="75000"/>
+                  </a:schemeClr>
+                </a:solidFill>
+              </a:defRPr>
+            </a:lvl5pPr>
+            <a:lvl6pPr marL="2286000" indent="0">
+              <a:buNone/>
+              <a:defRPr sz="1400">
+                <a:solidFill>
+                  <a:schemeClr val="tx1">
+                    <a:tint val="75000"/>
+                  </a:schemeClr>
+                </a:solidFill>
+              </a:defRPr>
+            </a:lvl6pPr>
+            <a:lvl7pPr marL="2743200" indent="0">
+              <a:buNone/>
+              <a:defRPr sz="1400">
+                <a:solidFill>
+                  <a:schemeClr val="tx1">
+                    <a:tint val="75000"/>
+                  </a:schemeClr>
+                </a:solidFill>
+              </a:defRPr>
+            </a:lvl7pPr>
+            <a:lvl8pPr marL="3200400" indent="0">
+              <a:buNone/>
+              <a:defRPr sz="1400">
+                <a:solidFill>
+                  <a:schemeClr val="tx1">
+                    <a:tint val="75000"/>
+                  </a:schemeClr>
+                </a:solidFill>
+              </a:defRPr>
+            </a:lvl8pPr>
+            <a:lvl9pPr marL="3657600" indent="0">
+              <a:buNone/>
+              <a:defRPr sz="1400">
+                <a:solidFill>
+                  <a:schemeClr val="tx1">
+                    <a:tint val="75000"/>
+                  </a:schemeClr>
+                </a:solidFill>
+              </a:defRPr>
+            </a:lvl9pPr>
+          </a:lstStyle>
+          <a:p>
+            <a:pPr lvl="0"/>
+            <a:r>
+              <a:rPr lang="fr-FR"/>
+              <a:t>Cliquez pour modifier les styles du texte du masque</a:t>
+            </a:r>
+          </a:p>
+        </p:txBody>
+      </p:sp>
+      <p:sp>
+        <p:nvSpPr>
+          <p:cNvPr id="4" name="Date Placeholder 3"/>
+          <p:cNvSpPr>
+            <a:spLocks noGrp="1"/>
+          </p:cNvSpPr>
+          <p:nvPr>
+            <p:ph type="dt" sz="half" idx="10"/>
+          </p:nvPr>
+        </p:nvSpPr>
+        <p:spPr/>
+        <p:txBody>
+          <a:bodyPr/>
+          <a:lstStyle/>
+          <a:p>
+            <a:fld id="{3BA94F33-6080-47D9-B8B5-681216ACC957}" type="datetimeFigureOut">
+              <a:rPr lang="fr-FR" smtClean="0"/>
+              <a:t>17/06/2026</a:t>
+            </a:fld>
+            <a:endParaRPr lang="fr-FR"/>
+          </a:p>
+        </p:txBody>
+      </p:sp>
+      <p:sp>
+        <p:nvSpPr>
+          <p:cNvPr id="5" name="Footer Placeholder 4"/>
+          <p:cNvSpPr>
+            <a:spLocks noGrp="1"/>
+          </p:cNvSpPr>
+          <p:nvPr>
+            <p:ph type="ftr" sz="quarter" idx="11"/>
+          </p:nvPr>
+        </p:nvSpPr>
+        <p:spPr/>
+        <p:txBody>
+          <a:bodyPr/>
+          <a:lstStyle/>
+          <a:p>
+            <a:endParaRPr lang="fr-FR"/>
+          </a:p>
+        </p:txBody>
+      </p:sp>
+      <p:sp>
+        <p:nvSpPr>
+          <p:cNvPr id="6" name="Slide Number Placeholder 5"/>
+          <p:cNvSpPr>
+            <a:spLocks noGrp="1"/>
+          </p:cNvSpPr>
+          <p:nvPr>
+            <p:ph type="sldNum" sz="quarter" idx="12"/>
+          </p:nvPr>
+        </p:nvSpPr>
+        <p:spPr/>
+        <p:txBody>
+          <a:bodyPr/>
+          <a:lstStyle/>
+          <a:p>
+            <a:fld id="{93D90F89-4B1F-4F5D-8426-D4D6BAAE4DDE}" type="slidenum">
+              <a:rPr lang="fr-FR" smtClean="0"/>
+              <a:t>‹N°›</a:t>
+            </a:fld>
+            <a:endParaRPr lang="fr-FR"/>
+          </a:p>
+        </p:txBody>
+      </p:sp>
+      <p:sp>
+        <p:nvSpPr>
+          <p:cNvPr id="20" name="TextBox 19"/>
+          <p:cNvSpPr txBox="1"/>
+          <p:nvPr/>
+        </p:nvSpPr>
+        <p:spPr>
+          <a:xfrm>
+            <a:off x="541870" y="790378"/>
+            <a:ext cx="609600" cy="584776"/>
+          </a:xfrm>
+          <a:prstGeom prst="rect">
+            <a:avLst/>
+          </a:prstGeom>
+        </p:spPr>
+        <p:txBody>
+          <a:bodyPr vert="horz" lIns="91440" tIns="45720" rIns="91440" bIns="45720" rtlCol="0" anchor="ctr">
+            <a:noAutofit/>
+          </a:bodyPr>
+          <a:lstStyle/>
+          <a:p>
+            <a:pPr lvl="0"/>
+            <a:r>
+              <a:rPr lang="en-US" sz="8000" baseline="0" dirty="0">
+                <a:ln w="3175" cmpd="sng">
+                  <a:noFill/>
+                </a:ln>
+                <a:solidFill>
+                  <a:schemeClr val="accent1">
+                    <a:lumMod val="60000"/>
+                    <a:lumOff val="40000"/>
+                  </a:schemeClr>
+                </a:solidFill>
+                <a:effectLst/>
+                <a:latin typeface="Arial"/>
+              </a:rPr>
+              <a:t>“</a:t>
+            </a:r>
+          </a:p>
+        </p:txBody>
+      </p:sp>
+      <p:sp>
+        <p:nvSpPr>
+          <p:cNvPr id="22" name="TextBox 21"/>
+          <p:cNvSpPr txBox="1"/>
+          <p:nvPr/>
+        </p:nvSpPr>
+        <p:spPr>
+          <a:xfrm>
+            <a:off x="8893011" y="2886556"/>
+            <a:ext cx="609600" cy="584776"/>
+          </a:xfrm>
+          <a:prstGeom prst="rect">
+            <a:avLst/>
+          </a:prstGeom>
+        </p:spPr>
+        <p:txBody>
+          <a:bodyPr vert="horz" lIns="91440" tIns="45720" rIns="91440" bIns="45720" rtlCol="0" anchor="ctr">
+            <a:noAutofit/>
+          </a:bodyPr>
+          <a:lstStyle/>
+          <a:p>
+            <a:pPr lvl="0"/>
+            <a:r>
+              <a:rPr lang="en-US" sz="8000" baseline="0" dirty="0">
+                <a:ln w="3175" cmpd="sng">
+                  <a:noFill/>
+                </a:ln>
+                <a:solidFill>
+                  <a:schemeClr val="accent1">
+                    <a:lumMod val="60000"/>
+                    <a:lumOff val="40000"/>
+                  </a:schemeClr>
+                </a:solidFill>
+                <a:latin typeface="Arial"/>
+              </a:rPr>
+              <a:t>”</a:t>
+            </a:r>
+            <a:endParaRPr lang="en-US" dirty="0">
+              <a:solidFill>
+                <a:schemeClr val="accent1">
+                  <a:lumMod val="60000"/>
+                  <a:lumOff val="40000"/>
+                </a:schemeClr>
+              </a:solidFill>
+              <a:latin typeface="Arial"/>
+            </a:endParaRPr>
+          </a:p>
+        </p:txBody>
+      </p:sp>
+    </p:spTree>
+    <p:extLst>
+      <p:ext uri="{BB962C8B-B14F-4D97-AF65-F5344CB8AC3E}">
+        <p14:creationId xmlns:p14="http://schemas.microsoft.com/office/powerpoint/2010/main" val="4292087516"/>
+      </p:ext>
+    </p:extLst>
+  </p:cSld>
+  <p:clrMapOvr>
+    <a:masterClrMapping/>
+  </p:clrMapOvr>
+</p:sldLayout>
+</file>
+
+<file path=ppt/slideLayouts/slideLayout12.xml><?xml version="1.0" encoding="utf-8"?>
+<p:sldLayout xmlns:a="http://schemas.openxmlformats.org/drawingml/2006/main" xmlns:r="http://schemas.openxmlformats.org/officeDocument/2006/relationships" xmlns:p="http://schemas.openxmlformats.org/presentationml/2006/main" preserve="1">
+  <p:cSld name="Carte nom">
+    <p:spTree>
+      <p:nvGrpSpPr>
+        <p:cNvPr id="1" name=""/>
+        <p:cNvGrpSpPr/>
+        <p:nvPr/>
+      </p:nvGrpSpPr>
+      <p:grpSpPr>
+        <a:xfrm>
+          <a:off x="0" y="0"/>
+          <a:ext cx="0" cy="0"/>
+          <a:chOff x="0" y="0"/>
+          <a:chExt cx="0" cy="0"/>
+        </a:xfrm>
+      </p:grpSpPr>
+      <p:sp>
+        <p:nvSpPr>
+          <p:cNvPr id="2" name="Title 1"/>
+          <p:cNvSpPr>
+            <a:spLocks noGrp="1"/>
+          </p:cNvSpPr>
+          <p:nvPr>
+            <p:ph type="title"/>
+          </p:nvPr>
+        </p:nvSpPr>
+        <p:spPr>
+          <a:xfrm>
+            <a:off x="677335" y="1931988"/>
+            <a:ext cx="8596668" cy="2595460"/>
+          </a:xfrm>
+        </p:spPr>
+        <p:txBody>
+          <a:bodyPr anchor="b">
+            <a:normAutofit/>
+          </a:bodyPr>
+          <a:lstStyle>
+            <a:lvl1pPr algn="l">
+              <a:defRPr sz="4400" b="0" cap="none"/>
+            </a:lvl1pPr>
+          </a:lstStyle>
+          <a:p>
+            <a:r>
+              <a:rPr lang="fr-FR"/>
+              <a:t>Modifiez le style du titre</a:t>
+            </a:r>
+            <a:endParaRPr lang="en-US" dirty="0"/>
+          </a:p>
+        </p:txBody>
+      </p:sp>
+      <p:sp>
+        <p:nvSpPr>
+          <p:cNvPr id="3" name="Text Placeholder 2"/>
+          <p:cNvSpPr>
+            <a:spLocks noGrp="1"/>
+          </p:cNvSpPr>
+          <p:nvPr>
+            <p:ph type="body" idx="1"/>
+          </p:nvPr>
+        </p:nvSpPr>
+        <p:spPr>
+          <a:xfrm>
+            <a:off x="677335" y="4527448"/>
+            <a:ext cx="8596668" cy="1513914"/>
+          </a:xfrm>
+        </p:spPr>
+        <p:txBody>
+          <a:bodyPr anchor="t">
+            <a:normAutofit/>
+          </a:bodyPr>
+          <a:lstStyle>
+            <a:lvl1pPr marL="0" indent="0" algn="l">
+              <a:buNone/>
+              <a:defRPr sz="1800">
+                <a:solidFill>
+                  <a:schemeClr val="tx1">
+                    <a:lumMod val="75000"/>
+                    <a:lumOff val="25000"/>
+                  </a:schemeClr>
+                </a:solidFill>
+              </a:defRPr>
+            </a:lvl1pPr>
+            <a:lvl2pPr marL="457200" indent="0">
+              <a:buNone/>
+              <a:defRPr sz="1800">
+                <a:solidFill>
+                  <a:schemeClr val="tx1">
+                    <a:tint val="75000"/>
+                  </a:schemeClr>
+                </a:solidFill>
+              </a:defRPr>
+            </a:lvl2pPr>
+            <a:lvl3pPr marL="914400" indent="0">
+              <a:buNone/>
+              <a:defRPr sz="1600">
+                <a:solidFill>
+                  <a:schemeClr val="tx1">
+                    <a:tint val="75000"/>
+                  </a:schemeClr>
+                </a:solidFill>
+              </a:defRPr>
+            </a:lvl3pPr>
+            <a:lvl4pPr marL="1371600" indent="0">
+              <a:buNone/>
+              <a:defRPr sz="1400">
+                <a:solidFill>
+                  <a:schemeClr val="tx1">
+                    <a:tint val="75000"/>
+                  </a:schemeClr>
+                </a:solidFill>
+              </a:defRPr>
+            </a:lvl4pPr>
+            <a:lvl5pPr marL="1828800" indent="0">
+              <a:buNone/>
+              <a:defRPr sz="1400">
+                <a:solidFill>
+                  <a:schemeClr val="tx1">
+                    <a:tint val="75000"/>
+                  </a:schemeClr>
+                </a:solidFill>
+              </a:defRPr>
+            </a:lvl5pPr>
+            <a:lvl6pPr marL="2286000" indent="0">
+              <a:buNone/>
+              <a:defRPr sz="1400">
+                <a:solidFill>
+                  <a:schemeClr val="tx1">
+                    <a:tint val="75000"/>
+                  </a:schemeClr>
+                </a:solidFill>
+              </a:defRPr>
+            </a:lvl6pPr>
+            <a:lvl7pPr marL="2743200" indent="0">
+              <a:buNone/>
+              <a:defRPr sz="1400">
+                <a:solidFill>
+                  <a:schemeClr val="tx1">
+                    <a:tint val="75000"/>
+                  </a:schemeClr>
+                </a:solidFill>
+              </a:defRPr>
+            </a:lvl7pPr>
+            <a:lvl8pPr marL="3200400" indent="0">
+              <a:buNone/>
+              <a:defRPr sz="1400">
+                <a:solidFill>
+                  <a:schemeClr val="tx1">
+                    <a:tint val="75000"/>
+                  </a:schemeClr>
+                </a:solidFill>
+              </a:defRPr>
+            </a:lvl8pPr>
+            <a:lvl9pPr marL="3657600" indent="0">
+              <a:buNone/>
+              <a:defRPr sz="1400">
+                <a:solidFill>
+                  <a:schemeClr val="tx1">
+                    <a:tint val="75000"/>
+                  </a:schemeClr>
+                </a:solidFill>
+              </a:defRPr>
+            </a:lvl9pPr>
+          </a:lstStyle>
+          <a:p>
+            <a:pPr lvl="0"/>
+            <a:r>
+              <a:rPr lang="fr-FR"/>
+              <a:t>Cliquez pour modifier les styles du texte du masque</a:t>
+            </a:r>
+          </a:p>
+        </p:txBody>
+      </p:sp>
+      <p:sp>
+        <p:nvSpPr>
+          <p:cNvPr id="4" name="Date Placeholder 3"/>
+          <p:cNvSpPr>
+            <a:spLocks noGrp="1"/>
+          </p:cNvSpPr>
+          <p:nvPr>
+            <p:ph type="dt" sz="half" idx="10"/>
+          </p:nvPr>
+        </p:nvSpPr>
+        <p:spPr/>
+        <p:txBody>
+          <a:bodyPr/>
+          <a:lstStyle/>
+          <a:p>
+            <a:fld id="{3BA94F33-6080-47D9-B8B5-681216ACC957}" type="datetimeFigureOut">
+              <a:rPr lang="fr-FR" smtClean="0"/>
+              <a:t>17/06/2026</a:t>
+            </a:fld>
+            <a:endParaRPr lang="fr-FR"/>
+          </a:p>
+        </p:txBody>
+      </p:sp>
+      <p:sp>
+        <p:nvSpPr>
+          <p:cNvPr id="5" name="Footer Placeholder 4"/>
+          <p:cNvSpPr>
+            <a:spLocks noGrp="1"/>
+          </p:cNvSpPr>
+          <p:nvPr>
+            <p:ph type="ftr" sz="quarter" idx="11"/>
+          </p:nvPr>
+        </p:nvSpPr>
+        <p:spPr/>
+        <p:txBody>
+          <a:bodyPr/>
+          <a:lstStyle/>
+          <a:p>
+            <a:endParaRPr lang="fr-FR"/>
+          </a:p>
+        </p:txBody>
+      </p:sp>
+      <p:sp>
+        <p:nvSpPr>
+          <p:cNvPr id="6" name="Slide Number Placeholder 5"/>
+          <p:cNvSpPr>
+            <a:spLocks noGrp="1"/>
+          </p:cNvSpPr>
+          <p:nvPr>
+            <p:ph type="sldNum" sz="quarter" idx="12"/>
+          </p:nvPr>
+        </p:nvSpPr>
+        <p:spPr/>
+        <p:txBody>
+          <a:bodyPr/>
+          <a:lstStyle/>
+          <a:p>
+            <a:fld id="{93D90F89-4B1F-4F5D-8426-D4D6BAAE4DDE}" type="slidenum">
+              <a:rPr lang="fr-FR" smtClean="0"/>
+              <a:t>‹N°›</a:t>
+            </a:fld>
+            <a:endParaRPr lang="fr-FR"/>
+          </a:p>
+        </p:txBody>
+      </p:sp>
+    </p:spTree>
+    <p:extLst>
+      <p:ext uri="{BB962C8B-B14F-4D97-AF65-F5344CB8AC3E}">
+        <p14:creationId xmlns:p14="http://schemas.microsoft.com/office/powerpoint/2010/main" val="70359325"/>
+      </p:ext>
+    </p:extLst>
+  </p:cSld>
+  <p:clrMapOvr>
+    <a:masterClrMapping/>
+  </p:clrMapOvr>
+</p:sldLayout>
+</file>
+
+<file path=ppt/slideLayouts/slideLayout13.xml><?xml version="1.0" encoding="utf-8"?>
+<p:sldLayout xmlns:a="http://schemas.openxmlformats.org/drawingml/2006/main" xmlns:r="http://schemas.openxmlformats.org/officeDocument/2006/relationships" xmlns:p="http://schemas.openxmlformats.org/presentationml/2006/main" preserve="1">
+  <p:cSld name="Carte nom citation">
+    <p:spTree>
+      <p:nvGrpSpPr>
+        <p:cNvPr id="1" name=""/>
+        <p:cNvGrpSpPr/>
+        <p:nvPr/>
+      </p:nvGrpSpPr>
+      <p:grpSpPr>
+        <a:xfrm>
+          <a:off x="0" y="0"/>
+          <a:ext cx="0" cy="0"/>
+          <a:chOff x="0" y="0"/>
+          <a:chExt cx="0" cy="0"/>
+        </a:xfrm>
+      </p:grpSpPr>
+      <p:sp>
+        <p:nvSpPr>
+          <p:cNvPr id="2" name="Title 1"/>
+          <p:cNvSpPr>
+            <a:spLocks noGrp="1"/>
+          </p:cNvSpPr>
+          <p:nvPr>
+            <p:ph type="title"/>
+          </p:nvPr>
+        </p:nvSpPr>
+        <p:spPr>
+          <a:xfrm>
+            <a:off x="931334" y="609600"/>
+            <a:ext cx="8094134" cy="3022600"/>
+          </a:xfrm>
+        </p:spPr>
+        <p:txBody>
+          <a:bodyPr anchor="ctr">
+            <a:normAutofit/>
+          </a:bodyPr>
+          <a:lstStyle>
+            <a:lvl1pPr algn="l">
+              <a:defRPr sz="4400" b="0" cap="none"/>
+            </a:lvl1pPr>
+          </a:lstStyle>
+          <a:p>
+            <a:r>
+              <a:rPr lang="fr-FR"/>
+              <a:t>Modifiez le style du titre</a:t>
+            </a:r>
+            <a:endParaRPr lang="en-US" dirty="0"/>
+          </a:p>
+        </p:txBody>
+      </p:sp>
+      <p:sp>
+        <p:nvSpPr>
+          <p:cNvPr id="23" name="Text Placeholder 9"/>
+          <p:cNvSpPr>
+            <a:spLocks noGrp="1"/>
+          </p:cNvSpPr>
+          <p:nvPr>
+            <p:ph type="body" sz="quarter" idx="13"/>
+          </p:nvPr>
+        </p:nvSpPr>
+        <p:spPr>
+          <a:xfrm>
+            <a:off x="677332" y="4013200"/>
+            <a:ext cx="8596669" cy="514248"/>
+          </a:xfrm>
+        </p:spPr>
+        <p:txBody>
+          <a:bodyPr anchor="b">
+            <a:noAutofit/>
+          </a:bodyPr>
+          <a:lstStyle>
+            <a:lvl1pPr marL="0" indent="0">
+              <a:buFontTx/>
+              <a:buNone/>
+              <a:defRPr sz="2400">
+                <a:solidFill>
+                  <a:schemeClr val="tx1">
+                    <a:lumMod val="75000"/>
+                    <a:lumOff val="25000"/>
+                  </a:schemeClr>
+                </a:solidFill>
+              </a:defRPr>
+            </a:lvl1pPr>
+            <a:lvl2pPr marL="457200" indent="0">
+              <a:buFontTx/>
+              <a:buNone/>
+              <a:defRPr/>
+            </a:lvl2pPr>
+            <a:lvl3pPr marL="914400" indent="0">
+              <a:buFontTx/>
+              <a:buNone/>
+              <a:defRPr/>
+            </a:lvl3pPr>
+            <a:lvl4pPr marL="1371600" indent="0">
+              <a:buFontTx/>
+              <a:buNone/>
+              <a:defRPr/>
+            </a:lvl4pPr>
+            <a:lvl5pPr marL="1828800" indent="0">
+              <a:buFontTx/>
+              <a:buNone/>
+              <a:defRPr/>
+            </a:lvl5pPr>
+          </a:lstStyle>
+          <a:p>
+            <a:pPr lvl="0"/>
+            <a:r>
+              <a:rPr lang="fr-FR"/>
+              <a:t>Cliquez pour modifier les styles du texte du masque</a:t>
+            </a:r>
+          </a:p>
+        </p:txBody>
+      </p:sp>
+      <p:sp>
+        <p:nvSpPr>
+          <p:cNvPr id="3" name="Text Placeholder 2"/>
+          <p:cNvSpPr>
+            <a:spLocks noGrp="1"/>
+          </p:cNvSpPr>
+          <p:nvPr>
+            <p:ph type="body" idx="1"/>
+          </p:nvPr>
+        </p:nvSpPr>
+        <p:spPr>
+          <a:xfrm>
+            <a:off x="677335" y="4527448"/>
+            <a:ext cx="8596668" cy="1513914"/>
+          </a:xfrm>
+        </p:spPr>
+        <p:txBody>
+          <a:bodyPr anchor="t">
+            <a:normAutofit/>
+          </a:bodyPr>
+          <a:lstStyle>
+            <a:lvl1pPr marL="0" indent="0" algn="l">
+              <a:buNone/>
+              <a:defRPr sz="1800">
+                <a:solidFill>
+                  <a:schemeClr val="tx1">
+                    <a:lumMod val="50000"/>
+                    <a:lumOff val="50000"/>
+                  </a:schemeClr>
+                </a:solidFill>
+              </a:defRPr>
+            </a:lvl1pPr>
+            <a:lvl2pPr marL="457200" indent="0">
+              <a:buNone/>
+              <a:defRPr sz="1800">
+                <a:solidFill>
+                  <a:schemeClr val="tx1">
+                    <a:tint val="75000"/>
+                  </a:schemeClr>
+                </a:solidFill>
+              </a:defRPr>
+            </a:lvl2pPr>
+            <a:lvl3pPr marL="914400" indent="0">
+              <a:buNone/>
+              <a:defRPr sz="1600">
+                <a:solidFill>
+                  <a:schemeClr val="tx1">
+                    <a:tint val="75000"/>
+                  </a:schemeClr>
+                </a:solidFill>
+              </a:defRPr>
+            </a:lvl3pPr>
+            <a:lvl4pPr marL="1371600" indent="0">
+              <a:buNone/>
+              <a:defRPr sz="1400">
+                <a:solidFill>
+                  <a:schemeClr val="tx1">
+                    <a:tint val="75000"/>
+                  </a:schemeClr>
+                </a:solidFill>
+              </a:defRPr>
+            </a:lvl4pPr>
+            <a:lvl5pPr marL="1828800" indent="0">
+              <a:buNone/>
+              <a:defRPr sz="1400">
+                <a:solidFill>
+                  <a:schemeClr val="tx1">
+                    <a:tint val="75000"/>
+                  </a:schemeClr>
+                </a:solidFill>
+              </a:defRPr>
+            </a:lvl5pPr>
+            <a:lvl6pPr marL="2286000" indent="0">
+              <a:buNone/>
+              <a:defRPr sz="1400">
+                <a:solidFill>
+                  <a:schemeClr val="tx1">
+                    <a:tint val="75000"/>
+                  </a:schemeClr>
+                </a:solidFill>
+              </a:defRPr>
+            </a:lvl6pPr>
+            <a:lvl7pPr marL="2743200" indent="0">
+              <a:buNone/>
+              <a:defRPr sz="1400">
+                <a:solidFill>
+                  <a:schemeClr val="tx1">
+                    <a:tint val="75000"/>
+                  </a:schemeClr>
+                </a:solidFill>
+              </a:defRPr>
+            </a:lvl7pPr>
+            <a:lvl8pPr marL="3200400" indent="0">
+              <a:buNone/>
+              <a:defRPr sz="1400">
+                <a:solidFill>
+                  <a:schemeClr val="tx1">
+                    <a:tint val="75000"/>
+                  </a:schemeClr>
+                </a:solidFill>
+              </a:defRPr>
+            </a:lvl8pPr>
+            <a:lvl9pPr marL="3657600" indent="0">
+              <a:buNone/>
+              <a:defRPr sz="1400">
+                <a:solidFill>
+                  <a:schemeClr val="tx1">
+                    <a:tint val="75000"/>
+                  </a:schemeClr>
+                </a:solidFill>
+              </a:defRPr>
+            </a:lvl9pPr>
+          </a:lstStyle>
+          <a:p>
+            <a:pPr lvl="0"/>
+            <a:r>
+              <a:rPr lang="fr-FR"/>
+              <a:t>Cliquez pour modifier les styles du texte du masque</a:t>
+            </a:r>
+          </a:p>
+        </p:txBody>
+      </p:sp>
+      <p:sp>
+        <p:nvSpPr>
+          <p:cNvPr id="4" name="Date Placeholder 3"/>
+          <p:cNvSpPr>
+            <a:spLocks noGrp="1"/>
+          </p:cNvSpPr>
+          <p:nvPr>
+            <p:ph type="dt" sz="half" idx="10"/>
+          </p:nvPr>
+        </p:nvSpPr>
+        <p:spPr/>
+        <p:txBody>
+          <a:bodyPr/>
+          <a:lstStyle/>
+          <a:p>
+            <a:fld id="{3BA94F33-6080-47D9-B8B5-681216ACC957}" type="datetimeFigureOut">
+              <a:rPr lang="fr-FR" smtClean="0"/>
+              <a:t>17/06/2026</a:t>
+            </a:fld>
+            <a:endParaRPr lang="fr-FR"/>
+          </a:p>
+        </p:txBody>
+      </p:sp>
+      <p:sp>
+        <p:nvSpPr>
+          <p:cNvPr id="5" name="Footer Placeholder 4"/>
+          <p:cNvSpPr>
+            <a:spLocks noGrp="1"/>
+          </p:cNvSpPr>
+          <p:nvPr>
+            <p:ph type="ftr" sz="quarter" idx="11"/>
+          </p:nvPr>
+        </p:nvSpPr>
+        <p:spPr/>
+        <p:txBody>
+          <a:bodyPr/>
+          <a:lstStyle/>
+          <a:p>
+            <a:endParaRPr lang="fr-FR"/>
+          </a:p>
+        </p:txBody>
+      </p:sp>
+      <p:sp>
+        <p:nvSpPr>
+          <p:cNvPr id="6" name="Slide Number Placeholder 5"/>
+          <p:cNvSpPr>
+            <a:spLocks noGrp="1"/>
+          </p:cNvSpPr>
+          <p:nvPr>
+            <p:ph type="sldNum" sz="quarter" idx="12"/>
+          </p:nvPr>
+        </p:nvSpPr>
+        <p:spPr/>
+        <p:txBody>
+          <a:bodyPr/>
+          <a:lstStyle/>
+          <a:p>
+            <a:fld id="{93D90F89-4B1F-4F5D-8426-D4D6BAAE4DDE}" type="slidenum">
+              <a:rPr lang="fr-FR" smtClean="0"/>
+              <a:t>‹N°›</a:t>
+            </a:fld>
+            <a:endParaRPr lang="fr-FR"/>
+          </a:p>
+        </p:txBody>
+      </p:sp>
+      <p:sp>
+        <p:nvSpPr>
+          <p:cNvPr id="24" name="TextBox 23"/>
+          <p:cNvSpPr txBox="1"/>
+          <p:nvPr/>
+        </p:nvSpPr>
+        <p:spPr>
+          <a:xfrm>
+            <a:off x="541870" y="790378"/>
+            <a:ext cx="609600" cy="584776"/>
+          </a:xfrm>
+          <a:prstGeom prst="rect">
+            <a:avLst/>
+          </a:prstGeom>
+        </p:spPr>
+        <p:txBody>
+          <a:bodyPr vert="horz" lIns="91440" tIns="45720" rIns="91440" bIns="45720" rtlCol="0" anchor="ctr">
+            <a:noAutofit/>
+          </a:bodyPr>
+          <a:lstStyle/>
+          <a:p>
+            <a:pPr lvl="0"/>
+            <a:r>
+              <a:rPr lang="en-US" sz="8000" baseline="0" dirty="0">
+                <a:ln w="3175" cmpd="sng">
+                  <a:noFill/>
+                </a:ln>
+                <a:solidFill>
+                  <a:schemeClr val="accent1">
+                    <a:lumMod val="60000"/>
+                    <a:lumOff val="40000"/>
+                  </a:schemeClr>
+                </a:solidFill>
+                <a:effectLst/>
+                <a:latin typeface="Arial"/>
+              </a:rPr>
+              <a:t>“</a:t>
+            </a:r>
+          </a:p>
+        </p:txBody>
+      </p:sp>
+      <p:sp>
+        <p:nvSpPr>
+          <p:cNvPr id="25" name="TextBox 24"/>
+          <p:cNvSpPr txBox="1"/>
+          <p:nvPr/>
+        </p:nvSpPr>
+        <p:spPr>
+          <a:xfrm>
+            <a:off x="8893011" y="2886556"/>
+            <a:ext cx="609600" cy="584776"/>
+          </a:xfrm>
+          <a:prstGeom prst="rect">
+            <a:avLst/>
+          </a:prstGeom>
+        </p:spPr>
+        <p:txBody>
+          <a:bodyPr vert="horz" lIns="91440" tIns="45720" rIns="91440" bIns="45720" rtlCol="0" anchor="ctr">
+            <a:noAutofit/>
+          </a:bodyPr>
+          <a:lstStyle/>
+          <a:p>
+            <a:pPr lvl="0"/>
+            <a:r>
+              <a:rPr lang="en-US" sz="8000" baseline="0" dirty="0">
+                <a:ln w="3175" cmpd="sng">
+                  <a:noFill/>
+                </a:ln>
+                <a:solidFill>
+                  <a:schemeClr val="accent1">
+                    <a:lumMod val="60000"/>
+                    <a:lumOff val="40000"/>
+                  </a:schemeClr>
+                </a:solidFill>
+                <a:effectLst/>
+                <a:latin typeface="Arial"/>
+              </a:rPr>
+              <a:t>”</a:t>
+            </a:r>
+          </a:p>
+        </p:txBody>
+      </p:sp>
+    </p:spTree>
+    <p:extLst>
+      <p:ext uri="{BB962C8B-B14F-4D97-AF65-F5344CB8AC3E}">
+        <p14:creationId xmlns:p14="http://schemas.microsoft.com/office/powerpoint/2010/main" val="1280410243"/>
+      </p:ext>
+    </p:extLst>
+  </p:cSld>
+  <p:clrMapOvr>
+    <a:masterClrMapping/>
+  </p:clrMapOvr>
+</p:sldLayout>
+</file>
+
+<file path=ppt/slideLayouts/slideLayout14.xml><?xml version="1.0" encoding="utf-8"?>
+<p:sldLayout xmlns:a="http://schemas.openxmlformats.org/drawingml/2006/main" xmlns:r="http://schemas.openxmlformats.org/officeDocument/2006/relationships" xmlns:p="http://schemas.openxmlformats.org/presentationml/2006/main" preserve="1">
+  <p:cSld name="Vrai ou faux">
+    <p:spTree>
+      <p:nvGrpSpPr>
+        <p:cNvPr id="1" name=""/>
+        <p:cNvGrpSpPr/>
+        <p:nvPr/>
+      </p:nvGrpSpPr>
+      <p:grpSpPr>
+        <a:xfrm>
+          <a:off x="0" y="0"/>
+          <a:ext cx="0" cy="0"/>
+          <a:chOff x="0" y="0"/>
+          <a:chExt cx="0" cy="0"/>
+        </a:xfrm>
+      </p:grpSpPr>
+      <p:sp>
+        <p:nvSpPr>
+          <p:cNvPr id="2" name="Title 1"/>
+          <p:cNvSpPr>
+            <a:spLocks noGrp="1"/>
+          </p:cNvSpPr>
+          <p:nvPr>
+            <p:ph type="title"/>
+          </p:nvPr>
+        </p:nvSpPr>
+        <p:spPr>
+          <a:xfrm>
+            <a:off x="685799" y="609600"/>
+            <a:ext cx="8588203" cy="3022600"/>
+          </a:xfrm>
+        </p:spPr>
+        <p:txBody>
+          <a:bodyPr anchor="ctr">
+            <a:normAutofit/>
+          </a:bodyPr>
+          <a:lstStyle>
+            <a:lvl1pPr algn="l">
+              <a:defRPr sz="4400" b="0" cap="none"/>
+            </a:lvl1pPr>
+          </a:lstStyle>
+          <a:p>
+            <a:r>
+              <a:rPr lang="fr-FR"/>
+              <a:t>Modifiez le style du titre</a:t>
+            </a:r>
+            <a:endParaRPr lang="en-US" dirty="0"/>
+          </a:p>
+        </p:txBody>
+      </p:sp>
+      <p:sp>
+        <p:nvSpPr>
+          <p:cNvPr id="23" name="Text Placeholder 9"/>
+          <p:cNvSpPr>
+            <a:spLocks noGrp="1"/>
+          </p:cNvSpPr>
+          <p:nvPr>
+            <p:ph type="body" sz="quarter" idx="13"/>
+          </p:nvPr>
+        </p:nvSpPr>
+        <p:spPr>
+          <a:xfrm>
+            <a:off x="677332" y="4013200"/>
+            <a:ext cx="8596669" cy="514248"/>
+          </a:xfrm>
+        </p:spPr>
+        <p:txBody>
+          <a:bodyPr anchor="b">
+            <a:noAutofit/>
+          </a:bodyPr>
+          <a:lstStyle>
+            <a:lvl1pPr marL="0" indent="0">
+              <a:buFontTx/>
+              <a:buNone/>
+              <a:defRPr sz="2400">
+                <a:solidFill>
+                  <a:schemeClr val="accent1"/>
+                </a:solidFill>
+              </a:defRPr>
+            </a:lvl1pPr>
+            <a:lvl2pPr marL="457200" indent="0">
+              <a:buFontTx/>
+              <a:buNone/>
+              <a:defRPr/>
+            </a:lvl2pPr>
+            <a:lvl3pPr marL="914400" indent="0">
+              <a:buFontTx/>
+              <a:buNone/>
+              <a:defRPr/>
+            </a:lvl3pPr>
+            <a:lvl4pPr marL="1371600" indent="0">
+              <a:buFontTx/>
+              <a:buNone/>
+              <a:defRPr/>
+            </a:lvl4pPr>
+            <a:lvl5pPr marL="1828800" indent="0">
+              <a:buFontTx/>
+              <a:buNone/>
+              <a:defRPr/>
+            </a:lvl5pPr>
+          </a:lstStyle>
+          <a:p>
+            <a:pPr lvl="0"/>
+            <a:r>
+              <a:rPr lang="fr-FR"/>
+              <a:t>Cliquez pour modifier les styles du texte du masque</a:t>
+            </a:r>
+          </a:p>
+        </p:txBody>
+      </p:sp>
+      <p:sp>
+        <p:nvSpPr>
+          <p:cNvPr id="3" name="Text Placeholder 2"/>
+          <p:cNvSpPr>
+            <a:spLocks noGrp="1"/>
+          </p:cNvSpPr>
+          <p:nvPr>
+            <p:ph type="body" idx="1"/>
+          </p:nvPr>
+        </p:nvSpPr>
+        <p:spPr>
+          <a:xfrm>
+            <a:off x="677335" y="4527448"/>
+            <a:ext cx="8596668" cy="1513914"/>
+          </a:xfrm>
+        </p:spPr>
+        <p:txBody>
+          <a:bodyPr anchor="t">
+            <a:normAutofit/>
+          </a:bodyPr>
+          <a:lstStyle>
+            <a:lvl1pPr marL="0" indent="0" algn="l">
+              <a:buNone/>
+              <a:defRPr sz="1800">
+                <a:solidFill>
+                  <a:schemeClr val="tx1">
+                    <a:lumMod val="50000"/>
+                    <a:lumOff val="50000"/>
+                  </a:schemeClr>
+                </a:solidFill>
+              </a:defRPr>
+            </a:lvl1pPr>
+            <a:lvl2pPr marL="457200" indent="0">
+              <a:buNone/>
+              <a:defRPr sz="1800">
+                <a:solidFill>
+                  <a:schemeClr val="tx1">
+                    <a:tint val="75000"/>
+                  </a:schemeClr>
+                </a:solidFill>
+              </a:defRPr>
+            </a:lvl2pPr>
+            <a:lvl3pPr marL="914400" indent="0">
+              <a:buNone/>
+              <a:defRPr sz="1600">
+                <a:solidFill>
+                  <a:schemeClr val="tx1">
+                    <a:tint val="75000"/>
+                  </a:schemeClr>
+                </a:solidFill>
+              </a:defRPr>
+            </a:lvl3pPr>
+            <a:lvl4pPr marL="1371600" indent="0">
+              <a:buNone/>
+              <a:defRPr sz="1400">
+                <a:solidFill>
+                  <a:schemeClr val="tx1">
+                    <a:tint val="75000"/>
+                  </a:schemeClr>
+                </a:solidFill>
+              </a:defRPr>
+            </a:lvl4pPr>
+            <a:lvl5pPr marL="1828800" indent="0">
+              <a:buNone/>
+              <a:defRPr sz="1400">
+                <a:solidFill>
+                  <a:schemeClr val="tx1">
+                    <a:tint val="75000"/>
+                  </a:schemeClr>
+                </a:solidFill>
+              </a:defRPr>
+            </a:lvl5pPr>
+            <a:lvl6pPr marL="2286000" indent="0">
+              <a:buNone/>
+              <a:defRPr sz="1400">
+                <a:solidFill>
+                  <a:schemeClr val="tx1">
+                    <a:tint val="75000"/>
+                  </a:schemeClr>
+                </a:solidFill>
+              </a:defRPr>
+            </a:lvl6pPr>
+            <a:lvl7pPr marL="2743200" indent="0">
+              <a:buNone/>
+              <a:defRPr sz="1400">
+                <a:solidFill>
+                  <a:schemeClr val="tx1">
+                    <a:tint val="75000"/>
+                  </a:schemeClr>
+                </a:solidFill>
+              </a:defRPr>
+            </a:lvl7pPr>
+            <a:lvl8pPr marL="3200400" indent="0">
+              <a:buNone/>
+              <a:defRPr sz="1400">
+                <a:solidFill>
+                  <a:schemeClr val="tx1">
+                    <a:tint val="75000"/>
+                  </a:schemeClr>
+                </a:solidFill>
+              </a:defRPr>
+            </a:lvl8pPr>
+            <a:lvl9pPr marL="3657600" indent="0">
+              <a:buNone/>
+              <a:defRPr sz="1400">
+                <a:solidFill>
+                  <a:schemeClr val="tx1">
+                    <a:tint val="75000"/>
+                  </a:schemeClr>
+                </a:solidFill>
+              </a:defRPr>
+            </a:lvl9pPr>
+          </a:lstStyle>
+          <a:p>
+            <a:pPr lvl="0"/>
+            <a:r>
+              <a:rPr lang="fr-FR"/>
+              <a:t>Cliquez pour modifier les styles du texte du masque</a:t>
+            </a:r>
+          </a:p>
+        </p:txBody>
+      </p:sp>
+      <p:sp>
+        <p:nvSpPr>
+          <p:cNvPr id="4" name="Date Placeholder 3"/>
+          <p:cNvSpPr>
+            <a:spLocks noGrp="1"/>
+          </p:cNvSpPr>
+          <p:nvPr>
+            <p:ph type="dt" sz="half" idx="10"/>
+          </p:nvPr>
+        </p:nvSpPr>
+        <p:spPr/>
+        <p:txBody>
+          <a:bodyPr/>
+          <a:lstStyle/>
+          <a:p>
+            <a:fld id="{3BA94F33-6080-47D9-B8B5-681216ACC957}" type="datetimeFigureOut">
+              <a:rPr lang="fr-FR" smtClean="0"/>
+              <a:t>17/06/2026</a:t>
+            </a:fld>
+            <a:endParaRPr lang="fr-FR"/>
+          </a:p>
+        </p:txBody>
+      </p:sp>
+      <p:sp>
+        <p:nvSpPr>
+          <p:cNvPr id="5" name="Footer Placeholder 4"/>
+          <p:cNvSpPr>
+            <a:spLocks noGrp="1"/>
+          </p:cNvSpPr>
+          <p:nvPr>
+            <p:ph type="ftr" sz="quarter" idx="11"/>
+          </p:nvPr>
+        </p:nvSpPr>
+        <p:spPr/>
+        <p:txBody>
+          <a:bodyPr/>
+          <a:lstStyle/>
+          <a:p>
+            <a:endParaRPr lang="fr-FR"/>
+          </a:p>
+        </p:txBody>
+      </p:sp>
+      <p:sp>
+        <p:nvSpPr>
+          <p:cNvPr id="6" name="Slide Number Placeholder 5"/>
+          <p:cNvSpPr>
+            <a:spLocks noGrp="1"/>
+          </p:cNvSpPr>
+          <p:nvPr>
+            <p:ph type="sldNum" sz="quarter" idx="12"/>
+          </p:nvPr>
+        </p:nvSpPr>
+        <p:spPr/>
+        <p:txBody>
+          <a:bodyPr/>
+          <a:lstStyle/>
+          <a:p>
+            <a:fld id="{93D90F89-4B1F-4F5D-8426-D4D6BAAE4DDE}" type="slidenum">
+              <a:rPr lang="fr-FR" smtClean="0"/>
+              <a:t>‹N°›</a:t>
+            </a:fld>
+            <a:endParaRPr lang="fr-FR"/>
+          </a:p>
+        </p:txBody>
+      </p:sp>
+    </p:spTree>
+    <p:extLst>
+      <p:ext uri="{BB962C8B-B14F-4D97-AF65-F5344CB8AC3E}">
+        <p14:creationId xmlns:p14="http://schemas.microsoft.com/office/powerpoint/2010/main" val="3511684867"/>
+      </p:ext>
+    </p:extLst>
+  </p:cSld>
+  <p:clrMapOvr>
+    <a:masterClrMapping/>
+  </p:clrMapOvr>
+</p:sldLayout>
+</file>
+
+<file path=ppt/slideLayouts/slideLayout15.xml><?xml version="1.0" encoding="utf-8"?>
 <p:sldLayout xmlns:a="http://schemas.openxmlformats.org/drawingml/2006/main" xmlns:r="http://schemas.openxmlformats.org/officeDocument/2006/relationships" xmlns:p="http://schemas.openxmlformats.org/presentationml/2006/main" type="vertTx" preserve="1">
   <p:cSld name="Titre et texte vertical">
     <p:spTree>
@@ -346,13 +2532,7 @@
       </p:grpSpPr>
       <p:sp>
         <p:nvSpPr>
-          <p:cNvPr id="2" name="Titre 1">
-            <a:extLst>
-              <a:ext uri="{FF2B5EF4-FFF2-40B4-BE49-F238E27FC236}">
-                <a16:creationId xmlns:a16="http://schemas.microsoft.com/office/drawing/2014/main" id="{A30DC562-9417-16B9-5687-2AEE5E7242B7}"/>
-              </a:ext>
-            </a:extLst>
-          </p:cNvPr>
+          <p:cNvPr id="2" name="Title 1"/>
           <p:cNvSpPr>
             <a:spLocks noGrp="1"/>
           </p:cNvSpPr>
@@ -369,18 +2549,13 @@
               <a:rPr lang="fr-FR"/>
               <a:t>Modifiez le style du titre</a:t>
             </a:r>
-          </a:p>
-        </p:txBody>
-      </p:sp>
-      <p:sp>
-        <p:nvSpPr>
-          <p:cNvPr id="3" name="Espace réservé du texte vertical 2">
-            <a:extLst>
-              <a:ext uri="{FF2B5EF4-FFF2-40B4-BE49-F238E27FC236}">
-                <a16:creationId xmlns:a16="http://schemas.microsoft.com/office/drawing/2014/main" id="{CD57675E-0DD0-8EC9-0FFC-94C220EB6320}"/>
-              </a:ext>
-            </a:extLst>
-          </p:cNvPr>
+            <a:endParaRPr lang="en-US" dirty="0"/>
+          </a:p>
+        </p:txBody>
+      </p:sp>
+      <p:sp>
+        <p:nvSpPr>
+          <p:cNvPr id="3" name="Vertical Text Placeholder 2"/>
           <p:cNvSpPr>
             <a:spLocks noGrp="1"/>
           </p:cNvSpPr>
@@ -426,18 +2601,13 @@
               <a:rPr lang="fr-FR"/>
               <a:t>Cinquième niveau</a:t>
             </a:r>
-          </a:p>
-        </p:txBody>
-      </p:sp>
-      <p:sp>
-        <p:nvSpPr>
-          <p:cNvPr id="4" name="Espace réservé de la date 3">
-            <a:extLst>
-              <a:ext uri="{FF2B5EF4-FFF2-40B4-BE49-F238E27FC236}">
-                <a16:creationId xmlns:a16="http://schemas.microsoft.com/office/drawing/2014/main" id="{1BF2D1B9-AED9-51B9-2D63-BA2575EA0F31}"/>
-              </a:ext>
-            </a:extLst>
-          </p:cNvPr>
+            <a:endParaRPr lang="en-US" dirty="0"/>
+          </a:p>
+        </p:txBody>
+      </p:sp>
+      <p:sp>
+        <p:nvSpPr>
+          <p:cNvPr id="4" name="Date Placeholder 3"/>
           <p:cNvSpPr>
             <a:spLocks noGrp="1"/>
           </p:cNvSpPr>
@@ -460,13 +2630,7 @@
       </p:sp>
       <p:sp>
         <p:nvSpPr>
-          <p:cNvPr id="5" name="Espace réservé du pied de page 4">
-            <a:extLst>
-              <a:ext uri="{FF2B5EF4-FFF2-40B4-BE49-F238E27FC236}">
-                <a16:creationId xmlns:a16="http://schemas.microsoft.com/office/drawing/2014/main" id="{3D71C151-A0CB-CB03-D94F-3841F3D1DC06}"/>
-              </a:ext>
-            </a:extLst>
-          </p:cNvPr>
+          <p:cNvPr id="5" name="Footer Placeholder 4"/>
           <p:cNvSpPr>
             <a:spLocks noGrp="1"/>
           </p:cNvSpPr>
@@ -485,13 +2649,7 @@
       </p:sp>
       <p:sp>
         <p:nvSpPr>
-          <p:cNvPr id="6" name="Espace réservé du numéro de diapositive 5">
-            <a:extLst>
-              <a:ext uri="{FF2B5EF4-FFF2-40B4-BE49-F238E27FC236}">
-                <a16:creationId xmlns:a16="http://schemas.microsoft.com/office/drawing/2014/main" id="{C6DFB471-258C-1BAF-2FAB-DDC5AB81564C}"/>
-              </a:ext>
-            </a:extLst>
-          </p:cNvPr>
+          <p:cNvPr id="6" name="Slide Number Placeholder 5"/>
           <p:cNvSpPr>
             <a:spLocks noGrp="1"/>
           </p:cNvSpPr>
@@ -515,7 +2673,7 @@
     </p:spTree>
     <p:extLst>
       <p:ext uri="{BB962C8B-B14F-4D97-AF65-F5344CB8AC3E}">
-        <p14:creationId xmlns:p14="http://schemas.microsoft.com/office/powerpoint/2010/main" val="2879244782"/>
+        <p14:creationId xmlns:p14="http://schemas.microsoft.com/office/powerpoint/2010/main" val="1157510401"/>
       </p:ext>
     </p:extLst>
   </p:cSld>
@@ -525,7 +2683,7 @@
 </p:sldLayout>
 </file>
 
-<file path=ppt/slideLayouts/slideLayout11.xml><?xml version="1.0" encoding="utf-8"?>
+<file path=ppt/slideLayouts/slideLayout16.xml><?xml version="1.0" encoding="utf-8"?>
 <p:sldLayout xmlns:a="http://schemas.openxmlformats.org/drawingml/2006/main" xmlns:r="http://schemas.openxmlformats.org/officeDocument/2006/relationships" xmlns:p="http://schemas.openxmlformats.org/presentationml/2006/main" type="vertTitleAndTx" preserve="1">
   <p:cSld name="Titre vertical et texte">
     <p:spTree>
@@ -544,13 +2702,7 @@
       </p:grpSpPr>
       <p:sp>
         <p:nvSpPr>
-          <p:cNvPr id="2" name="Titre vertical 1">
-            <a:extLst>
-              <a:ext uri="{FF2B5EF4-FFF2-40B4-BE49-F238E27FC236}">
-                <a16:creationId xmlns:a16="http://schemas.microsoft.com/office/drawing/2014/main" id="{C75594FE-594C-7116-B457-FBA9F21A7365}"/>
-              </a:ext>
-            </a:extLst>
-          </p:cNvPr>
+          <p:cNvPr id="2" name="Vertical Title 1"/>
           <p:cNvSpPr>
             <a:spLocks noGrp="1"/>
           </p:cNvSpPr>
@@ -560,30 +2712,25 @@
         </p:nvSpPr>
         <p:spPr>
           <a:xfrm>
-            <a:off x="8724900" y="365125"/>
-            <a:ext cx="2628900" cy="5811838"/>
+            <a:off x="7967673" y="609599"/>
+            <a:ext cx="1304743" cy="5251451"/>
           </a:xfrm>
         </p:spPr>
         <p:txBody>
-          <a:bodyPr vert="eaVert"/>
+          <a:bodyPr vert="eaVert" anchor="ctr"/>
           <a:lstStyle/>
           <a:p>
             <a:r>
               <a:rPr lang="fr-FR"/>
               <a:t>Modifiez le style du titre</a:t>
             </a:r>
-          </a:p>
-        </p:txBody>
-      </p:sp>
-      <p:sp>
-        <p:nvSpPr>
-          <p:cNvPr id="3" name="Espace réservé du texte vertical 2">
-            <a:extLst>
-              <a:ext uri="{FF2B5EF4-FFF2-40B4-BE49-F238E27FC236}">
-                <a16:creationId xmlns:a16="http://schemas.microsoft.com/office/drawing/2014/main" id="{8F31E1D7-4E03-3155-DB4E-FC48EF2544A6}"/>
-              </a:ext>
-            </a:extLst>
-          </p:cNvPr>
+            <a:endParaRPr lang="en-US" dirty="0"/>
+          </a:p>
+        </p:txBody>
+      </p:sp>
+      <p:sp>
+        <p:nvSpPr>
+          <p:cNvPr id="3" name="Vertical Text Placeholder 2"/>
           <p:cNvSpPr>
             <a:spLocks noGrp="1"/>
           </p:cNvSpPr>
@@ -593,8 +2740,8 @@
         </p:nvSpPr>
         <p:spPr>
           <a:xfrm>
-            <a:off x="838200" y="365125"/>
-            <a:ext cx="7734300" cy="5811838"/>
+            <a:off x="677335" y="609600"/>
+            <a:ext cx="7060150" cy="5251450"/>
           </a:xfrm>
         </p:spPr>
         <p:txBody>
@@ -634,18 +2781,13 @@
               <a:rPr lang="fr-FR"/>
               <a:t>Cinquième niveau</a:t>
             </a:r>
-          </a:p>
-        </p:txBody>
-      </p:sp>
-      <p:sp>
-        <p:nvSpPr>
-          <p:cNvPr id="4" name="Espace réservé de la date 3">
-            <a:extLst>
-              <a:ext uri="{FF2B5EF4-FFF2-40B4-BE49-F238E27FC236}">
-                <a16:creationId xmlns:a16="http://schemas.microsoft.com/office/drawing/2014/main" id="{57D1C389-86E0-3904-BB1B-AFE30E34758F}"/>
-              </a:ext>
-            </a:extLst>
-          </p:cNvPr>
+            <a:endParaRPr lang="en-US" dirty="0"/>
+          </a:p>
+        </p:txBody>
+      </p:sp>
+      <p:sp>
+        <p:nvSpPr>
+          <p:cNvPr id="4" name="Date Placeholder 3"/>
           <p:cNvSpPr>
             <a:spLocks noGrp="1"/>
           </p:cNvSpPr>
@@ -668,13 +2810,7 @@
       </p:sp>
       <p:sp>
         <p:nvSpPr>
-          <p:cNvPr id="5" name="Espace réservé du pied de page 4">
-            <a:extLst>
-              <a:ext uri="{FF2B5EF4-FFF2-40B4-BE49-F238E27FC236}">
-                <a16:creationId xmlns:a16="http://schemas.microsoft.com/office/drawing/2014/main" id="{061A84B2-068D-9D99-6241-CFC4090ED5EC}"/>
-              </a:ext>
-            </a:extLst>
-          </p:cNvPr>
+          <p:cNvPr id="5" name="Footer Placeholder 4"/>
           <p:cNvSpPr>
             <a:spLocks noGrp="1"/>
           </p:cNvSpPr>
@@ -693,13 +2829,7 @@
       </p:sp>
       <p:sp>
         <p:nvSpPr>
-          <p:cNvPr id="6" name="Espace réservé du numéro de diapositive 5">
-            <a:extLst>
-              <a:ext uri="{FF2B5EF4-FFF2-40B4-BE49-F238E27FC236}">
-                <a16:creationId xmlns:a16="http://schemas.microsoft.com/office/drawing/2014/main" id="{2844B77D-16C9-F9D0-A8F3-904B5569D04B}"/>
-              </a:ext>
-            </a:extLst>
-          </p:cNvPr>
+          <p:cNvPr id="6" name="Slide Number Placeholder 5"/>
           <p:cNvSpPr>
             <a:spLocks noGrp="1"/>
           </p:cNvSpPr>
@@ -723,7 +2853,7 @@
     </p:spTree>
     <p:extLst>
       <p:ext uri="{BB962C8B-B14F-4D97-AF65-F5344CB8AC3E}">
-        <p14:creationId xmlns:p14="http://schemas.microsoft.com/office/powerpoint/2010/main" val="340732153"/>
+        <p14:creationId xmlns:p14="http://schemas.microsoft.com/office/powerpoint/2010/main" val="3758671750"/>
       </p:ext>
     </p:extLst>
   </p:cSld>
@@ -752,13 +2882,7 @@
       </p:grpSpPr>
       <p:sp>
         <p:nvSpPr>
-          <p:cNvPr id="2" name="Titre 1">
-            <a:extLst>
-              <a:ext uri="{FF2B5EF4-FFF2-40B4-BE49-F238E27FC236}">
-                <a16:creationId xmlns:a16="http://schemas.microsoft.com/office/drawing/2014/main" id="{B77EB41E-B2F6-0063-B771-0E60860BD99D}"/>
-              </a:ext>
-            </a:extLst>
-          </p:cNvPr>
+          <p:cNvPr id="2" name="Title 1"/>
           <p:cNvSpPr>
             <a:spLocks noGrp="1"/>
           </p:cNvSpPr>
@@ -768,37 +2892,38 @@
         </p:nvSpPr>
         <p:spPr/>
         <p:txBody>
+          <a:bodyPr>
+            <a:normAutofit/>
+          </a:bodyPr>
+          <a:lstStyle>
+            <a:lvl1pPr>
+              <a:defRPr sz="3600"/>
+            </a:lvl1pPr>
+          </a:lstStyle>
+          <a:p>
+            <a:r>
+              <a:rPr lang="fr-FR"/>
+              <a:t>Modifiez le style du titre</a:t>
+            </a:r>
+            <a:endParaRPr lang="en-US" dirty="0"/>
+          </a:p>
+        </p:txBody>
+      </p:sp>
+      <p:sp>
+        <p:nvSpPr>
+          <p:cNvPr id="3" name="Content Placeholder 2"/>
+          <p:cNvSpPr>
+            <a:spLocks noGrp="1"/>
+          </p:cNvSpPr>
+          <p:nvPr>
+            <p:ph idx="1"/>
+          </p:nvPr>
+        </p:nvSpPr>
+        <p:spPr/>
+        <p:txBody>
           <a:bodyPr/>
           <a:lstStyle/>
           <a:p>
-            <a:r>
-              <a:rPr lang="fr-FR"/>
-              <a:t>Modifiez le style du titre</a:t>
-            </a:r>
-          </a:p>
-        </p:txBody>
-      </p:sp>
-      <p:sp>
-        <p:nvSpPr>
-          <p:cNvPr id="3" name="Espace réservé du contenu 2">
-            <a:extLst>
-              <a:ext uri="{FF2B5EF4-FFF2-40B4-BE49-F238E27FC236}">
-                <a16:creationId xmlns:a16="http://schemas.microsoft.com/office/drawing/2014/main" id="{85AA6999-4FE6-33D0-3185-20C36475D347}"/>
-              </a:ext>
-            </a:extLst>
-          </p:cNvPr>
-          <p:cNvSpPr>
-            <a:spLocks noGrp="1"/>
-          </p:cNvSpPr>
-          <p:nvPr>
-            <p:ph idx="1"/>
-          </p:nvPr>
-        </p:nvSpPr>
-        <p:spPr/>
-        <p:txBody>
-          <a:bodyPr/>
-          <a:lstStyle/>
-          <a:p>
             <a:pPr lvl="0"/>
             <a:r>
               <a:rPr lang="fr-FR"/>
@@ -832,18 +2957,13 @@
               <a:rPr lang="fr-FR"/>
               <a:t>Cinquième niveau</a:t>
             </a:r>
-          </a:p>
-        </p:txBody>
-      </p:sp>
-      <p:sp>
-        <p:nvSpPr>
-          <p:cNvPr id="4" name="Espace réservé de la date 3">
-            <a:extLst>
-              <a:ext uri="{FF2B5EF4-FFF2-40B4-BE49-F238E27FC236}">
-                <a16:creationId xmlns:a16="http://schemas.microsoft.com/office/drawing/2014/main" id="{7024F12B-04B2-CBB4-3BF8-1EABFA0094FE}"/>
-              </a:ext>
-            </a:extLst>
-          </p:cNvPr>
+            <a:endParaRPr lang="en-US" dirty="0"/>
+          </a:p>
+        </p:txBody>
+      </p:sp>
+      <p:sp>
+        <p:nvSpPr>
+          <p:cNvPr id="4" name="Date Placeholder 3"/>
           <p:cNvSpPr>
             <a:spLocks noGrp="1"/>
           </p:cNvSpPr>
@@ -866,13 +2986,7 @@
       </p:sp>
       <p:sp>
         <p:nvSpPr>
-          <p:cNvPr id="5" name="Espace réservé du pied de page 4">
-            <a:extLst>
-              <a:ext uri="{FF2B5EF4-FFF2-40B4-BE49-F238E27FC236}">
-                <a16:creationId xmlns:a16="http://schemas.microsoft.com/office/drawing/2014/main" id="{303998FB-EF4E-354F-7026-119BCBCEE548}"/>
-              </a:ext>
-            </a:extLst>
-          </p:cNvPr>
+          <p:cNvPr id="5" name="Footer Placeholder 4"/>
           <p:cNvSpPr>
             <a:spLocks noGrp="1"/>
           </p:cNvSpPr>
@@ -891,13 +3005,7 @@
       </p:sp>
       <p:sp>
         <p:nvSpPr>
-          <p:cNvPr id="6" name="Espace réservé du numéro de diapositive 5">
-            <a:extLst>
-              <a:ext uri="{FF2B5EF4-FFF2-40B4-BE49-F238E27FC236}">
-                <a16:creationId xmlns:a16="http://schemas.microsoft.com/office/drawing/2014/main" id="{7B044AEC-705E-01F6-FD96-02669B68E477}"/>
-              </a:ext>
-            </a:extLst>
-          </p:cNvPr>
+          <p:cNvPr id="6" name="Slide Number Placeholder 5"/>
           <p:cNvSpPr>
             <a:spLocks noGrp="1"/>
           </p:cNvSpPr>
@@ -921,7 +3029,7 @@
     </p:spTree>
     <p:extLst>
       <p:ext uri="{BB962C8B-B14F-4D97-AF65-F5344CB8AC3E}">
-        <p14:creationId xmlns:p14="http://schemas.microsoft.com/office/powerpoint/2010/main" val="1001531169"/>
+        <p14:creationId xmlns:p14="http://schemas.microsoft.com/office/powerpoint/2010/main" val="1138035859"/>
       </p:ext>
     </p:extLst>
   </p:cSld>
@@ -950,13 +3058,7 @@
       </p:grpSpPr>
       <p:sp>
         <p:nvSpPr>
-          <p:cNvPr id="2" name="Titre 1">
-            <a:extLst>
-              <a:ext uri="{FF2B5EF4-FFF2-40B4-BE49-F238E27FC236}">
-                <a16:creationId xmlns:a16="http://schemas.microsoft.com/office/drawing/2014/main" id="{88F4A97A-EAE2-FF3C-55DF-E340C338F07C}"/>
-              </a:ext>
-            </a:extLst>
-          </p:cNvPr>
+          <p:cNvPr id="2" name="Title 1"/>
           <p:cNvSpPr>
             <a:spLocks noGrp="1"/>
           </p:cNvSpPr>
@@ -966,15 +3068,15 @@
         </p:nvSpPr>
         <p:spPr>
           <a:xfrm>
-            <a:off x="831850" y="1709738"/>
-            <a:ext cx="10515600" cy="2852737"/>
+            <a:off x="677335" y="2700867"/>
+            <a:ext cx="8596668" cy="1826581"/>
           </a:xfrm>
         </p:spPr>
         <p:txBody>
           <a:bodyPr anchor="b"/>
           <a:lstStyle>
-            <a:lvl1pPr>
-              <a:defRPr sz="6000"/>
+            <a:lvl1pPr algn="l">
+              <a:defRPr sz="4000" b="0" cap="none"/>
             </a:lvl1pPr>
           </a:lstStyle>
           <a:p>
@@ -982,18 +3084,13 @@
               <a:rPr lang="fr-FR"/>
               <a:t>Modifiez le style du titre</a:t>
             </a:r>
-          </a:p>
-        </p:txBody>
-      </p:sp>
-      <p:sp>
-        <p:nvSpPr>
-          <p:cNvPr id="3" name="Espace réservé du texte 2">
-            <a:extLst>
-              <a:ext uri="{FF2B5EF4-FFF2-40B4-BE49-F238E27FC236}">
-                <a16:creationId xmlns:a16="http://schemas.microsoft.com/office/drawing/2014/main" id="{D2B71736-ABF8-050C-34F1-3EE5DD3A730C}"/>
-              </a:ext>
-            </a:extLst>
-          </p:cNvPr>
+            <a:endParaRPr lang="en-US" dirty="0"/>
+          </a:p>
+        </p:txBody>
+      </p:sp>
+      <p:sp>
+        <p:nvSpPr>
+          <p:cNvPr id="3" name="Text Placeholder 2"/>
           <p:cNvSpPr>
             <a:spLocks noGrp="1"/>
           </p:cNvSpPr>
@@ -1003,99 +3100,100 @@
         </p:nvSpPr>
         <p:spPr>
           <a:xfrm>
-            <a:off x="831850" y="4589463"/>
-            <a:ext cx="10515600" cy="1500187"/>
+            <a:off x="677335" y="4527448"/>
+            <a:ext cx="8596668" cy="860400"/>
           </a:xfrm>
         </p:spPr>
         <p:txBody>
-          <a:bodyPr/>
+          <a:bodyPr anchor="t"/>
           <a:lstStyle>
-            <a:lvl1pPr marL="0" indent="0">
-              <a:buNone/>
-              <a:defRPr sz="2400">
+            <a:lvl1pPr marL="0" indent="0" algn="l">
+              <a:buNone/>
+              <a:defRPr sz="2000">
                 <a:solidFill>
                   <a:schemeClr val="tx1">
-                    <a:tint val="82000"/>
+                    <a:lumMod val="50000"/>
+                    <a:lumOff val="50000"/>
                   </a:schemeClr>
                 </a:solidFill>
               </a:defRPr>
             </a:lvl1pPr>
             <a:lvl2pPr marL="457200" indent="0">
               <a:buNone/>
-              <a:defRPr sz="2000">
+              <a:defRPr sz="1800">
                 <a:solidFill>
                   <a:schemeClr val="tx1">
-                    <a:tint val="82000"/>
+                    <a:tint val="75000"/>
                   </a:schemeClr>
                 </a:solidFill>
               </a:defRPr>
             </a:lvl2pPr>
             <a:lvl3pPr marL="914400" indent="0">
               <a:buNone/>
-              <a:defRPr sz="1800">
+              <a:defRPr sz="1600">
                 <a:solidFill>
                   <a:schemeClr val="tx1">
-                    <a:tint val="82000"/>
+                    <a:tint val="75000"/>
                   </a:schemeClr>
                 </a:solidFill>
               </a:defRPr>
             </a:lvl3pPr>
             <a:lvl4pPr marL="1371600" indent="0">
               <a:buNone/>
-              <a:defRPr sz="1600">
+              <a:defRPr sz="1400">
                 <a:solidFill>
                   <a:schemeClr val="tx1">
-                    <a:tint val="82000"/>
+                    <a:tint val="75000"/>
                   </a:schemeClr>
                 </a:solidFill>
               </a:defRPr>
             </a:lvl4pPr>
             <a:lvl5pPr marL="1828800" indent="0">
               <a:buNone/>
-              <a:defRPr sz="1600">
+              <a:defRPr sz="1400">
                 <a:solidFill>
                   <a:schemeClr val="tx1">
-                    <a:tint val="82000"/>
+                    <a:tint val="75000"/>
                   </a:schemeClr>
                 </a:solidFill>
               </a:defRPr>
             </a:lvl5pPr>
             <a:lvl6pPr marL="2286000" indent="0">
               <a:buNone/>
-              <a:defRPr sz="1600">
+              <a:defRPr sz="1400">
                 <a:solidFill>
                   <a:schemeClr val="tx1">
-                    <a:tint val="82000"/>
+                    <a:tint val="75000"/>
                   </a:schemeClr>
                 </a:solidFill>
               </a:defRPr>
             </a:lvl6pPr>
             <a:lvl7pPr marL="2743200" indent="0">
               <a:buNone/>
-              <a:defRPr sz="1600">
+              <a:defRPr sz="1400">
                 <a:solidFill>
                   <a:schemeClr val="tx1">
-                    <a:tint val="82000"/>
+                    <a:tint val="75000"/>
                   </a:schemeClr>
                 </a:solidFill>
               </a:defRPr>
             </a:lvl7pPr>
             <a:lvl8pPr marL="3200400" indent="0">
               <a:buNone/>
-              <a:defRPr sz="1600">
+              <a:defRPr sz="1400">
                 <a:solidFill>
                   <a:schemeClr val="tx1">
-                    <a:tint val="82000"/>
+                    <a:tint val="75000"/>
                   </a:schemeClr>
                 </a:solidFill>
               </a:defRPr>
             </a:lvl8pPr>
             <a:lvl9pPr marL="3657600" indent="0">
               <a:buNone/>
-              <a:defRPr sz="1600">
+              <a:defRPr sz="1400">
                 <a:solidFill>
                   <a:schemeClr val="tx1">
-                    <a:tint val="82000"/>
+                    <a:tint val="75000"/>
                   </a:schemeClr>
                 </a:solidFill>
               </a:defRPr>
@@ -1112,13 +3210,7 @@
       </p:sp>
       <p:sp>
         <p:nvSpPr>
-          <p:cNvPr id="4" name="Espace réservé de la date 3">
-            <a:extLst>
-              <a:ext uri="{FF2B5EF4-FFF2-40B4-BE49-F238E27FC236}">
-                <a16:creationId xmlns:a16="http://schemas.microsoft.com/office/drawing/2014/main" id="{6E76EBC4-B5CE-D14A-8CAC-AA89FC7C2638}"/>
-              </a:ext>
-            </a:extLst>
-          </p:cNvPr>
+          <p:cNvPr id="4" name="Date Placeholder 3"/>
           <p:cNvSpPr>
             <a:spLocks noGrp="1"/>
           </p:cNvSpPr>
@@ -1141,13 +3233,7 @@
       </p:sp>
       <p:sp>
         <p:nvSpPr>
-          <p:cNvPr id="5" name="Espace réservé du pied de page 4">
-            <a:extLst>
-              <a:ext uri="{FF2B5EF4-FFF2-40B4-BE49-F238E27FC236}">
-                <a16:creationId xmlns:a16="http://schemas.microsoft.com/office/drawing/2014/main" id="{A1A4D140-1494-3AB4-42B3-7E370A5CC607}"/>
-              </a:ext>
-            </a:extLst>
-          </p:cNvPr>
+          <p:cNvPr id="5" name="Footer Placeholder 4"/>
           <p:cNvSpPr>
             <a:spLocks noGrp="1"/>
           </p:cNvSpPr>
@@ -1166,13 +3252,7 @@
       </p:sp>
       <p:sp>
         <p:nvSpPr>
-          <p:cNvPr id="6" name="Espace réservé du numéro de diapositive 5">
-            <a:extLst>
-              <a:ext uri="{FF2B5EF4-FFF2-40B4-BE49-F238E27FC236}">
-                <a16:creationId xmlns:a16="http://schemas.microsoft.com/office/drawing/2014/main" id="{B0B72EA2-5125-EE76-4BC7-869DE9422131}"/>
-              </a:ext>
-            </a:extLst>
-          </p:cNvPr>
+          <p:cNvPr id="6" name="Slide Number Placeholder 5"/>
           <p:cNvSpPr>
             <a:spLocks noGrp="1"/>
           </p:cNvSpPr>
@@ -1196,7 +3276,7 @@
     </p:spTree>
     <p:extLst>
       <p:ext uri="{BB962C8B-B14F-4D97-AF65-F5344CB8AC3E}">
-        <p14:creationId xmlns:p14="http://schemas.microsoft.com/office/powerpoint/2010/main" val="3102056940"/>
+        <p14:creationId xmlns:p14="http://schemas.microsoft.com/office/powerpoint/2010/main" val="3368538367"/>
       </p:ext>
     </p:extLst>
   </p:cSld>
@@ -1225,13 +3305,7 @@
       </p:grpSpPr>
       <p:sp>
         <p:nvSpPr>
-          <p:cNvPr id="2" name="Titre 1">
-            <a:extLst>
-              <a:ext uri="{FF2B5EF4-FFF2-40B4-BE49-F238E27FC236}">
-                <a16:creationId xmlns:a16="http://schemas.microsoft.com/office/drawing/2014/main" id="{5684ADF5-85F8-8494-FD63-1291304074E1}"/>
-              </a:ext>
-            </a:extLst>
-          </p:cNvPr>
+          <p:cNvPr id="2" name="Title 1"/>
           <p:cNvSpPr>
             <a:spLocks noGrp="1"/>
           </p:cNvSpPr>
@@ -1248,18 +3322,13 @@
               <a:rPr lang="fr-FR"/>
               <a:t>Modifiez le style du titre</a:t>
             </a:r>
-          </a:p>
-        </p:txBody>
-      </p:sp>
-      <p:sp>
-        <p:nvSpPr>
-          <p:cNvPr id="3" name="Espace réservé du contenu 2">
-            <a:extLst>
-              <a:ext uri="{FF2B5EF4-FFF2-40B4-BE49-F238E27FC236}">
-                <a16:creationId xmlns:a16="http://schemas.microsoft.com/office/drawing/2014/main" id="{CA94DF76-63F5-E549-1FB8-D332C11ED74F}"/>
-              </a:ext>
-            </a:extLst>
-          </p:cNvPr>
+            <a:endParaRPr lang="en-US" dirty="0"/>
+          </a:p>
+        </p:txBody>
+      </p:sp>
+      <p:sp>
+        <p:nvSpPr>
+          <p:cNvPr id="3" name="Content Placeholder 2"/>
           <p:cNvSpPr>
             <a:spLocks noGrp="1"/>
           </p:cNvSpPr>
@@ -1269,8 +3338,8 @@
         </p:nvSpPr>
         <p:spPr>
           <a:xfrm>
-            <a:off x="838200" y="1825625"/>
-            <a:ext cx="5181600" cy="4351338"/>
+            <a:off x="677334" y="2160589"/>
+            <a:ext cx="4184035" cy="3880772"/>
           </a:xfrm>
         </p:spPr>
         <p:txBody>
@@ -1310,18 +3379,13 @@
               <a:rPr lang="fr-FR"/>
               <a:t>Cinquième niveau</a:t>
             </a:r>
-          </a:p>
-        </p:txBody>
-      </p:sp>
-      <p:sp>
-        <p:nvSpPr>
-          <p:cNvPr id="4" name="Espace réservé du contenu 3">
-            <a:extLst>
-              <a:ext uri="{FF2B5EF4-FFF2-40B4-BE49-F238E27FC236}">
-                <a16:creationId xmlns:a16="http://schemas.microsoft.com/office/drawing/2014/main" id="{817628D1-98DB-070D-0242-6BC33DF39DE2}"/>
-              </a:ext>
-            </a:extLst>
-          </p:cNvPr>
+            <a:endParaRPr lang="en-US" dirty="0"/>
+          </a:p>
+        </p:txBody>
+      </p:sp>
+      <p:sp>
+        <p:nvSpPr>
+          <p:cNvPr id="4" name="Content Placeholder 3"/>
           <p:cNvSpPr>
             <a:spLocks noGrp="1"/>
           </p:cNvSpPr>
@@ -1331,8 +3395,8 @@
         </p:nvSpPr>
         <p:spPr>
           <a:xfrm>
-            <a:off x="6172200" y="1825625"/>
-            <a:ext cx="5181600" cy="4351338"/>
+            <a:off x="5089970" y="2160589"/>
+            <a:ext cx="4184034" cy="3880773"/>
           </a:xfrm>
         </p:spPr>
         <p:txBody>
@@ -1372,18 +3436,13 @@
               <a:rPr lang="fr-FR"/>
               <a:t>Cinquième niveau</a:t>
             </a:r>
-          </a:p>
-        </p:txBody>
-      </p:sp>
-      <p:sp>
-        <p:nvSpPr>
-          <p:cNvPr id="5" name="Espace réservé de la date 4">
-            <a:extLst>
-              <a:ext uri="{FF2B5EF4-FFF2-40B4-BE49-F238E27FC236}">
-                <a16:creationId xmlns:a16="http://schemas.microsoft.com/office/drawing/2014/main" id="{33066627-F943-0473-46A2-B5F6B424FE76}"/>
-              </a:ext>
-            </a:extLst>
-          </p:cNvPr>
+            <a:endParaRPr lang="en-US" dirty="0"/>
+          </a:p>
+        </p:txBody>
+      </p:sp>
+      <p:sp>
+        <p:nvSpPr>
+          <p:cNvPr id="5" name="Date Placeholder 4"/>
           <p:cNvSpPr>
             <a:spLocks noGrp="1"/>
           </p:cNvSpPr>
@@ -1406,13 +3465,7 @@
       </p:sp>
       <p:sp>
         <p:nvSpPr>
-          <p:cNvPr id="6" name="Espace réservé du pied de page 5">
-            <a:extLst>
-              <a:ext uri="{FF2B5EF4-FFF2-40B4-BE49-F238E27FC236}">
-                <a16:creationId xmlns:a16="http://schemas.microsoft.com/office/drawing/2014/main" id="{21B9161A-E29B-4A64-4350-8D9463E8EB9D}"/>
-              </a:ext>
-            </a:extLst>
-          </p:cNvPr>
+          <p:cNvPr id="6" name="Footer Placeholder 5"/>
           <p:cNvSpPr>
             <a:spLocks noGrp="1"/>
           </p:cNvSpPr>
@@ -1431,13 +3484,7 @@
       </p:sp>
       <p:sp>
         <p:nvSpPr>
-          <p:cNvPr id="7" name="Espace réservé du numéro de diapositive 6">
-            <a:extLst>
-              <a:ext uri="{FF2B5EF4-FFF2-40B4-BE49-F238E27FC236}">
-                <a16:creationId xmlns:a16="http://schemas.microsoft.com/office/drawing/2014/main" id="{6086BBEF-8619-FAB3-EA06-9D8D6B26F1C2}"/>
-              </a:ext>
-            </a:extLst>
-          </p:cNvPr>
+          <p:cNvPr id="7" name="Slide Number Placeholder 6"/>
           <p:cNvSpPr>
             <a:spLocks noGrp="1"/>
           </p:cNvSpPr>
@@ -1461,13 +3508,18 @@
     </p:spTree>
     <p:extLst>
       <p:ext uri="{BB962C8B-B14F-4D97-AF65-F5344CB8AC3E}">
-        <p14:creationId xmlns:p14="http://schemas.microsoft.com/office/powerpoint/2010/main" val="2942727038"/>
+        <p14:creationId xmlns:p14="http://schemas.microsoft.com/office/powerpoint/2010/main" val="3175340741"/>
       </p:ext>
     </p:extLst>
   </p:cSld>
   <p:clrMapOvr>
     <a:masterClrMapping/>
   </p:clrMapOvr>
+  <p:extLst>
+    <p:ext uri="{DCECCB84-F9BA-43D5-87BE-67443E8EF086}">
+      <p15:sldGuideLst xmlns:p15="http://schemas.microsoft.com/office/powerpoint/2012/main"/>
+    </p:ext>
+  </p:extLst>
 </p:sldLayout>
 </file>
 
@@ -1490,65 +3542,55 @@
       </p:grpSpPr>
       <p:sp>
         <p:nvSpPr>
-          <p:cNvPr id="2" name="Titre 1">
-            <a:extLst>
-              <a:ext uri="{FF2B5EF4-FFF2-40B4-BE49-F238E27FC236}">
-                <a16:creationId xmlns:a16="http://schemas.microsoft.com/office/drawing/2014/main" id="{5AA75FE8-FCA9-1C49-36B2-77A23F7E1CC6}"/>
-              </a:ext>
-            </a:extLst>
-          </p:cNvPr>
+          <p:cNvPr id="2" name="Title 1"/>
           <p:cNvSpPr>
             <a:spLocks noGrp="1"/>
           </p:cNvSpPr>
           <p:nvPr>
             <p:ph type="title"/>
+          </p:nvPr>
+        </p:nvSpPr>
+        <p:spPr/>
+        <p:txBody>
+          <a:bodyPr/>
+          <a:lstStyle>
+            <a:lvl1pPr>
+              <a:defRPr/>
+            </a:lvl1pPr>
+          </a:lstStyle>
+          <a:p>
+            <a:r>
+              <a:rPr lang="fr-FR"/>
+              <a:t>Modifiez le style du titre</a:t>
+            </a:r>
+            <a:endParaRPr lang="en-US" dirty="0"/>
+          </a:p>
+        </p:txBody>
+      </p:sp>
+      <p:sp>
+        <p:nvSpPr>
+          <p:cNvPr id="3" name="Text Placeholder 2"/>
+          <p:cNvSpPr>
+            <a:spLocks noGrp="1"/>
+          </p:cNvSpPr>
+          <p:nvPr>
+            <p:ph type="body" idx="1"/>
           </p:nvPr>
         </p:nvSpPr>
         <p:spPr>
           <a:xfrm>
-            <a:off x="839788" y="365125"/>
-            <a:ext cx="10515600" cy="1325563"/>
+            <a:off x="675745" y="2160983"/>
+            <a:ext cx="4185623" cy="576262"/>
           </a:xfrm>
         </p:spPr>
         <p:txBody>
-          <a:bodyPr/>
-          <a:lstStyle/>
-          <a:p>
-            <a:r>
-              <a:rPr lang="fr-FR"/>
-              <a:t>Modifiez le style du titre</a:t>
-            </a:r>
-          </a:p>
-        </p:txBody>
-      </p:sp>
-      <p:sp>
-        <p:nvSpPr>
-          <p:cNvPr id="3" name="Espace réservé du texte 2">
-            <a:extLst>
-              <a:ext uri="{FF2B5EF4-FFF2-40B4-BE49-F238E27FC236}">
-                <a16:creationId xmlns:a16="http://schemas.microsoft.com/office/drawing/2014/main" id="{47B66BCA-FCF3-A9B0-DC4B-A110273453B4}"/>
-              </a:ext>
-            </a:extLst>
-          </p:cNvPr>
-          <p:cNvSpPr>
-            <a:spLocks noGrp="1"/>
-          </p:cNvSpPr>
-          <p:nvPr>
-            <p:ph type="body" idx="1"/>
-          </p:nvPr>
-        </p:nvSpPr>
-        <p:spPr>
-          <a:xfrm>
-            <a:off x="839788" y="1681163"/>
-            <a:ext cx="5157787" cy="823912"/>
-          </a:xfrm>
-        </p:spPr>
-        <p:txBody>
-          <a:bodyPr anchor="b"/>
+          <a:bodyPr anchor="b">
+            <a:noAutofit/>
+          </a:bodyPr>
           <a:lstStyle>
             <a:lvl1pPr marL="0" indent="0">
               <a:buNone/>
-              <a:defRPr sz="2400" b="1"/>
+              <a:defRPr sz="2400" b="0"/>
             </a:lvl1pPr>
             <a:lvl2pPr marL="457200" indent="0">
               <a:buNone/>
@@ -1594,13 +3636,7 @@
       </p:sp>
       <p:sp>
         <p:nvSpPr>
-          <p:cNvPr id="4" name="Espace réservé du contenu 3">
-            <a:extLst>
-              <a:ext uri="{FF2B5EF4-FFF2-40B4-BE49-F238E27FC236}">
-                <a16:creationId xmlns:a16="http://schemas.microsoft.com/office/drawing/2014/main" id="{AA969B09-0C76-8E19-543F-B2F7965D0754}"/>
-              </a:ext>
-            </a:extLst>
-          </p:cNvPr>
+          <p:cNvPr id="4" name="Content Placeholder 3"/>
           <p:cNvSpPr>
             <a:spLocks noGrp="1"/>
           </p:cNvSpPr>
@@ -1610,12 +3646,14 @@
         </p:nvSpPr>
         <p:spPr>
           <a:xfrm>
-            <a:off x="839788" y="2505075"/>
-            <a:ext cx="5157787" cy="3684588"/>
+            <a:off x="675745" y="2737245"/>
+            <a:ext cx="4185623" cy="3304117"/>
           </a:xfrm>
         </p:spPr>
         <p:txBody>
-          <a:bodyPr/>
+          <a:bodyPr>
+            <a:normAutofit/>
+          </a:bodyPr>
           <a:lstStyle/>
           <a:p>
             <a:pPr lvl="0"/>
@@ -1651,18 +3689,13 @@
               <a:rPr lang="fr-FR"/>
               <a:t>Cinquième niveau</a:t>
             </a:r>
-          </a:p>
-        </p:txBody>
-      </p:sp>
-      <p:sp>
-        <p:nvSpPr>
-          <p:cNvPr id="5" name="Espace réservé du texte 4">
-            <a:extLst>
-              <a:ext uri="{FF2B5EF4-FFF2-40B4-BE49-F238E27FC236}">
-                <a16:creationId xmlns:a16="http://schemas.microsoft.com/office/drawing/2014/main" id="{8C56C50A-885B-1FB9-765C-E341CB342B5F}"/>
-              </a:ext>
-            </a:extLst>
-          </p:cNvPr>
+            <a:endParaRPr lang="en-US" dirty="0"/>
+          </a:p>
+        </p:txBody>
+      </p:sp>
+      <p:sp>
+        <p:nvSpPr>
+          <p:cNvPr id="5" name="Text Placeholder 4"/>
           <p:cNvSpPr>
             <a:spLocks noGrp="1"/>
           </p:cNvSpPr>
@@ -1672,16 +3705,18 @@
         </p:nvSpPr>
         <p:spPr>
           <a:xfrm>
-            <a:off x="6172200" y="1681163"/>
-            <a:ext cx="5183188" cy="823912"/>
+            <a:off x="5088383" y="2160983"/>
+            <a:ext cx="4185618" cy="576262"/>
           </a:xfrm>
         </p:spPr>
         <p:txBody>
-          <a:bodyPr anchor="b"/>
+          <a:bodyPr anchor="b">
+            <a:noAutofit/>
+          </a:bodyPr>
           <a:lstStyle>
             <a:lvl1pPr marL="0" indent="0">
               <a:buNone/>
-              <a:defRPr sz="2400" b="1"/>
+              <a:defRPr sz="2400" b="0"/>
             </a:lvl1pPr>
             <a:lvl2pPr marL="457200" indent="0">
               <a:buNone/>
@@ -1727,13 +3762,7 @@
       </p:sp>
       <p:sp>
         <p:nvSpPr>
-          <p:cNvPr id="6" name="Espace réservé du contenu 5">
-            <a:extLst>
-              <a:ext uri="{FF2B5EF4-FFF2-40B4-BE49-F238E27FC236}">
-                <a16:creationId xmlns:a16="http://schemas.microsoft.com/office/drawing/2014/main" id="{C99BC75F-3D97-896F-C7FF-28D3EEC9F691}"/>
-              </a:ext>
-            </a:extLst>
-          </p:cNvPr>
+          <p:cNvPr id="6" name="Content Placeholder 5"/>
           <p:cNvSpPr>
             <a:spLocks noGrp="1"/>
           </p:cNvSpPr>
@@ -1743,12 +3772,14 @@
         </p:nvSpPr>
         <p:spPr>
           <a:xfrm>
-            <a:off x="6172200" y="2505075"/>
-            <a:ext cx="5183188" cy="3684588"/>
+            <a:off x="5088384" y="2737245"/>
+            <a:ext cx="4185617" cy="3304117"/>
           </a:xfrm>
         </p:spPr>
         <p:txBody>
-          <a:bodyPr/>
+          <a:bodyPr>
+            <a:normAutofit/>
+          </a:bodyPr>
           <a:lstStyle/>
           <a:p>
             <a:pPr lvl="0"/>
@@ -1784,18 +3815,13 @@
               <a:rPr lang="fr-FR"/>
               <a:t>Cinquième niveau</a:t>
             </a:r>
-          </a:p>
-        </p:txBody>
-      </p:sp>
-      <p:sp>
-        <p:nvSpPr>
-          <p:cNvPr id="7" name="Espace réservé de la date 6">
-            <a:extLst>
-              <a:ext uri="{FF2B5EF4-FFF2-40B4-BE49-F238E27FC236}">
-                <a16:creationId xmlns:a16="http://schemas.microsoft.com/office/drawing/2014/main" id="{4A705CE8-EDFD-A59A-1713-F249E94F3D5C}"/>
-              </a:ext>
-            </a:extLst>
-          </p:cNvPr>
+            <a:endParaRPr lang="en-US" dirty="0"/>
+          </a:p>
+        </p:txBody>
+      </p:sp>
+      <p:sp>
+        <p:nvSpPr>
+          <p:cNvPr id="7" name="Date Placeholder 6"/>
           <p:cNvSpPr>
             <a:spLocks noGrp="1"/>
           </p:cNvSpPr>
@@ -1818,13 +3844,7 @@
       </p:sp>
       <p:sp>
         <p:nvSpPr>
-          <p:cNvPr id="8" name="Espace réservé du pied de page 7">
-            <a:extLst>
-              <a:ext uri="{FF2B5EF4-FFF2-40B4-BE49-F238E27FC236}">
-                <a16:creationId xmlns:a16="http://schemas.microsoft.com/office/drawing/2014/main" id="{07CE9D9D-E6E0-2941-CBBA-A83F849DE310}"/>
-              </a:ext>
-            </a:extLst>
-          </p:cNvPr>
+          <p:cNvPr id="8" name="Footer Placeholder 7"/>
           <p:cNvSpPr>
             <a:spLocks noGrp="1"/>
           </p:cNvSpPr>
@@ -1843,13 +3863,7 @@
       </p:sp>
       <p:sp>
         <p:nvSpPr>
-          <p:cNvPr id="9" name="Espace réservé du numéro de diapositive 8">
-            <a:extLst>
-              <a:ext uri="{FF2B5EF4-FFF2-40B4-BE49-F238E27FC236}">
-                <a16:creationId xmlns:a16="http://schemas.microsoft.com/office/drawing/2014/main" id="{D85CEB66-3673-33AF-1F5B-FE6801E32AEB}"/>
-              </a:ext>
-            </a:extLst>
-          </p:cNvPr>
+          <p:cNvPr id="9" name="Slide Number Placeholder 8"/>
           <p:cNvSpPr>
             <a:spLocks noGrp="1"/>
           </p:cNvSpPr>
@@ -1873,13 +3887,18 @@
     </p:spTree>
     <p:extLst>
       <p:ext uri="{BB962C8B-B14F-4D97-AF65-F5344CB8AC3E}">
-        <p14:creationId xmlns:p14="http://schemas.microsoft.com/office/powerpoint/2010/main" val="2394759027"/>
+        <p14:creationId xmlns:p14="http://schemas.microsoft.com/office/powerpoint/2010/main" val="2949714358"/>
       </p:ext>
     </p:extLst>
   </p:cSld>
   <p:clrMapOvr>
     <a:masterClrMapping/>
   </p:clrMapOvr>
+  <p:extLst>
+    <p:ext uri="{DCECCB84-F9BA-43D5-87BE-67443E8EF086}">
+      <p15:sldGuideLst xmlns:p15="http://schemas.microsoft.com/office/powerpoint/2012/main"/>
+    </p:ext>
+  </p:extLst>
 </p:sldLayout>
 </file>
 
@@ -1902,13 +3921,7 @@
       </p:grpSpPr>
       <p:sp>
         <p:nvSpPr>
-          <p:cNvPr id="2" name="Titre 1">
-            <a:extLst>
-              <a:ext uri="{FF2B5EF4-FFF2-40B4-BE49-F238E27FC236}">
-                <a16:creationId xmlns:a16="http://schemas.microsoft.com/office/drawing/2014/main" id="{48B4330D-AD06-B5F0-2B2D-A61490F25DD0}"/>
-              </a:ext>
-            </a:extLst>
-          </p:cNvPr>
+          <p:cNvPr id="2" name="Title 1"/>
           <p:cNvSpPr>
             <a:spLocks noGrp="1"/>
           </p:cNvSpPr>
@@ -1916,7 +3929,12 @@
             <p:ph type="title"/>
           </p:nvPr>
         </p:nvSpPr>
-        <p:spPr/>
+        <p:spPr>
+          <a:xfrm>
+            <a:off x="677334" y="609600"/>
+            <a:ext cx="8596668" cy="1320800"/>
+          </a:xfrm>
+        </p:spPr>
         <p:txBody>
           <a:bodyPr/>
           <a:lstStyle/>
@@ -1925,18 +3943,13 @@
               <a:rPr lang="fr-FR"/>
               <a:t>Modifiez le style du titre</a:t>
             </a:r>
-          </a:p>
-        </p:txBody>
-      </p:sp>
-      <p:sp>
-        <p:nvSpPr>
-          <p:cNvPr id="3" name="Espace réservé de la date 2">
-            <a:extLst>
-              <a:ext uri="{FF2B5EF4-FFF2-40B4-BE49-F238E27FC236}">
-                <a16:creationId xmlns:a16="http://schemas.microsoft.com/office/drawing/2014/main" id="{796573B5-D0F8-4F75-D61D-4380B32BCBC0}"/>
-              </a:ext>
-            </a:extLst>
-          </p:cNvPr>
+            <a:endParaRPr lang="en-US" dirty="0"/>
+          </a:p>
+        </p:txBody>
+      </p:sp>
+      <p:sp>
+        <p:nvSpPr>
+          <p:cNvPr id="3" name="Date Placeholder 2"/>
           <p:cNvSpPr>
             <a:spLocks noGrp="1"/>
           </p:cNvSpPr>
@@ -1959,13 +3972,7 @@
       </p:sp>
       <p:sp>
         <p:nvSpPr>
-          <p:cNvPr id="4" name="Espace réservé du pied de page 3">
-            <a:extLst>
-              <a:ext uri="{FF2B5EF4-FFF2-40B4-BE49-F238E27FC236}">
-                <a16:creationId xmlns:a16="http://schemas.microsoft.com/office/drawing/2014/main" id="{EBBEBB57-06DF-63BA-8CA8-E718D0B89A4C}"/>
-              </a:ext>
-            </a:extLst>
-          </p:cNvPr>
+          <p:cNvPr id="4" name="Footer Placeholder 3"/>
           <p:cNvSpPr>
             <a:spLocks noGrp="1"/>
           </p:cNvSpPr>
@@ -1984,13 +3991,7 @@
       </p:sp>
       <p:sp>
         <p:nvSpPr>
-          <p:cNvPr id="5" name="Espace réservé du numéro de diapositive 4">
-            <a:extLst>
-              <a:ext uri="{FF2B5EF4-FFF2-40B4-BE49-F238E27FC236}">
-                <a16:creationId xmlns:a16="http://schemas.microsoft.com/office/drawing/2014/main" id="{FDBD7078-573B-B9AE-FB31-366EDF324350}"/>
-              </a:ext>
-            </a:extLst>
-          </p:cNvPr>
+          <p:cNvPr id="5" name="Slide Number Placeholder 4"/>
           <p:cNvSpPr>
             <a:spLocks noGrp="1"/>
           </p:cNvSpPr>
@@ -2014,7 +4015,7 @@
     </p:spTree>
     <p:extLst>
       <p:ext uri="{BB962C8B-B14F-4D97-AF65-F5344CB8AC3E}">
-        <p14:creationId xmlns:p14="http://schemas.microsoft.com/office/powerpoint/2010/main" val="1968180299"/>
+        <p14:creationId xmlns:p14="http://schemas.microsoft.com/office/powerpoint/2010/main" val="3029010209"/>
       </p:ext>
     </p:extLst>
   </p:cSld>
@@ -2043,13 +4044,7 @@
       </p:grpSpPr>
       <p:sp>
         <p:nvSpPr>
-          <p:cNvPr id="2" name="Espace réservé de la date 1">
-            <a:extLst>
-              <a:ext uri="{FF2B5EF4-FFF2-40B4-BE49-F238E27FC236}">
-                <a16:creationId xmlns:a16="http://schemas.microsoft.com/office/drawing/2014/main" id="{5575EBDA-0B2B-04F3-0635-9DB61D81CFAA}"/>
-              </a:ext>
-            </a:extLst>
-          </p:cNvPr>
+          <p:cNvPr id="2" name="Date Placeholder 1"/>
           <p:cNvSpPr>
             <a:spLocks noGrp="1"/>
           </p:cNvSpPr>
@@ -2072,13 +4067,7 @@
       </p:sp>
       <p:sp>
         <p:nvSpPr>
-          <p:cNvPr id="3" name="Espace réservé du pied de page 2">
-            <a:extLst>
-              <a:ext uri="{FF2B5EF4-FFF2-40B4-BE49-F238E27FC236}">
-                <a16:creationId xmlns:a16="http://schemas.microsoft.com/office/drawing/2014/main" id="{1896D6DC-DB37-9AA6-813D-3518A9F1BEC8}"/>
-              </a:ext>
-            </a:extLst>
-          </p:cNvPr>
+          <p:cNvPr id="3" name="Footer Placeholder 2"/>
           <p:cNvSpPr>
             <a:spLocks noGrp="1"/>
           </p:cNvSpPr>
@@ -2097,13 +4086,7 @@
       </p:sp>
       <p:sp>
         <p:nvSpPr>
-          <p:cNvPr id="4" name="Espace réservé du numéro de diapositive 3">
-            <a:extLst>
-              <a:ext uri="{FF2B5EF4-FFF2-40B4-BE49-F238E27FC236}">
-                <a16:creationId xmlns:a16="http://schemas.microsoft.com/office/drawing/2014/main" id="{DA9399B2-298B-33BD-CFFC-08EF1F52BAA7}"/>
-              </a:ext>
-            </a:extLst>
-          </p:cNvPr>
+          <p:cNvPr id="4" name="Slide Number Placeholder 3"/>
           <p:cNvSpPr>
             <a:spLocks noGrp="1"/>
           </p:cNvSpPr>
@@ -2127,7 +4110,7 @@
     </p:spTree>
     <p:extLst>
       <p:ext uri="{BB962C8B-B14F-4D97-AF65-F5344CB8AC3E}">
-        <p14:creationId xmlns:p14="http://schemas.microsoft.com/office/powerpoint/2010/main" val="1647573016"/>
+        <p14:creationId xmlns:p14="http://schemas.microsoft.com/office/powerpoint/2010/main" val="92197294"/>
       </p:ext>
     </p:extLst>
   </p:cSld>
@@ -2156,13 +4139,7 @@
       </p:grpSpPr>
       <p:sp>
         <p:nvSpPr>
-          <p:cNvPr id="2" name="Titre 1">
-            <a:extLst>
-              <a:ext uri="{FF2B5EF4-FFF2-40B4-BE49-F238E27FC236}">
-                <a16:creationId xmlns:a16="http://schemas.microsoft.com/office/drawing/2014/main" id="{CECC281E-2315-B3D2-F93C-0B96FD743781}"/>
-              </a:ext>
-            </a:extLst>
-          </p:cNvPr>
+          <p:cNvPr id="2" name="Title 1"/>
           <p:cNvSpPr>
             <a:spLocks noGrp="1"/>
           </p:cNvSpPr>
@@ -2172,15 +4149,17 @@
         </p:nvSpPr>
         <p:spPr>
           <a:xfrm>
-            <a:off x="839788" y="457200"/>
-            <a:ext cx="3932237" cy="1600200"/>
+            <a:off x="677334" y="1498604"/>
+            <a:ext cx="3854528" cy="1278466"/>
           </a:xfrm>
         </p:spPr>
         <p:txBody>
-          <a:bodyPr anchor="b"/>
+          <a:bodyPr anchor="b">
+            <a:normAutofit/>
+          </a:bodyPr>
           <a:lstStyle>
             <a:lvl1pPr>
-              <a:defRPr sz="3200"/>
+              <a:defRPr sz="2000"/>
             </a:lvl1pPr>
           </a:lstStyle>
           <a:p>
@@ -2188,18 +4167,13 @@
               <a:rPr lang="fr-FR"/>
               <a:t>Modifiez le style du titre</a:t>
             </a:r>
-          </a:p>
-        </p:txBody>
-      </p:sp>
-      <p:sp>
-        <p:nvSpPr>
-          <p:cNvPr id="3" name="Espace réservé du contenu 2">
-            <a:extLst>
-              <a:ext uri="{FF2B5EF4-FFF2-40B4-BE49-F238E27FC236}">
-                <a16:creationId xmlns:a16="http://schemas.microsoft.com/office/drawing/2014/main" id="{5D02189E-6FFA-1364-45C0-526E9D45CC58}"/>
-              </a:ext>
-            </a:extLst>
-          </p:cNvPr>
+            <a:endParaRPr lang="en-US" dirty="0"/>
+          </a:p>
+        </p:txBody>
+      </p:sp>
+      <p:sp>
+        <p:nvSpPr>
+          <p:cNvPr id="3" name="Content Placeholder 2"/>
           <p:cNvSpPr>
             <a:spLocks noGrp="1"/>
           </p:cNvSpPr>
@@ -2209,41 +4183,15 @@
         </p:nvSpPr>
         <p:spPr>
           <a:xfrm>
-            <a:off x="5183188" y="987425"/>
-            <a:ext cx="6172200" cy="4873625"/>
+            <a:off x="4760461" y="514924"/>
+            <a:ext cx="4513541" cy="5526437"/>
           </a:xfrm>
         </p:spPr>
         <p:txBody>
-          <a:bodyPr/>
-          <a:lstStyle>
-            <a:lvl1pPr>
-              <a:defRPr sz="3200"/>
-            </a:lvl1pPr>
-            <a:lvl2pPr>
-              <a:defRPr sz="2800"/>
-            </a:lvl2pPr>
-            <a:lvl3pPr>
-              <a:defRPr sz="2400"/>
-            </a:lvl3pPr>
-            <a:lvl4pPr>
-              <a:defRPr sz="2000"/>
-            </a:lvl4pPr>
-            <a:lvl5pPr>
-              <a:defRPr sz="2000"/>
-            </a:lvl5pPr>
-            <a:lvl6pPr>
-              <a:defRPr sz="2000"/>
-            </a:lvl6pPr>
-            <a:lvl7pPr>
-              <a:defRPr sz="2000"/>
-            </a:lvl7pPr>
-            <a:lvl8pPr>
-              <a:defRPr sz="2000"/>
-            </a:lvl8pPr>
-            <a:lvl9pPr>
-              <a:defRPr sz="2000"/>
-            </a:lvl9pPr>
-          </a:lstStyle>
+          <a:bodyPr>
+            <a:normAutofit/>
+          </a:bodyPr>
+          <a:lstStyle/>
           <a:p>
             <a:pPr lvl="0"/>
             <a:r>
@@ -2278,18 +4226,13 @@
               <a:rPr lang="fr-FR"/>
               <a:t>Cinquième niveau</a:t>
             </a:r>
-          </a:p>
-        </p:txBody>
-      </p:sp>
-      <p:sp>
-        <p:nvSpPr>
-          <p:cNvPr id="4" name="Espace réservé du texte 3">
-            <a:extLst>
-              <a:ext uri="{FF2B5EF4-FFF2-40B4-BE49-F238E27FC236}">
-                <a16:creationId xmlns:a16="http://schemas.microsoft.com/office/drawing/2014/main" id="{C7DF85E8-871D-DE2E-CA11-A0BE226AF2DC}"/>
-              </a:ext>
-            </a:extLst>
-          </p:cNvPr>
+            <a:endParaRPr lang="en-US" dirty="0"/>
+          </a:p>
+        </p:txBody>
+      </p:sp>
+      <p:sp>
+        <p:nvSpPr>
+          <p:cNvPr id="4" name="Text Placeholder 3"/>
           <p:cNvSpPr>
             <a:spLocks noGrp="1"/>
           </p:cNvSpPr>
@@ -2299,46 +4242,48 @@
         </p:nvSpPr>
         <p:spPr>
           <a:xfrm>
-            <a:off x="839788" y="2057400"/>
-            <a:ext cx="3932237" cy="3811588"/>
+            <a:off x="677334" y="2777069"/>
+            <a:ext cx="3854528" cy="2584449"/>
           </a:xfrm>
         </p:spPr>
         <p:txBody>
-          <a:bodyPr/>
+          <a:bodyPr>
+            <a:normAutofit/>
+          </a:bodyPr>
           <a:lstStyle>
             <a:lvl1pPr marL="0" indent="0">
               <a:buNone/>
-              <a:defRPr sz="1600"/>
+              <a:defRPr sz="1400"/>
             </a:lvl1pPr>
-            <a:lvl2pPr marL="457200" indent="0">
+            <a:lvl2pPr marL="457063" indent="0">
               <a:buNone/>
               <a:defRPr sz="1400"/>
             </a:lvl2pPr>
-            <a:lvl3pPr marL="914400" indent="0">
+            <a:lvl3pPr marL="914126" indent="0">
               <a:buNone/>
               <a:defRPr sz="1200"/>
             </a:lvl3pPr>
-            <a:lvl4pPr marL="1371600" indent="0">
+            <a:lvl4pPr marL="1371189" indent="0">
               <a:buNone/>
               <a:defRPr sz="1000"/>
             </a:lvl4pPr>
-            <a:lvl5pPr marL="1828800" indent="0">
+            <a:lvl5pPr marL="1828251" indent="0">
               <a:buNone/>
               <a:defRPr sz="1000"/>
             </a:lvl5pPr>
-            <a:lvl6pPr marL="2286000" indent="0">
+            <a:lvl6pPr marL="2285314" indent="0">
               <a:buNone/>
               <a:defRPr sz="1000"/>
             </a:lvl6pPr>
-            <a:lvl7pPr marL="2743200" indent="0">
+            <a:lvl7pPr marL="2742377" indent="0">
               <a:buNone/>
               <a:defRPr sz="1000"/>
             </a:lvl7pPr>
-            <a:lvl8pPr marL="3200400" indent="0">
+            <a:lvl8pPr marL="3199440" indent="0">
               <a:buNone/>
               <a:defRPr sz="1000"/>
             </a:lvl8pPr>
-            <a:lvl9pPr marL="3657600" indent="0">
+            <a:lvl9pPr marL="3656503" indent="0">
               <a:buNone/>
               <a:defRPr sz="1000"/>
             </a:lvl9pPr>
@@ -2354,13 +4299,7 @@
       </p:sp>
       <p:sp>
         <p:nvSpPr>
-          <p:cNvPr id="5" name="Espace réservé de la date 4">
-            <a:extLst>
-              <a:ext uri="{FF2B5EF4-FFF2-40B4-BE49-F238E27FC236}">
-                <a16:creationId xmlns:a16="http://schemas.microsoft.com/office/drawing/2014/main" id="{755DBF3C-A619-15C6-29C6-88237126DA9E}"/>
-              </a:ext>
-            </a:extLst>
-          </p:cNvPr>
+          <p:cNvPr id="5" name="Date Placeholder 4"/>
           <p:cNvSpPr>
             <a:spLocks noGrp="1"/>
           </p:cNvSpPr>
@@ -2383,13 +4322,7 @@
       </p:sp>
       <p:sp>
         <p:nvSpPr>
-          <p:cNvPr id="6" name="Espace réservé du pied de page 5">
-            <a:extLst>
-              <a:ext uri="{FF2B5EF4-FFF2-40B4-BE49-F238E27FC236}">
-                <a16:creationId xmlns:a16="http://schemas.microsoft.com/office/drawing/2014/main" id="{4DFC4EE4-5511-ABFC-EE96-9355BAD9FD9C}"/>
-              </a:ext>
-            </a:extLst>
-          </p:cNvPr>
+          <p:cNvPr id="6" name="Footer Placeholder 5"/>
           <p:cNvSpPr>
             <a:spLocks noGrp="1"/>
           </p:cNvSpPr>
@@ -2408,13 +4341,7 @@
       </p:sp>
       <p:sp>
         <p:nvSpPr>
-          <p:cNvPr id="7" name="Espace réservé du numéro de diapositive 6">
-            <a:extLst>
-              <a:ext uri="{FF2B5EF4-FFF2-40B4-BE49-F238E27FC236}">
-                <a16:creationId xmlns:a16="http://schemas.microsoft.com/office/drawing/2014/main" id="{6A166927-CF2E-942F-0FA3-80FC346BEAC9}"/>
-              </a:ext>
-            </a:extLst>
-          </p:cNvPr>
+          <p:cNvPr id="7" name="Slide Number Placeholder 6"/>
           <p:cNvSpPr>
             <a:spLocks noGrp="1"/>
           </p:cNvSpPr>
@@ -2438,13 +4365,18 @@
     </p:spTree>
     <p:extLst>
       <p:ext uri="{BB962C8B-B14F-4D97-AF65-F5344CB8AC3E}">
-        <p14:creationId xmlns:p14="http://schemas.microsoft.com/office/powerpoint/2010/main" val="1672931124"/>
+        <p14:creationId xmlns:p14="http://schemas.microsoft.com/office/powerpoint/2010/main" val="235454879"/>
       </p:ext>
     </p:extLst>
   </p:cSld>
   <p:clrMapOvr>
     <a:masterClrMapping/>
   </p:clrMapOvr>
+  <p:extLst>
+    <p:ext uri="{DCECCB84-F9BA-43D5-87BE-67443E8EF086}">
+      <p15:sldGuideLst xmlns:p15="http://schemas.microsoft.com/office/powerpoint/2012/main"/>
+    </p:ext>
+  </p:extLst>
 </p:sldLayout>
 </file>
 
@@ -2467,13 +4399,7 @@
       </p:grpSpPr>
       <p:sp>
         <p:nvSpPr>
-          <p:cNvPr id="2" name="Titre 1">
-            <a:extLst>
-              <a:ext uri="{FF2B5EF4-FFF2-40B4-BE49-F238E27FC236}">
-                <a16:creationId xmlns:a16="http://schemas.microsoft.com/office/drawing/2014/main" id="{90B29343-1731-5792-11B8-B61A5FBE8579}"/>
-              </a:ext>
-            </a:extLst>
-          </p:cNvPr>
+          <p:cNvPr id="2" name="Title 1"/>
           <p:cNvSpPr>
             <a:spLocks noGrp="1"/>
           </p:cNvSpPr>
@@ -2483,15 +4409,17 @@
         </p:nvSpPr>
         <p:spPr>
           <a:xfrm>
-            <a:off x="839788" y="457200"/>
-            <a:ext cx="3932237" cy="1600200"/>
+            <a:off x="677334" y="4800600"/>
+            <a:ext cx="8596667" cy="566738"/>
           </a:xfrm>
         </p:spPr>
         <p:txBody>
-          <a:bodyPr anchor="b"/>
+          <a:bodyPr anchor="b">
+            <a:normAutofit/>
+          </a:bodyPr>
           <a:lstStyle>
-            <a:lvl1pPr>
-              <a:defRPr sz="3200"/>
+            <a:lvl1pPr algn="l">
+              <a:defRPr sz="2400" b="0"/>
             </a:lvl1pPr>
           </a:lstStyle>
           <a:p>
@@ -2499,20 +4427,15 @@
               <a:rPr lang="fr-FR"/>
               <a:t>Modifiez le style du titre</a:t>
             </a:r>
-          </a:p>
-        </p:txBody>
-      </p:sp>
-      <p:sp>
-        <p:nvSpPr>
-          <p:cNvPr id="3" name="Espace réservé pour une image  2">
-            <a:extLst>
-              <a:ext uri="{FF2B5EF4-FFF2-40B4-BE49-F238E27FC236}">
-                <a16:creationId xmlns:a16="http://schemas.microsoft.com/office/drawing/2014/main" id="{4072CC1B-0FD9-D7BC-A695-44EA59501BA5}"/>
-              </a:ext>
-            </a:extLst>
-          </p:cNvPr>
-          <p:cNvSpPr>
-            <a:spLocks noGrp="1"/>
+            <a:endParaRPr lang="en-US" dirty="0"/>
+          </a:p>
+        </p:txBody>
+      </p:sp>
+      <p:sp>
+        <p:nvSpPr>
+          <p:cNvPr id="3" name="Picture Placeholder 2"/>
+          <p:cNvSpPr>
+            <a:spLocks noGrp="1" noChangeAspect="1"/>
           </p:cNvSpPr>
           <p:nvPr>
             <p:ph type="pic" idx="1"/>
@@ -2520,118 +4443,120 @@
         </p:nvSpPr>
         <p:spPr>
           <a:xfrm>
-            <a:off x="5183188" y="987425"/>
-            <a:ext cx="6172200" cy="4873625"/>
+            <a:off x="677334" y="609600"/>
+            <a:ext cx="8596668" cy="3845718"/>
           </a:xfrm>
         </p:spPr>
         <p:txBody>
-          <a:bodyPr/>
+          <a:bodyPr anchor="t">
+            <a:normAutofit/>
+          </a:bodyPr>
           <a:lstStyle>
-            <a:lvl1pPr marL="0" indent="0">
-              <a:buNone/>
-              <a:defRPr sz="3200"/>
-            </a:lvl1pPr>
-            <a:lvl2pPr marL="457200" indent="0">
-              <a:buNone/>
-              <a:defRPr sz="2800"/>
-            </a:lvl2pPr>
-            <a:lvl3pPr marL="914400" indent="0">
-              <a:buNone/>
-              <a:defRPr sz="2400"/>
-            </a:lvl3pPr>
-            <a:lvl4pPr marL="1371600" indent="0">
-              <a:buNone/>
-              <a:defRPr sz="2000"/>
-            </a:lvl4pPr>
-            <a:lvl5pPr marL="1828800" indent="0">
-              <a:buNone/>
-              <a:defRPr sz="2000"/>
-            </a:lvl5pPr>
-            <a:lvl6pPr marL="2286000" indent="0">
-              <a:buNone/>
-              <a:defRPr sz="2000"/>
-            </a:lvl6pPr>
-            <a:lvl7pPr marL="2743200" indent="0">
-              <a:buNone/>
-              <a:defRPr sz="2000"/>
-            </a:lvl7pPr>
-            <a:lvl8pPr marL="3200400" indent="0">
-              <a:buNone/>
-              <a:defRPr sz="2000"/>
-            </a:lvl8pPr>
-            <a:lvl9pPr marL="3657600" indent="0">
-              <a:buNone/>
-              <a:defRPr sz="2000"/>
-            </a:lvl9pPr>
-          </a:lstStyle>
-          <a:p>
-            <a:endParaRPr lang="fr-FR"/>
-          </a:p>
-        </p:txBody>
-      </p:sp>
-      <p:sp>
-        <p:nvSpPr>
-          <p:cNvPr id="4" name="Espace réservé du texte 3">
-            <a:extLst>
-              <a:ext uri="{FF2B5EF4-FFF2-40B4-BE49-F238E27FC236}">
-                <a16:creationId xmlns:a16="http://schemas.microsoft.com/office/drawing/2014/main" id="{3E5A8514-A33F-4129-0B5A-35582FB8EF95}"/>
-              </a:ext>
-            </a:extLst>
-          </p:cNvPr>
-          <p:cNvSpPr>
-            <a:spLocks noGrp="1"/>
-          </p:cNvSpPr>
-          <p:nvPr>
-            <p:ph type="body" sz="half" idx="2"/>
-          </p:nvPr>
-        </p:nvSpPr>
-        <p:spPr>
-          <a:xfrm>
-            <a:off x="839788" y="2057400"/>
-            <a:ext cx="3932237" cy="3811588"/>
-          </a:xfrm>
-        </p:spPr>
-        <p:txBody>
-          <a:bodyPr/>
-          <a:lstStyle>
-            <a:lvl1pPr marL="0" indent="0">
+            <a:lvl1pPr marL="0" indent="0" algn="ctr">
               <a:buNone/>
               <a:defRPr sz="1600"/>
             </a:lvl1pPr>
             <a:lvl2pPr marL="457200" indent="0">
               <a:buNone/>
-              <a:defRPr sz="1400"/>
+              <a:defRPr sz="1600"/>
             </a:lvl2pPr>
             <a:lvl3pPr marL="914400" indent="0">
               <a:buNone/>
-              <a:defRPr sz="1200"/>
+              <a:defRPr sz="1600"/>
             </a:lvl3pPr>
             <a:lvl4pPr marL="1371600" indent="0">
               <a:buNone/>
-              <a:defRPr sz="1000"/>
+              <a:defRPr sz="1600"/>
             </a:lvl4pPr>
             <a:lvl5pPr marL="1828800" indent="0">
               <a:buNone/>
-              <a:defRPr sz="1000"/>
+              <a:defRPr sz="1600"/>
             </a:lvl5pPr>
             <a:lvl6pPr marL="2286000" indent="0">
               <a:buNone/>
-              <a:defRPr sz="1000"/>
+              <a:defRPr sz="1600"/>
             </a:lvl6pPr>
             <a:lvl7pPr marL="2743200" indent="0">
               <a:buNone/>
-              <a:defRPr sz="1000"/>
+              <a:defRPr sz="1600"/>
             </a:lvl7pPr>
             <a:lvl8pPr marL="3200400" indent="0">
               <a:buNone/>
-              <a:defRPr sz="1000"/>
+              <a:defRPr sz="1600"/>
             </a:lvl8pPr>
             <a:lvl9pPr marL="3657600" indent="0">
               <a:buNone/>
-              <a:defRPr sz="1000"/>
+              <a:defRPr sz="1600"/>
             </a:lvl9pPr>
           </a:lstStyle>
           <a:p>
+            <a:r>
+              <a:rPr lang="fr-FR"/>
+              <a:t>Cliquez sur l'icône pour ajouter une image</a:t>
+            </a:r>
+            <a:endParaRPr lang="en-US" dirty="0"/>
+          </a:p>
+        </p:txBody>
+      </p:sp>
+      <p:sp>
+        <p:nvSpPr>
+          <p:cNvPr id="4" name="Text Placeholder 3"/>
+          <p:cNvSpPr>
+            <a:spLocks noGrp="1"/>
+          </p:cNvSpPr>
+          <p:nvPr>
+            <p:ph type="body" sz="half" idx="2"/>
+          </p:nvPr>
+        </p:nvSpPr>
+        <p:spPr>
+          <a:xfrm>
+            <a:off x="677334" y="5367338"/>
+            <a:ext cx="8596667" cy="674024"/>
+          </a:xfrm>
+        </p:spPr>
+        <p:txBody>
+          <a:bodyPr>
+            <a:normAutofit/>
+          </a:bodyPr>
+          <a:lstStyle>
+            <a:lvl1pPr marL="0" indent="0">
+              <a:buNone/>
+              <a:defRPr sz="1200"/>
+            </a:lvl1pPr>
+            <a:lvl2pPr marL="457200" indent="0">
+              <a:buNone/>
+              <a:defRPr sz="1200"/>
+            </a:lvl2pPr>
+            <a:lvl3pPr marL="914400" indent="0">
+              <a:buNone/>
+              <a:defRPr sz="1000"/>
+            </a:lvl3pPr>
+            <a:lvl4pPr marL="1371600" indent="0">
+              <a:buNone/>
+              <a:defRPr sz="900"/>
+            </a:lvl4pPr>
+            <a:lvl5pPr marL="1828800" indent="0">
+              <a:buNone/>
+              <a:defRPr sz="900"/>
+            </a:lvl5pPr>
+            <a:lvl6pPr marL="2286000" indent="0">
+              <a:buNone/>
+              <a:defRPr sz="900"/>
+            </a:lvl6pPr>
+            <a:lvl7pPr marL="2743200" indent="0">
+              <a:buNone/>
+              <a:defRPr sz="900"/>
+            </a:lvl7pPr>
+            <a:lvl8pPr marL="3200400" indent="0">
+              <a:buNone/>
+              <a:defRPr sz="900"/>
+            </a:lvl8pPr>
+            <a:lvl9pPr marL="3657600" indent="0">
+              <a:buNone/>
+              <a:defRPr sz="900"/>
+            </a:lvl9pPr>
+          </a:lstStyle>
+          <a:p>
             <a:pPr lvl="0"/>
             <a:r>
               <a:rPr lang="fr-FR"/>
@@ -2642,13 +4567,7 @@
       </p:sp>
       <p:sp>
         <p:nvSpPr>
-          <p:cNvPr id="5" name="Espace réservé de la date 4">
-            <a:extLst>
-              <a:ext uri="{FF2B5EF4-FFF2-40B4-BE49-F238E27FC236}">
-                <a16:creationId xmlns:a16="http://schemas.microsoft.com/office/drawing/2014/main" id="{E696334E-18B1-8699-19FF-38E956D0020A}"/>
-              </a:ext>
-            </a:extLst>
-          </p:cNvPr>
+          <p:cNvPr id="5" name="Date Placeholder 4"/>
           <p:cNvSpPr>
             <a:spLocks noGrp="1"/>
           </p:cNvSpPr>
@@ -2671,13 +4590,7 @@
       </p:sp>
       <p:sp>
         <p:nvSpPr>
-          <p:cNvPr id="6" name="Espace réservé du pied de page 5">
-            <a:extLst>
-              <a:ext uri="{FF2B5EF4-FFF2-40B4-BE49-F238E27FC236}">
-                <a16:creationId xmlns:a16="http://schemas.microsoft.com/office/drawing/2014/main" id="{35AF23D2-F61C-145D-E091-33A9B7EC4981}"/>
-              </a:ext>
-            </a:extLst>
-          </p:cNvPr>
+          <p:cNvPr id="6" name="Footer Placeholder 5"/>
           <p:cNvSpPr>
             <a:spLocks noGrp="1"/>
           </p:cNvSpPr>
@@ -2690,19 +4603,13 @@
           <a:bodyPr/>
           <a:lstStyle/>
           <a:p>
-            <a:endParaRPr lang="fr-FR"/>
-          </a:p>
-        </p:txBody>
-      </p:sp>
-      <p:sp>
-        <p:nvSpPr>
-          <p:cNvPr id="7" name="Espace réservé du numéro de diapositive 6">
-            <a:extLst>
-              <a:ext uri="{FF2B5EF4-FFF2-40B4-BE49-F238E27FC236}">
-                <a16:creationId xmlns:a16="http://schemas.microsoft.com/office/drawing/2014/main" id="{8CD52233-7BA7-CADB-EF60-2A019710DA20}"/>
-              </a:ext>
-            </a:extLst>
-          </p:cNvPr>
+            <a:endParaRPr lang="en-US" dirty="0"/>
+          </a:p>
+        </p:txBody>
+      </p:sp>
+      <p:sp>
+        <p:nvSpPr>
+          <p:cNvPr id="7" name="Slide Number Placeholder 6"/>
           <p:cNvSpPr>
             <a:spLocks noGrp="1"/>
           </p:cNvSpPr>
@@ -2726,7 +4633,7 @@
     </p:spTree>
     <p:extLst>
       <p:ext uri="{BB962C8B-B14F-4D97-AF65-F5344CB8AC3E}">
-        <p14:creationId xmlns:p14="http://schemas.microsoft.com/office/powerpoint/2010/main" val="4031776322"/>
+        <p14:creationId xmlns:p14="http://schemas.microsoft.com/office/powerpoint/2010/main" val="1863190088"/>
       </p:ext>
     </p:extLst>
   </p:cSld>
@@ -2758,15 +4665,539 @@
           <a:chExt cx="0" cy="0"/>
         </a:xfrm>
       </p:grpSpPr>
-      <p:sp>
-        <p:nvSpPr>
-          <p:cNvPr id="2" name="Espace réservé du titre 1">
-            <a:extLst>
-              <a:ext uri="{FF2B5EF4-FFF2-40B4-BE49-F238E27FC236}">
-                <a16:creationId xmlns:a16="http://schemas.microsoft.com/office/drawing/2014/main" id="{9E0942B6-EA09-201C-C074-523A1AA81E0F}"/>
-              </a:ext>
-            </a:extLst>
-          </p:cNvPr>
+      <p:grpSp>
+        <p:nvGrpSpPr>
+          <p:cNvPr id="7" name="Group 6"/>
+          <p:cNvGrpSpPr/>
+          <p:nvPr/>
+        </p:nvGrpSpPr>
+        <p:grpSpPr>
+          <a:xfrm>
+            <a:off x="0" y="-8467"/>
+            <a:ext cx="12192000" cy="6866467"/>
+            <a:chOff x="0" y="-8467"/>
+            <a:chExt cx="12192000" cy="6866467"/>
+          </a:xfrm>
+        </p:grpSpPr>
+        <p:cxnSp>
+          <p:nvCxnSpPr>
+            <p:cNvPr id="20" name="Straight Connector 19"/>
+            <p:cNvCxnSpPr/>
+            <p:nvPr/>
+          </p:nvCxnSpPr>
+          <p:spPr>
+            <a:xfrm>
+              <a:off x="9371012" y="0"/>
+              <a:ext cx="1219200" cy="6858000"/>
+            </a:xfrm>
+            <a:prstGeom prst="line">
+              <a:avLst/>
+            </a:prstGeom>
+            <a:ln w="9525">
+              <a:solidFill>
+                <a:schemeClr val="bg1">
+                  <a:lumMod val="75000"/>
+                </a:schemeClr>
+              </a:solidFill>
+            </a:ln>
+          </p:spPr>
+          <p:style>
+            <a:lnRef idx="2">
+              <a:schemeClr val="accent1"/>
+            </a:lnRef>
+            <a:fillRef idx="0">
+              <a:schemeClr val="accent1"/>
+            </a:fillRef>
+            <a:effectRef idx="1">
+              <a:schemeClr val="accent1"/>
+            </a:effectRef>
+            <a:fontRef idx="minor">
+              <a:schemeClr val="tx1"/>
+            </a:fontRef>
+          </p:style>
+        </p:cxnSp>
+        <p:cxnSp>
+          <p:nvCxnSpPr>
+            <p:cNvPr id="21" name="Straight Connector 20"/>
+            <p:cNvCxnSpPr/>
+            <p:nvPr/>
+          </p:nvCxnSpPr>
+          <p:spPr>
+            <a:xfrm flipH="1">
+              <a:off x="7425267" y="3681413"/>
+              <a:ext cx="4763558" cy="3176587"/>
+            </a:xfrm>
+            <a:prstGeom prst="line">
+              <a:avLst/>
+            </a:prstGeom>
+            <a:ln w="9525">
+              <a:solidFill>
+                <a:schemeClr val="bg1">
+                  <a:lumMod val="85000"/>
+                </a:schemeClr>
+              </a:solidFill>
+            </a:ln>
+          </p:spPr>
+          <p:style>
+            <a:lnRef idx="2">
+              <a:schemeClr val="accent1"/>
+            </a:lnRef>
+            <a:fillRef idx="0">
+              <a:schemeClr val="accent1"/>
+            </a:fillRef>
+            <a:effectRef idx="1">
+              <a:schemeClr val="accent1"/>
+            </a:effectRef>
+            <a:fontRef idx="minor">
+              <a:schemeClr val="tx1"/>
+            </a:fontRef>
+          </p:style>
+        </p:cxnSp>
+        <p:sp>
+          <p:nvSpPr>
+            <p:cNvPr id="22" name="Rectangle 23"/>
+            <p:cNvSpPr/>
+            <p:nvPr/>
+          </p:nvSpPr>
+          <p:spPr>
+            <a:xfrm>
+              <a:off x="9181476" y="-8467"/>
+              <a:ext cx="3007349" cy="6866467"/>
+            </a:xfrm>
+            <a:custGeom>
+              <a:avLst/>
+              <a:gdLst/>
+              <a:ahLst/>
+              <a:cxnLst/>
+              <a:rect l="l" t="t" r="r" b="b"/>
+              <a:pathLst>
+                <a:path w="3007349" h="6866467">
+                  <a:moveTo>
+                    <a:pt x="2045532" y="0"/>
+                  </a:moveTo>
+                  <a:lnTo>
+                    <a:pt x="3007349" y="0"/>
+                  </a:lnTo>
+                  <a:lnTo>
+                    <a:pt x="3007349" y="6866467"/>
+                  </a:lnTo>
+                  <a:lnTo>
+                    <a:pt x="0" y="6866467"/>
+                  </a:lnTo>
+                  <a:lnTo>
+                    <a:pt x="2045532" y="0"/>
+                  </a:lnTo>
+                  <a:close/>
+                </a:path>
+              </a:pathLst>
+            </a:custGeom>
+            <a:solidFill>
+              <a:schemeClr val="accent1">
+                <a:alpha val="30000"/>
+              </a:schemeClr>
+            </a:solidFill>
+            <a:ln>
+              <a:noFill/>
+            </a:ln>
+            <a:effectLst/>
+          </p:spPr>
+          <p:style>
+            <a:lnRef idx="1">
+              <a:schemeClr val="accent1"/>
+            </a:lnRef>
+            <a:fillRef idx="3">
+              <a:schemeClr val="accent1"/>
+            </a:fillRef>
+            <a:effectRef idx="2">
+              <a:schemeClr val="accent1"/>
+            </a:effectRef>
+            <a:fontRef idx="minor">
+              <a:schemeClr val="lt1"/>
+            </a:fontRef>
+          </p:style>
+        </p:sp>
+        <p:sp>
+          <p:nvSpPr>
+            <p:cNvPr id="23" name="Rectangle 25"/>
+            <p:cNvSpPr/>
+            <p:nvPr/>
+          </p:nvSpPr>
+          <p:spPr>
+            <a:xfrm>
+              <a:off x="9603442" y="-8467"/>
+              <a:ext cx="2588558" cy="6866467"/>
+            </a:xfrm>
+            <a:custGeom>
+              <a:avLst/>
+              <a:gdLst/>
+              <a:ahLst/>
+              <a:cxnLst/>
+              <a:rect l="l" t="t" r="r" b="b"/>
+              <a:pathLst>
+                <a:path w="2573311" h="6866467">
+                  <a:moveTo>
+                    <a:pt x="0" y="0"/>
+                  </a:moveTo>
+                  <a:lnTo>
+                    <a:pt x="2573311" y="0"/>
+                  </a:lnTo>
+                  <a:lnTo>
+                    <a:pt x="2573311" y="6866467"/>
+                  </a:lnTo>
+                  <a:lnTo>
+                    <a:pt x="1202336" y="6866467"/>
+                  </a:lnTo>
+                  <a:lnTo>
+                    <a:pt x="0" y="0"/>
+                  </a:lnTo>
+                  <a:close/>
+                </a:path>
+              </a:pathLst>
+            </a:custGeom>
+            <a:solidFill>
+              <a:schemeClr val="accent1">
+                <a:alpha val="20000"/>
+              </a:schemeClr>
+            </a:solidFill>
+            <a:ln>
+              <a:noFill/>
+            </a:ln>
+            <a:effectLst/>
+          </p:spPr>
+          <p:style>
+            <a:lnRef idx="1">
+              <a:schemeClr val="accent1"/>
+            </a:lnRef>
+            <a:fillRef idx="3">
+              <a:schemeClr val="accent1"/>
+            </a:fillRef>
+            <a:effectRef idx="2">
+              <a:schemeClr val="accent1"/>
+            </a:effectRef>
+            <a:fontRef idx="minor">
+              <a:schemeClr val="lt1"/>
+            </a:fontRef>
+          </p:style>
+        </p:sp>
+        <p:sp>
+          <p:nvSpPr>
+            <p:cNvPr id="24" name="Isosceles Triangle 23"/>
+            <p:cNvSpPr/>
+            <p:nvPr/>
+          </p:nvSpPr>
+          <p:spPr>
+            <a:xfrm>
+              <a:off x="8932333" y="3048000"/>
+              <a:ext cx="3259667" cy="3810000"/>
+            </a:xfrm>
+            <a:prstGeom prst="triangle">
+              <a:avLst>
+                <a:gd name="adj" fmla="val 100000"/>
+              </a:avLst>
+            </a:prstGeom>
+            <a:solidFill>
+              <a:schemeClr val="accent2">
+                <a:alpha val="72000"/>
+              </a:schemeClr>
+            </a:solidFill>
+            <a:ln>
+              <a:noFill/>
+            </a:ln>
+            <a:effectLst/>
+          </p:spPr>
+          <p:style>
+            <a:lnRef idx="1">
+              <a:schemeClr val="accent1"/>
+            </a:lnRef>
+            <a:fillRef idx="3">
+              <a:schemeClr val="accent1"/>
+            </a:fillRef>
+            <a:effectRef idx="2">
+              <a:schemeClr val="accent1"/>
+            </a:effectRef>
+            <a:fontRef idx="minor">
+              <a:schemeClr val="lt1"/>
+            </a:fontRef>
+          </p:style>
+        </p:sp>
+        <p:sp>
+          <p:nvSpPr>
+            <p:cNvPr id="25" name="Rectangle 27"/>
+            <p:cNvSpPr/>
+            <p:nvPr/>
+          </p:nvSpPr>
+          <p:spPr>
+            <a:xfrm>
+              <a:off x="9334500" y="-8467"/>
+              <a:ext cx="2854326" cy="6866467"/>
+            </a:xfrm>
+            <a:custGeom>
+              <a:avLst/>
+              <a:gdLst/>
+              <a:ahLst/>
+              <a:cxnLst/>
+              <a:rect l="l" t="t" r="r" b="b"/>
+              <a:pathLst>
+                <a:path w="2858013" h="6866467">
+                  <a:moveTo>
+                    <a:pt x="0" y="0"/>
+                  </a:moveTo>
+                  <a:lnTo>
+                    <a:pt x="2858013" y="0"/>
+                  </a:lnTo>
+                  <a:lnTo>
+                    <a:pt x="2858013" y="6866467"/>
+                  </a:lnTo>
+                  <a:lnTo>
+                    <a:pt x="2473942" y="6866467"/>
+                  </a:lnTo>
+                  <a:lnTo>
+                    <a:pt x="0" y="0"/>
+                  </a:lnTo>
+                  <a:close/>
+                </a:path>
+              </a:pathLst>
+            </a:custGeom>
+            <a:solidFill>
+              <a:schemeClr val="accent2">
+                <a:lumMod val="75000"/>
+                <a:alpha val="70000"/>
+              </a:schemeClr>
+            </a:solidFill>
+            <a:ln>
+              <a:noFill/>
+            </a:ln>
+            <a:effectLst/>
+          </p:spPr>
+          <p:style>
+            <a:lnRef idx="1">
+              <a:schemeClr val="accent1"/>
+            </a:lnRef>
+            <a:fillRef idx="3">
+              <a:schemeClr val="accent1"/>
+            </a:fillRef>
+            <a:effectRef idx="2">
+              <a:schemeClr val="accent1"/>
+            </a:effectRef>
+            <a:fontRef idx="minor">
+              <a:schemeClr val="lt1"/>
+            </a:fontRef>
+          </p:style>
+        </p:sp>
+        <p:sp>
+          <p:nvSpPr>
+            <p:cNvPr id="26" name="Rectangle 28"/>
+            <p:cNvSpPr/>
+            <p:nvPr/>
+          </p:nvSpPr>
+          <p:spPr>
+            <a:xfrm>
+              <a:off x="10898730" y="-8467"/>
+              <a:ext cx="1290094" cy="6866467"/>
+            </a:xfrm>
+            <a:custGeom>
+              <a:avLst/>
+              <a:gdLst/>
+              <a:ahLst/>
+              <a:cxnLst/>
+              <a:rect l="l" t="t" r="r" b="b"/>
+              <a:pathLst>
+                <a:path w="1290094" h="6858000">
+                  <a:moveTo>
+                    <a:pt x="1019735" y="0"/>
+                  </a:moveTo>
+                  <a:lnTo>
+                    <a:pt x="1290094" y="0"/>
+                  </a:lnTo>
+                  <a:lnTo>
+                    <a:pt x="1290094" y="6858000"/>
+                  </a:lnTo>
+                  <a:lnTo>
+                    <a:pt x="0" y="6858000"/>
+                  </a:lnTo>
+                  <a:lnTo>
+                    <a:pt x="1019735" y="0"/>
+                  </a:lnTo>
+                  <a:close/>
+                </a:path>
+              </a:pathLst>
+            </a:custGeom>
+            <a:solidFill>
+              <a:schemeClr val="accent1">
+                <a:lumMod val="60000"/>
+                <a:lumOff val="40000"/>
+                <a:alpha val="70000"/>
+              </a:schemeClr>
+            </a:solidFill>
+            <a:ln>
+              <a:noFill/>
+            </a:ln>
+            <a:effectLst/>
+          </p:spPr>
+          <p:style>
+            <a:lnRef idx="1">
+              <a:schemeClr val="accent1"/>
+            </a:lnRef>
+            <a:fillRef idx="3">
+              <a:schemeClr val="accent1"/>
+            </a:fillRef>
+            <a:effectRef idx="2">
+              <a:schemeClr val="accent1"/>
+            </a:effectRef>
+            <a:fontRef idx="minor">
+              <a:schemeClr val="lt1"/>
+            </a:fontRef>
+          </p:style>
+        </p:sp>
+        <p:sp>
+          <p:nvSpPr>
+            <p:cNvPr id="27" name="Rectangle 29"/>
+            <p:cNvSpPr/>
+            <p:nvPr/>
+          </p:nvSpPr>
+          <p:spPr>
+            <a:xfrm>
+              <a:off x="10938999" y="-8467"/>
+              <a:ext cx="1249825" cy="6866467"/>
+            </a:xfrm>
+            <a:custGeom>
+              <a:avLst/>
+              <a:gdLst/>
+              <a:ahLst/>
+              <a:cxnLst/>
+              <a:rect l="l" t="t" r="r" b="b"/>
+              <a:pathLst>
+                <a:path w="1249825" h="6858000">
+                  <a:moveTo>
+                    <a:pt x="0" y="0"/>
+                  </a:moveTo>
+                  <a:lnTo>
+                    <a:pt x="1249825" y="0"/>
+                  </a:lnTo>
+                  <a:lnTo>
+                    <a:pt x="1249825" y="6858000"/>
+                  </a:lnTo>
+                  <a:lnTo>
+                    <a:pt x="1109382" y="6858000"/>
+                  </a:lnTo>
+                  <a:lnTo>
+                    <a:pt x="0" y="0"/>
+                  </a:lnTo>
+                  <a:close/>
+                </a:path>
+              </a:pathLst>
+            </a:custGeom>
+            <a:solidFill>
+              <a:schemeClr val="accent1">
+                <a:alpha val="65000"/>
+              </a:schemeClr>
+            </a:solidFill>
+            <a:ln>
+              <a:noFill/>
+            </a:ln>
+            <a:effectLst/>
+          </p:spPr>
+          <p:style>
+            <a:lnRef idx="1">
+              <a:schemeClr val="accent1"/>
+            </a:lnRef>
+            <a:fillRef idx="3">
+              <a:schemeClr val="accent1"/>
+            </a:fillRef>
+            <a:effectRef idx="2">
+              <a:schemeClr val="accent1"/>
+            </a:effectRef>
+            <a:fontRef idx="minor">
+              <a:schemeClr val="lt1"/>
+            </a:fontRef>
+          </p:style>
+        </p:sp>
+        <p:sp>
+          <p:nvSpPr>
+            <p:cNvPr id="28" name="Isosceles Triangle 27"/>
+            <p:cNvSpPr/>
+            <p:nvPr/>
+          </p:nvSpPr>
+          <p:spPr>
+            <a:xfrm>
+              <a:off x="10371666" y="3589867"/>
+              <a:ext cx="1817159" cy="3268133"/>
+            </a:xfrm>
+            <a:prstGeom prst="triangle">
+              <a:avLst>
+                <a:gd name="adj" fmla="val 100000"/>
+              </a:avLst>
+            </a:prstGeom>
+            <a:solidFill>
+              <a:schemeClr val="accent1">
+                <a:alpha val="80000"/>
+              </a:schemeClr>
+            </a:solidFill>
+            <a:ln>
+              <a:noFill/>
+            </a:ln>
+            <a:effectLst/>
+          </p:spPr>
+          <p:style>
+            <a:lnRef idx="1">
+              <a:schemeClr val="accent1"/>
+            </a:lnRef>
+            <a:fillRef idx="3">
+              <a:schemeClr val="accent1"/>
+            </a:fillRef>
+            <a:effectRef idx="2">
+              <a:schemeClr val="accent1"/>
+            </a:effectRef>
+            <a:fontRef idx="minor">
+              <a:schemeClr val="lt1"/>
+            </a:fontRef>
+          </p:style>
+        </p:sp>
+        <p:sp>
+          <p:nvSpPr>
+            <p:cNvPr id="29" name="Isosceles Triangle 28"/>
+            <p:cNvSpPr/>
+            <p:nvPr/>
+          </p:nvSpPr>
+          <p:spPr>
+            <a:xfrm>
+              <a:off x="0" y="4013200"/>
+              <a:ext cx="448733" cy="2844800"/>
+            </a:xfrm>
+            <a:prstGeom prst="triangle">
+              <a:avLst>
+                <a:gd name="adj" fmla="val 0"/>
+              </a:avLst>
+            </a:prstGeom>
+            <a:solidFill>
+              <a:schemeClr val="accent1">
+                <a:alpha val="85000"/>
+              </a:schemeClr>
+            </a:solidFill>
+            <a:ln>
+              <a:noFill/>
+            </a:ln>
+            <a:effectLst/>
+          </p:spPr>
+          <p:style>
+            <a:lnRef idx="1">
+              <a:schemeClr val="accent1"/>
+            </a:lnRef>
+            <a:fillRef idx="3">
+              <a:schemeClr val="accent1"/>
+            </a:fillRef>
+            <a:effectRef idx="2">
+              <a:schemeClr val="accent1"/>
+            </a:effectRef>
+            <a:fontRef idx="minor">
+              <a:schemeClr val="lt1"/>
+            </a:fontRef>
+          </p:style>
+        </p:sp>
+      </p:grpSp>
+      <p:sp>
+        <p:nvSpPr>
+          <p:cNvPr id="2" name="Title Placeholder 1"/>
           <p:cNvSpPr>
             <a:spLocks noGrp="1"/>
           </p:cNvSpPr>
@@ -2776,15 +5207,15 @@
         </p:nvSpPr>
         <p:spPr>
           <a:xfrm>
-            <a:off x="838200" y="365125"/>
-            <a:ext cx="10515600" cy="1325563"/>
+            <a:off x="677334" y="609600"/>
+            <a:ext cx="8596668" cy="1320800"/>
           </a:xfrm>
           <a:prstGeom prst="rect">
             <a:avLst/>
           </a:prstGeom>
         </p:spPr>
         <p:txBody>
-          <a:bodyPr vert="horz" lIns="91440" tIns="45720" rIns="91440" bIns="45720" rtlCol="0" anchor="ctr">
+          <a:bodyPr vert="horz" lIns="91440" tIns="45720" rIns="91440" bIns="45720" rtlCol="0" anchor="t">
             <a:normAutofit/>
           </a:bodyPr>
           <a:lstStyle/>
@@ -2793,18 +5224,13 @@
               <a:rPr lang="fr-FR"/>
               <a:t>Modifiez le style du titre</a:t>
             </a:r>
-          </a:p>
-        </p:txBody>
-      </p:sp>
-      <p:sp>
-        <p:nvSpPr>
-          <p:cNvPr id="3" name="Espace réservé du texte 2">
-            <a:extLst>
-              <a:ext uri="{FF2B5EF4-FFF2-40B4-BE49-F238E27FC236}">
-                <a16:creationId xmlns:a16="http://schemas.microsoft.com/office/drawing/2014/main" id="{F9A4819C-3F88-11ED-89A2-7D5B085FE66D}"/>
-              </a:ext>
-            </a:extLst>
-          </p:cNvPr>
+            <a:endParaRPr lang="en-US" dirty="0"/>
+          </a:p>
+        </p:txBody>
+      </p:sp>
+      <p:sp>
+        <p:nvSpPr>
+          <p:cNvPr id="3" name="Text Placeholder 2"/>
           <p:cNvSpPr>
             <a:spLocks noGrp="1"/>
           </p:cNvSpPr>
@@ -2814,8 +5240,8 @@
         </p:nvSpPr>
         <p:spPr>
           <a:xfrm>
-            <a:off x="838200" y="1825625"/>
-            <a:ext cx="10515600" cy="4351338"/>
+            <a:off x="677334" y="2160589"/>
+            <a:ext cx="8596668" cy="3880773"/>
           </a:xfrm>
           <a:prstGeom prst="rect">
             <a:avLst/>
@@ -2860,18 +5286,13 @@
               <a:rPr lang="fr-FR"/>
               <a:t>Cinquième niveau</a:t>
             </a:r>
-          </a:p>
-        </p:txBody>
-      </p:sp>
-      <p:sp>
-        <p:nvSpPr>
-          <p:cNvPr id="4" name="Espace réservé de la date 3">
-            <a:extLst>
-              <a:ext uri="{FF2B5EF4-FFF2-40B4-BE49-F238E27FC236}">
-                <a16:creationId xmlns:a16="http://schemas.microsoft.com/office/drawing/2014/main" id="{4C44679B-B538-66FF-A0D4-82C49DD5DDB1}"/>
-              </a:ext>
-            </a:extLst>
-          </p:cNvPr>
+            <a:endParaRPr lang="en-US" dirty="0"/>
+          </a:p>
+        </p:txBody>
+      </p:sp>
+      <p:sp>
+        <p:nvSpPr>
+          <p:cNvPr id="4" name="Date Placeholder 3"/>
           <p:cNvSpPr>
             <a:spLocks noGrp="1"/>
           </p:cNvSpPr>
@@ -2881,8 +5302,8 @@
         </p:nvSpPr>
         <p:spPr>
           <a:xfrm>
-            <a:off x="838200" y="6356350"/>
-            <a:ext cx="2743200" cy="365125"/>
+            <a:off x="7205133" y="6041362"/>
+            <a:ext cx="911939" cy="365125"/>
           </a:xfrm>
           <a:prstGeom prst="rect">
             <a:avLst/>
@@ -2891,11 +5312,11 @@
         <p:txBody>
           <a:bodyPr vert="horz" lIns="91440" tIns="45720" rIns="91440" bIns="45720" rtlCol="0" anchor="ctr"/>
           <a:lstStyle>
-            <a:lvl1pPr algn="l">
-              <a:defRPr sz="1200">
+            <a:lvl1pPr algn="r">
+              <a:defRPr sz="900">
                 <a:solidFill>
                   <a:schemeClr val="tx1">
-                    <a:tint val="82000"/>
+                    <a:tint val="75000"/>
                   </a:schemeClr>
                 </a:solidFill>
               </a:defRPr>
@@ -2912,13 +5333,7 @@
       </p:sp>
       <p:sp>
         <p:nvSpPr>
-          <p:cNvPr id="5" name="Espace réservé du pied de page 4">
-            <a:extLst>
-              <a:ext uri="{FF2B5EF4-FFF2-40B4-BE49-F238E27FC236}">
-                <a16:creationId xmlns:a16="http://schemas.microsoft.com/office/drawing/2014/main" id="{39413B86-9C71-4E5D-DC9F-7D09535C4E92}"/>
-              </a:ext>
-            </a:extLst>
-          </p:cNvPr>
+          <p:cNvPr id="5" name="Footer Placeholder 4"/>
           <p:cNvSpPr>
             <a:spLocks noGrp="1"/>
           </p:cNvSpPr>
@@ -2928,8 +5343,8 @@
         </p:nvSpPr>
         <p:spPr>
           <a:xfrm>
-            <a:off x="4038600" y="6356350"/>
-            <a:ext cx="4114800" cy="365125"/>
+            <a:off x="677334" y="6041362"/>
+            <a:ext cx="6297612" cy="365125"/>
           </a:xfrm>
           <a:prstGeom prst="rect">
             <a:avLst/>
@@ -2938,11 +5353,11 @@
         <p:txBody>
           <a:bodyPr vert="horz" lIns="91440" tIns="45720" rIns="91440" bIns="45720" rtlCol="0" anchor="ctr"/>
           <a:lstStyle>
-            <a:lvl1pPr algn="ctr">
-              <a:defRPr sz="1200">
+            <a:lvl1pPr algn="l">
+              <a:defRPr sz="900">
                 <a:solidFill>
                   <a:schemeClr val="tx1">
-                    <a:tint val="82000"/>
+                    <a:tint val="75000"/>
                   </a:schemeClr>
                 </a:solidFill>
               </a:defRPr>
@@ -2955,13 +5370,7 @@
       </p:sp>
       <p:sp>
         <p:nvSpPr>
-          <p:cNvPr id="6" name="Espace réservé du numéro de diapositive 5">
-            <a:extLst>
-              <a:ext uri="{FF2B5EF4-FFF2-40B4-BE49-F238E27FC236}">
-                <a16:creationId xmlns:a16="http://schemas.microsoft.com/office/drawing/2014/main" id="{51472D7D-277E-D26E-701D-E39E5EE799D4}"/>
-              </a:ext>
-            </a:extLst>
-          </p:cNvPr>
+          <p:cNvPr id="6" name="Slide Number Placeholder 5"/>
           <p:cNvSpPr>
             <a:spLocks noGrp="1"/>
           </p:cNvSpPr>
@@ -2971,8 +5380,8 @@
         </p:nvSpPr>
         <p:spPr>
           <a:xfrm>
-            <a:off x="8610600" y="6356350"/>
-            <a:ext cx="2743200" cy="365125"/>
+            <a:off x="8590663" y="6041362"/>
+            <a:ext cx="683339" cy="365125"/>
           </a:xfrm>
           <a:prstGeom prst="rect">
             <a:avLst/>
@@ -2982,11 +5391,9 @@
           <a:bodyPr vert="horz" lIns="91440" tIns="45720" rIns="91440" bIns="45720" rtlCol="0" anchor="ctr"/>
           <a:lstStyle>
             <a:lvl1pPr algn="r">
-              <a:defRPr sz="1200">
-                <a:solidFill>
-                  <a:schemeClr val="tx1">
-                    <a:tint val="82000"/>
-                  </a:schemeClr>
+              <a:defRPr sz="900">
+                <a:solidFill>
+                  <a:schemeClr val="accent1"/>
                 </a:solidFill>
               </a:defRPr>
             </a:lvl1pPr>
@@ -3003,55 +5410,335 @@
     </p:spTree>
     <p:extLst>
       <p:ext uri="{BB962C8B-B14F-4D97-AF65-F5344CB8AC3E}">
-        <p14:creationId xmlns:p14="http://schemas.microsoft.com/office/powerpoint/2010/main" val="1167652277"/>
+        <p14:creationId xmlns:p14="http://schemas.microsoft.com/office/powerpoint/2010/main" val="4236982843"/>
       </p:ext>
     </p:extLst>
   </p:cSld>
   <p:clrMap bg1="lt1" tx1="dk1" bg2="lt2" tx2="dk2" accent1="accent1" accent2="accent2" accent3="accent3" accent4="accent4" accent5="accent5" accent6="accent6" hlink="hlink" folHlink="folHlink"/>
   <p:sldLayoutIdLst>
-    <p:sldLayoutId id="2147483649" r:id="rId1"/>
-    <p:sldLayoutId id="2147483650" r:id="rId2"/>
-    <p:sldLayoutId id="2147483651" r:id="rId3"/>
-    <p:sldLayoutId id="2147483652" r:id="rId4"/>
-    <p:sldLayoutId id="2147483653" r:id="rId5"/>
-    <p:sldLayoutId id="2147483654" r:id="rId6"/>
-    <p:sldLayoutId id="2147483655" r:id="rId7"/>
-    <p:sldLayoutId id="2147483656" r:id="rId8"/>
-    <p:sldLayoutId id="2147483657" r:id="rId9"/>
-    <p:sldLayoutId id="2147483658" r:id="rId10"/>
-    <p:sldLayoutId id="2147483659" r:id="rId11"/>
+    <p:sldLayoutId id="2147483732" r:id="rId1"/>
+    <p:sldLayoutId id="2147483733" r:id="rId2"/>
+    <p:sldLayoutId id="2147483734" r:id="rId3"/>
+    <p:sldLayoutId id="2147483735" r:id="rId4"/>
+    <p:sldLayoutId id="2147483736" r:id="rId5"/>
+    <p:sldLayoutId id="2147483737" r:id="rId6"/>
+    <p:sldLayoutId id="2147483738" r:id="rId7"/>
+    <p:sldLayoutId id="2147483739" r:id="rId8"/>
+    <p:sldLayoutId id="2147483740" r:id="rId9"/>
+    <p:sldLayoutId id="2147483741" r:id="rId10"/>
+    <p:sldLayoutId id="2147483742" r:id="rId11"/>
+    <p:sldLayoutId id="2147483743" r:id="rId12"/>
+    <p:sldLayoutId id="2147483744" r:id="rId13"/>
+    <p:sldLayoutId id="2147483745" r:id="rId14"/>
+    <p:sldLayoutId id="2147483746" r:id="rId15"/>
+    <p:sldLayoutId id="2147483747" r:id="rId16"/>
   </p:sldLayoutIdLst>
   <p:txStyles>
     <p:titleStyle>
-      <a:lvl1pPr algn="l" defTabSz="914400" rtl="0" eaLnBrk="1" latinLnBrk="0" hangingPunct="1">
-        <a:lnSpc>
-          <a:spcPct val="90000"/>
-        </a:lnSpc>
+      <a:lvl1pPr algn="l" defTabSz="457200" rtl="0" eaLnBrk="1" latinLnBrk="0" hangingPunct="1">
         <a:spcBef>
           <a:spcPct val="0"/>
         </a:spcBef>
         <a:buNone/>
-        <a:defRPr sz="4400" kern="1200">
+        <a:defRPr sz="3600" kern="1200">
           <a:solidFill>
-            <a:schemeClr val="tx1"/>
+            <a:schemeClr val="accent1"/>
           </a:solidFill>
           <a:latin typeface="+mj-lt"/>
           <a:ea typeface="+mj-ea"/>
           <a:cs typeface="+mj-cs"/>
         </a:defRPr>
       </a:lvl1pPr>
+      <a:lvl2pPr eaLnBrk="1" hangingPunct="1">
+        <a:defRPr>
+          <a:solidFill>
+            <a:schemeClr val="tx2"/>
+          </a:solidFill>
+        </a:defRPr>
+      </a:lvl2pPr>
+      <a:lvl3pPr eaLnBrk="1" hangingPunct="1">
+        <a:defRPr>
+          <a:solidFill>
+            <a:schemeClr val="tx2"/>
+          </a:solidFill>
+        </a:defRPr>
+      </a:lvl3pPr>
+      <a:lvl4pPr eaLnBrk="1" hangingPunct="1">
+        <a:defRPr>
+          <a:solidFill>
+            <a:schemeClr val="tx2"/>
+          </a:solidFill>
+        </a:defRPr>
+      </a:lvl4pPr>
+      <a:lvl5pPr eaLnBrk="1" hangingPunct="1">
+        <a:defRPr>
+          <a:solidFill>
+            <a:schemeClr val="tx2"/>
+          </a:solidFill>
+        </a:defRPr>
+      </a:lvl5pPr>
+      <a:lvl6pPr eaLnBrk="1" hangingPunct="1">
+        <a:defRPr>
+          <a:solidFill>
+            <a:schemeClr val="tx2"/>
+          </a:solidFill>
+        </a:defRPr>
+      </a:lvl6pPr>
+      <a:lvl7pPr eaLnBrk="1" hangingPunct="1">
+        <a:defRPr>
+          <a:solidFill>
+            <a:schemeClr val="tx2"/>
+          </a:solidFill>
+        </a:defRPr>
+      </a:lvl7pPr>
+      <a:lvl8pPr eaLnBrk="1" hangingPunct="1">
+        <a:defRPr>
+          <a:solidFill>
+            <a:schemeClr val="tx2"/>
+          </a:solidFill>
+        </a:defRPr>
+      </a:lvl8pPr>
+      <a:lvl9pPr eaLnBrk="1" hangingPunct="1">
+        <a:defRPr>
+          <a:solidFill>
+            <a:schemeClr val="tx2"/>
+          </a:solidFill>
+        </a:defRPr>
+      </a:lvl9pPr>
     </p:titleStyle>
     <p:bodyStyle>
-      <a:lvl1pPr marL="228600" indent="-228600" algn="l" defTabSz="914400" rtl="0" eaLnBrk="1" latinLnBrk="0" hangingPunct="1">
-        <a:lnSpc>
-          <a:spcPct val="90000"/>
-        </a:lnSpc>
+      <a:lvl1pPr marL="342900" indent="-342900" algn="l" defTabSz="457200" rtl="0" eaLnBrk="1" latinLnBrk="0" hangingPunct="1">
         <a:spcBef>
           <a:spcPts val="1000"/>
         </a:spcBef>
-        <a:buFont typeface="Arial" panose="020B0604020202020204" pitchFamily="34" charset="0"/>
-        <a:buChar char="•"/>
-        <a:defRPr sz="2800" kern="1200">
+        <a:spcAft>
+          <a:spcPts val="0"/>
+        </a:spcAft>
+        <a:buClr>
+          <a:schemeClr val="accent1"/>
+        </a:buClr>
+        <a:buSzPct val="80000"/>
+        <a:buFont typeface="Wingdings 3" charset="2"/>
+        <a:buChar char=""/>
+        <a:defRPr sz="1800" kern="1200">
+          <a:solidFill>
+            <a:schemeClr val="tx1">
+              <a:lumMod val="75000"/>
+              <a:lumOff val="25000"/>
+            </a:schemeClr>
+          </a:solidFill>
+          <a:latin typeface="+mn-lt"/>
+          <a:ea typeface="+mn-ea"/>
+          <a:cs typeface="+mn-cs"/>
+        </a:defRPr>
+      </a:lvl1pPr>
+      <a:lvl2pPr marL="742950" indent="-285750" algn="l" defTabSz="457200" rtl="0" eaLnBrk="1" latinLnBrk="0" hangingPunct="1">
+        <a:spcBef>
+          <a:spcPts val="1000"/>
+        </a:spcBef>
+        <a:spcAft>
+          <a:spcPts val="0"/>
+        </a:spcAft>
+        <a:buClr>
+          <a:schemeClr val="accent1"/>
+        </a:buClr>
+        <a:buSzPct val="80000"/>
+        <a:buFont typeface="Wingdings 3" charset="2"/>
+        <a:buChar char=""/>
+        <a:defRPr sz="1600" kern="1200">
+          <a:solidFill>
+            <a:schemeClr val="tx1">
+              <a:lumMod val="75000"/>
+              <a:lumOff val="25000"/>
+            </a:schemeClr>
+          </a:solidFill>
+          <a:latin typeface="+mn-lt"/>
+          <a:ea typeface="+mn-ea"/>
+          <a:cs typeface="+mn-cs"/>
+        </a:defRPr>
+      </a:lvl2pPr>
+      <a:lvl3pPr marL="1143000" indent="-228600" algn="l" defTabSz="457200" rtl="0" eaLnBrk="1" latinLnBrk="0" hangingPunct="1">
+        <a:spcBef>
+          <a:spcPts val="1000"/>
+        </a:spcBef>
+        <a:spcAft>
+          <a:spcPts val="0"/>
+        </a:spcAft>
+        <a:buClr>
+          <a:schemeClr val="accent1"/>
+        </a:buClr>
+        <a:buSzPct val="80000"/>
+        <a:buFont typeface="Wingdings 3" charset="2"/>
+        <a:buChar char=""/>
+        <a:defRPr sz="1400" kern="1200">
+          <a:solidFill>
+            <a:schemeClr val="tx1">
+              <a:lumMod val="75000"/>
+              <a:lumOff val="25000"/>
+            </a:schemeClr>
+          </a:solidFill>
+          <a:latin typeface="+mn-lt"/>
+          <a:ea typeface="+mn-ea"/>
+          <a:cs typeface="+mn-cs"/>
+        </a:defRPr>
+      </a:lvl3pPr>
+      <a:lvl4pPr marL="1600200" indent="-228600" algn="l" defTabSz="457200" rtl="0" eaLnBrk="1" latinLnBrk="0" hangingPunct="1">
+        <a:spcBef>
+          <a:spcPts val="1000"/>
+        </a:spcBef>
+        <a:spcAft>
+          <a:spcPts val="0"/>
+        </a:spcAft>
+        <a:buClr>
+          <a:schemeClr val="accent1"/>
+        </a:buClr>
+        <a:buSzPct val="80000"/>
+        <a:buFont typeface="Wingdings 3" charset="2"/>
+        <a:buChar char=""/>
+        <a:defRPr sz="1200" kern="1200">
+          <a:solidFill>
+            <a:schemeClr val="tx1">
+              <a:lumMod val="75000"/>
+              <a:lumOff val="25000"/>
+            </a:schemeClr>
+          </a:solidFill>
+          <a:latin typeface="+mn-lt"/>
+          <a:ea typeface="+mn-ea"/>
+          <a:cs typeface="+mn-cs"/>
+        </a:defRPr>
+      </a:lvl4pPr>
+      <a:lvl5pPr marL="2057400" indent="-228600" algn="l" defTabSz="457200" rtl="0" eaLnBrk="1" latinLnBrk="0" hangingPunct="1">
+        <a:spcBef>
+          <a:spcPts val="1000"/>
+        </a:spcBef>
+        <a:spcAft>
+          <a:spcPts val="0"/>
+        </a:spcAft>
+        <a:buClr>
+          <a:schemeClr val="accent1"/>
+        </a:buClr>
+        <a:buSzPct val="80000"/>
+        <a:buFont typeface="Wingdings 3" charset="2"/>
+        <a:buChar char=""/>
+        <a:defRPr sz="1200" kern="1200">
+          <a:solidFill>
+            <a:schemeClr val="tx1">
+              <a:lumMod val="75000"/>
+              <a:lumOff val="25000"/>
+            </a:schemeClr>
+          </a:solidFill>
+          <a:latin typeface="+mn-lt"/>
+          <a:ea typeface="+mn-ea"/>
+          <a:cs typeface="+mn-cs"/>
+        </a:defRPr>
+      </a:lvl5pPr>
+      <a:lvl6pPr marL="2514600" indent="-228600" algn="l" defTabSz="457200" rtl="0" eaLnBrk="1" latinLnBrk="0" hangingPunct="1">
+        <a:spcBef>
+          <a:spcPts val="1000"/>
+        </a:spcBef>
+        <a:spcAft>
+          <a:spcPts val="0"/>
+        </a:spcAft>
+        <a:buClr>
+          <a:schemeClr val="accent1"/>
+        </a:buClr>
+        <a:buSzPct val="80000"/>
+        <a:buFont typeface="Wingdings 3" charset="2"/>
+        <a:buChar char=""/>
+        <a:defRPr sz="1200" kern="1200">
+          <a:solidFill>
+            <a:schemeClr val="tx1">
+              <a:lumMod val="75000"/>
+              <a:lumOff val="25000"/>
+            </a:schemeClr>
+          </a:solidFill>
+          <a:latin typeface="+mn-lt"/>
+          <a:ea typeface="+mn-ea"/>
+          <a:cs typeface="+mn-cs"/>
+        </a:defRPr>
+      </a:lvl6pPr>
+      <a:lvl7pPr marL="2971800" indent="-228600" algn="l" defTabSz="457200" rtl="0" eaLnBrk="1" latinLnBrk="0" hangingPunct="1">
+        <a:spcBef>
+          <a:spcPts val="1000"/>
+        </a:spcBef>
+        <a:spcAft>
+          <a:spcPts val="0"/>
+        </a:spcAft>
+        <a:buClr>
+          <a:schemeClr val="accent1"/>
+        </a:buClr>
+        <a:buSzPct val="80000"/>
+        <a:buFont typeface="Wingdings 3" charset="2"/>
+        <a:buChar char=""/>
+        <a:defRPr sz="1200" kern="1200">
+          <a:solidFill>
+            <a:schemeClr val="tx1">
+              <a:lumMod val="75000"/>
+              <a:lumOff val="25000"/>
+            </a:schemeClr>
+          </a:solidFill>
+          <a:latin typeface="+mn-lt"/>
+          <a:ea typeface="+mn-ea"/>
+          <a:cs typeface="+mn-cs"/>
+        </a:defRPr>
+      </a:lvl7pPr>
+      <a:lvl8pPr marL="3429000" indent="-228600" algn="l" defTabSz="457200" rtl="0" eaLnBrk="1" latinLnBrk="0" hangingPunct="1">
+        <a:spcBef>
+          <a:spcPts val="1000"/>
+        </a:spcBef>
+        <a:spcAft>
+          <a:spcPts val="0"/>
+        </a:spcAft>
+        <a:buClr>
+          <a:schemeClr val="accent1"/>
+        </a:buClr>
+        <a:buSzPct val="80000"/>
+        <a:buFont typeface="Wingdings 3" charset="2"/>
+        <a:buChar char=""/>
+        <a:defRPr sz="1200" kern="1200">
+          <a:solidFill>
+            <a:schemeClr val="tx1">
+              <a:lumMod val="75000"/>
+              <a:lumOff val="25000"/>
+            </a:schemeClr>
+          </a:solidFill>
+          <a:latin typeface="+mn-lt"/>
+          <a:ea typeface="+mn-ea"/>
+          <a:cs typeface="+mn-cs"/>
+        </a:defRPr>
+      </a:lvl8pPr>
+      <a:lvl9pPr marL="3886200" indent="-228600" algn="l" defTabSz="457200" rtl="0" eaLnBrk="1" latinLnBrk="0" hangingPunct="1">
+        <a:spcBef>
+          <a:spcPts val="1000"/>
+        </a:spcBef>
+        <a:spcAft>
+          <a:spcPts val="0"/>
+        </a:spcAft>
+        <a:buClr>
+          <a:schemeClr val="accent1"/>
+        </a:buClr>
+        <a:buSzPct val="80000"/>
+        <a:buFont typeface="Wingdings 3" charset="2"/>
+        <a:buChar char=""/>
+        <a:defRPr sz="1200" kern="1200">
+          <a:solidFill>
+            <a:schemeClr val="tx1">
+              <a:lumMod val="75000"/>
+              <a:lumOff val="25000"/>
+            </a:schemeClr>
+          </a:solidFill>
+          <a:latin typeface="+mn-lt"/>
+          <a:ea typeface="+mn-ea"/>
+          <a:cs typeface="+mn-cs"/>
+        </a:defRPr>
+      </a:lvl9pPr>
+    </p:bodyStyle>
+    <p:otherStyle>
+      <a:defPPr>
+        <a:defRPr lang="en-US"/>
+      </a:defPPr>
+      <a:lvl1pPr marL="0" algn="l" defTabSz="457200" rtl="0" eaLnBrk="1" latinLnBrk="0" hangingPunct="1">
+        <a:defRPr sz="1800" kern="1200">
           <a:solidFill>
             <a:schemeClr val="tx1"/>
           </a:solidFill>
@@ -3060,16 +5747,8 @@
           <a:cs typeface="+mn-cs"/>
         </a:defRPr>
       </a:lvl1pPr>
-      <a:lvl2pPr marL="685800" indent="-228600" algn="l" defTabSz="914400" rtl="0" eaLnBrk="1" latinLnBrk="0" hangingPunct="1">
-        <a:lnSpc>
-          <a:spcPct val="90000"/>
-        </a:lnSpc>
-        <a:spcBef>
-          <a:spcPts val="500"/>
-        </a:spcBef>
-        <a:buFont typeface="Arial" panose="020B0604020202020204" pitchFamily="34" charset="0"/>
-        <a:buChar char="•"/>
-        <a:defRPr sz="2400" kern="1200">
+      <a:lvl2pPr marL="457200" algn="l" defTabSz="457200" rtl="0" eaLnBrk="1" latinLnBrk="0" hangingPunct="1">
+        <a:defRPr sz="1800" kern="1200">
           <a:solidFill>
             <a:schemeClr val="tx1"/>
           </a:solidFill>
@@ -3078,16 +5757,8 @@
           <a:cs typeface="+mn-cs"/>
         </a:defRPr>
       </a:lvl2pPr>
-      <a:lvl3pPr marL="1143000" indent="-228600" algn="l" defTabSz="914400" rtl="0" eaLnBrk="1" latinLnBrk="0" hangingPunct="1">
-        <a:lnSpc>
-          <a:spcPct val="90000"/>
-        </a:lnSpc>
-        <a:spcBef>
-          <a:spcPts val="500"/>
-        </a:spcBef>
-        <a:buFont typeface="Arial" panose="020B0604020202020204" pitchFamily="34" charset="0"/>
-        <a:buChar char="•"/>
-        <a:defRPr sz="2000" kern="1200">
+      <a:lvl3pPr marL="914400" algn="l" defTabSz="457200" rtl="0" eaLnBrk="1" latinLnBrk="0" hangingPunct="1">
+        <a:defRPr sz="1800" kern="1200">
           <a:solidFill>
             <a:schemeClr val="tx1"/>
           </a:solidFill>
@@ -3096,15 +5767,7 @@
           <a:cs typeface="+mn-cs"/>
         </a:defRPr>
       </a:lvl3pPr>
-      <a:lvl4pPr marL="1600200" indent="-228600" algn="l" defTabSz="914400" rtl="0" eaLnBrk="1" latinLnBrk="0" hangingPunct="1">
-        <a:lnSpc>
-          <a:spcPct val="90000"/>
-        </a:lnSpc>
-        <a:spcBef>
-          <a:spcPts val="500"/>
-        </a:spcBef>
-        <a:buFont typeface="Arial" panose="020B0604020202020204" pitchFamily="34" charset="0"/>
-        <a:buChar char="•"/>
+      <a:lvl4pPr marL="1371600" algn="l" defTabSz="457200" rtl="0" eaLnBrk="1" latinLnBrk="0" hangingPunct="1">
         <a:defRPr sz="1800" kern="1200">
           <a:solidFill>
             <a:schemeClr val="tx1"/>
@@ -3114,15 +5777,7 @@
           <a:cs typeface="+mn-cs"/>
         </a:defRPr>
       </a:lvl4pPr>
-      <a:lvl5pPr marL="2057400" indent="-228600" algn="l" defTabSz="914400" rtl="0" eaLnBrk="1" latinLnBrk="0" hangingPunct="1">
-        <a:lnSpc>
-          <a:spcPct val="90000"/>
-        </a:lnSpc>
-        <a:spcBef>
-          <a:spcPts val="500"/>
-        </a:spcBef>
-        <a:buFont typeface="Arial" panose="020B0604020202020204" pitchFamily="34" charset="0"/>
-        <a:buChar char="•"/>
+      <a:lvl5pPr marL="1828800" algn="l" defTabSz="457200" rtl="0" eaLnBrk="1" latinLnBrk="0" hangingPunct="1">
         <a:defRPr sz="1800" kern="1200">
           <a:solidFill>
             <a:schemeClr val="tx1"/>
@@ -3132,15 +5787,7 @@
           <a:cs typeface="+mn-cs"/>
         </a:defRPr>
       </a:lvl5pPr>
-      <a:lvl6pPr marL="2514600" indent="-228600" algn="l" defTabSz="914400" rtl="0" eaLnBrk="1" latinLnBrk="0" hangingPunct="1">
-        <a:lnSpc>
-          <a:spcPct val="90000"/>
-        </a:lnSpc>
-        <a:spcBef>
-          <a:spcPts val="500"/>
-        </a:spcBef>
-        <a:buFont typeface="Arial" panose="020B0604020202020204" pitchFamily="34" charset="0"/>
-        <a:buChar char="•"/>
+      <a:lvl6pPr marL="2286000" algn="l" defTabSz="457200" rtl="0" eaLnBrk="1" latinLnBrk="0" hangingPunct="1">
         <a:defRPr sz="1800" kern="1200">
           <a:solidFill>
             <a:schemeClr val="tx1"/>
@@ -3150,15 +5797,7 @@
           <a:cs typeface="+mn-cs"/>
         </a:defRPr>
       </a:lvl6pPr>
-      <a:lvl7pPr marL="2971800" indent="-228600" algn="l" defTabSz="914400" rtl="0" eaLnBrk="1" latinLnBrk="0" hangingPunct="1">
-        <a:lnSpc>
-          <a:spcPct val="90000"/>
-        </a:lnSpc>
-        <a:spcBef>
-          <a:spcPts val="500"/>
-        </a:spcBef>
-        <a:buFont typeface="Arial" panose="020B0604020202020204" pitchFamily="34" charset="0"/>
-        <a:buChar char="•"/>
+      <a:lvl7pPr marL="2743200" algn="l" defTabSz="457200" rtl="0" eaLnBrk="1" latinLnBrk="0" hangingPunct="1">
         <a:defRPr sz="1800" kern="1200">
           <a:solidFill>
             <a:schemeClr val="tx1"/>
@@ -3168,15 +5807,7 @@
           <a:cs typeface="+mn-cs"/>
         </a:defRPr>
       </a:lvl7pPr>
-      <a:lvl8pPr marL="3429000" indent="-228600" algn="l" defTabSz="914400" rtl="0" eaLnBrk="1" latinLnBrk="0" hangingPunct="1">
-        <a:lnSpc>
-          <a:spcPct val="90000"/>
-        </a:lnSpc>
-        <a:spcBef>
-          <a:spcPts val="500"/>
-        </a:spcBef>
-        <a:buFont typeface="Arial" panose="020B0604020202020204" pitchFamily="34" charset="0"/>
-        <a:buChar char="•"/>
+      <a:lvl8pPr marL="3200400" algn="l" defTabSz="457200" rtl="0" eaLnBrk="1" latinLnBrk="0" hangingPunct="1">
         <a:defRPr sz="1800" kern="1200">
           <a:solidFill>
             <a:schemeClr val="tx1"/>
@@ -3186,110 +5817,7 @@
           <a:cs typeface="+mn-cs"/>
         </a:defRPr>
       </a:lvl8pPr>
-      <a:lvl9pPr marL="3886200" indent="-228600" algn="l" defTabSz="914400" rtl="0" eaLnBrk="1" latinLnBrk="0" hangingPunct="1">
-        <a:lnSpc>
-          <a:spcPct val="90000"/>
-        </a:lnSpc>
-        <a:spcBef>
-          <a:spcPts val="500"/>
-        </a:spcBef>
-        <a:buFont typeface="Arial" panose="020B0604020202020204" pitchFamily="34" charset="0"/>
-        <a:buChar char="•"/>
-        <a:defRPr sz="1800" kern="1200">
-          <a:solidFill>
-            <a:schemeClr val="tx1"/>
-          </a:solidFill>
-          <a:latin typeface="+mn-lt"/>
-          <a:ea typeface="+mn-ea"/>
-          <a:cs typeface="+mn-cs"/>
-        </a:defRPr>
-      </a:lvl9pPr>
-    </p:bodyStyle>
-    <p:otherStyle>
-      <a:defPPr>
-        <a:defRPr lang="fr-FR"/>
-      </a:defPPr>
-      <a:lvl1pPr marL="0" algn="l" defTabSz="914400" rtl="0" eaLnBrk="1" latinLnBrk="0" hangingPunct="1">
-        <a:defRPr sz="1800" kern="1200">
-          <a:solidFill>
-            <a:schemeClr val="tx1"/>
-          </a:solidFill>
-          <a:latin typeface="+mn-lt"/>
-          <a:ea typeface="+mn-ea"/>
-          <a:cs typeface="+mn-cs"/>
-        </a:defRPr>
-      </a:lvl1pPr>
-      <a:lvl2pPr marL="457200" algn="l" defTabSz="914400" rtl="0" eaLnBrk="1" latinLnBrk="0" hangingPunct="1">
-        <a:defRPr sz="1800" kern="1200">
-          <a:solidFill>
-            <a:schemeClr val="tx1"/>
-          </a:solidFill>
-          <a:latin typeface="+mn-lt"/>
-          <a:ea typeface="+mn-ea"/>
-          <a:cs typeface="+mn-cs"/>
-        </a:defRPr>
-      </a:lvl2pPr>
-      <a:lvl3pPr marL="914400" algn="l" defTabSz="914400" rtl="0" eaLnBrk="1" latinLnBrk="0" hangingPunct="1">
-        <a:defRPr sz="1800" kern="1200">
-          <a:solidFill>
-            <a:schemeClr val="tx1"/>
-          </a:solidFill>
-          <a:latin typeface="+mn-lt"/>
-          <a:ea typeface="+mn-ea"/>
-          <a:cs typeface="+mn-cs"/>
-        </a:defRPr>
-      </a:lvl3pPr>
-      <a:lvl4pPr marL="1371600" algn="l" defTabSz="914400" rtl="0" eaLnBrk="1" latinLnBrk="0" hangingPunct="1">
-        <a:defRPr sz="1800" kern="1200">
-          <a:solidFill>
-            <a:schemeClr val="tx1"/>
-          </a:solidFill>
-          <a:latin typeface="+mn-lt"/>
-          <a:ea typeface="+mn-ea"/>
-          <a:cs typeface="+mn-cs"/>
-        </a:defRPr>
-      </a:lvl4pPr>
-      <a:lvl5pPr marL="1828800" algn="l" defTabSz="914400" rtl="0" eaLnBrk="1" latinLnBrk="0" hangingPunct="1">
-        <a:defRPr sz="1800" kern="1200">
-          <a:solidFill>
-            <a:schemeClr val="tx1"/>
-          </a:solidFill>
-          <a:latin typeface="+mn-lt"/>
-          <a:ea typeface="+mn-ea"/>
-          <a:cs typeface="+mn-cs"/>
-        </a:defRPr>
-      </a:lvl5pPr>
-      <a:lvl6pPr marL="2286000" algn="l" defTabSz="914400" rtl="0" eaLnBrk="1" latinLnBrk="0" hangingPunct="1">
-        <a:defRPr sz="1800" kern="1200">
-          <a:solidFill>
-            <a:schemeClr val="tx1"/>
-          </a:solidFill>
-          <a:latin typeface="+mn-lt"/>
-          <a:ea typeface="+mn-ea"/>
-          <a:cs typeface="+mn-cs"/>
-        </a:defRPr>
-      </a:lvl6pPr>
-      <a:lvl7pPr marL="2743200" algn="l" defTabSz="914400" rtl="0" eaLnBrk="1" latinLnBrk="0" hangingPunct="1">
-        <a:defRPr sz="1800" kern="1200">
-          <a:solidFill>
-            <a:schemeClr val="tx1"/>
-          </a:solidFill>
-          <a:latin typeface="+mn-lt"/>
-          <a:ea typeface="+mn-ea"/>
-          <a:cs typeface="+mn-cs"/>
-        </a:defRPr>
-      </a:lvl7pPr>
-      <a:lvl8pPr marL="3200400" algn="l" defTabSz="914400" rtl="0" eaLnBrk="1" latinLnBrk="0" hangingPunct="1">
-        <a:defRPr sz="1800" kern="1200">
-          <a:solidFill>
-            <a:schemeClr val="tx1"/>
-          </a:solidFill>
-          <a:latin typeface="+mn-lt"/>
-          <a:ea typeface="+mn-ea"/>
-          <a:cs typeface="+mn-cs"/>
-        </a:defRPr>
-      </a:lvl8pPr>
-      <a:lvl9pPr marL="3657600" algn="l" defTabSz="914400" rtl="0" eaLnBrk="1" latinLnBrk="0" hangingPunct="1">
+      <a:lvl9pPr marL="3657600" algn="l" defTabSz="457200" rtl="0" eaLnBrk="1" latinLnBrk="0" hangingPunct="1">
         <a:defRPr sz="1800" kern="1200">
           <a:solidFill>
             <a:schemeClr val="tx1"/>
@@ -3301,6 +5829,11 @@
       </a:lvl9pPr>
     </p:otherStyle>
   </p:txStyles>
+  <p:extLst>
+    <p:ext uri="{27BBF7A9-308A-43DC-89C8-2F10F3537804}">
+      <p15:sldGuideLst xmlns:p15="http://schemas.microsoft.com/office/powerpoint/2012/main"/>
+    </p:ext>
+  </p:extLst>
 </p:sldMaster>
 </file>
 
@@ -3342,7 +5875,10 @@
           <a:bodyPr/>
           <a:lstStyle/>
           <a:p>
-            <a:endParaRPr lang="fr-FR"/>
+            <a:r>
+              <a:rPr lang="fr-FR" dirty="0"/>
+              <a:t>Présentation Groupe F</a:t>
+            </a:r>
           </a:p>
         </p:txBody>
       </p:sp>
@@ -3362,12 +5898,21 @@
             <p:ph type="subTitle" idx="1"/>
           </p:nvPr>
         </p:nvSpPr>
-        <p:spPr/>
+        <p:spPr>
+          <a:xfrm>
+            <a:off x="199475" y="6291072"/>
+            <a:ext cx="7766936" cy="392852"/>
+          </a:xfrm>
+        </p:spPr>
         <p:txBody>
           <a:bodyPr/>
           <a:lstStyle/>
           <a:p>
-            <a:endParaRPr lang="fr-FR"/>
+            <a:pPr algn="l"/>
+            <a:r>
+              <a:rPr lang="fr-FR" dirty="0"/>
+              <a:t>BAUDET, FORNER, LATORRE, ROUX</a:t>
+            </a:r>
           </a:p>
         </p:txBody>
       </p:sp>
@@ -3384,10 +5929,1096 @@
 </p:sld>
 </file>
 
+<file path=ppt/slides/slide2.xml><?xml version="1.0" encoding="utf-8"?>
+<p:sld xmlns:a="http://schemas.openxmlformats.org/drawingml/2006/main" xmlns:r="http://schemas.openxmlformats.org/officeDocument/2006/relationships" xmlns:p="http://schemas.openxmlformats.org/presentationml/2006/main">
+  <p:cSld>
+    <p:spTree>
+      <p:nvGrpSpPr>
+        <p:cNvPr id="1" name=""/>
+        <p:cNvGrpSpPr/>
+        <p:nvPr/>
+      </p:nvGrpSpPr>
+      <p:grpSpPr>
+        <a:xfrm>
+          <a:off x="0" y="0"/>
+          <a:ext cx="0" cy="0"/>
+          <a:chOff x="0" y="0"/>
+          <a:chExt cx="0" cy="0"/>
+        </a:xfrm>
+      </p:grpSpPr>
+      <p:sp>
+        <p:nvSpPr>
+          <p:cNvPr id="2" name="Titre 1">
+            <a:extLst>
+              <a:ext uri="{FF2B5EF4-FFF2-40B4-BE49-F238E27FC236}">
+                <a16:creationId xmlns:a16="http://schemas.microsoft.com/office/drawing/2014/main" id="{653C06E6-1951-0615-C783-D45BF82159DD}"/>
+              </a:ext>
+            </a:extLst>
+          </p:cNvPr>
+          <p:cNvSpPr>
+            <a:spLocks noGrp="1"/>
+          </p:cNvSpPr>
+          <p:nvPr>
+            <p:ph type="title"/>
+          </p:nvPr>
+        </p:nvSpPr>
+        <p:spPr>
+          <a:xfrm>
+            <a:off x="838200" y="365125"/>
+            <a:ext cx="10515600" cy="823595"/>
+          </a:xfrm>
+        </p:spPr>
+        <p:txBody>
+          <a:bodyPr>
+            <a:normAutofit/>
+          </a:bodyPr>
+          <a:lstStyle/>
+          <a:p>
+            <a:r>
+              <a:rPr lang="fr-FR" dirty="0"/>
+              <a:t>Rappel Cahier des charges</a:t>
+            </a:r>
+          </a:p>
+        </p:txBody>
+      </p:sp>
+      <p:sp>
+        <p:nvSpPr>
+          <p:cNvPr id="3" name="Espace réservé du contenu 2">
+            <a:extLst>
+              <a:ext uri="{FF2B5EF4-FFF2-40B4-BE49-F238E27FC236}">
+                <a16:creationId xmlns:a16="http://schemas.microsoft.com/office/drawing/2014/main" id="{B5291E59-A86B-5BA2-A263-771294E4453E}"/>
+              </a:ext>
+            </a:extLst>
+          </p:cNvPr>
+          <p:cNvSpPr>
+            <a:spLocks noGrp="1"/>
+          </p:cNvSpPr>
+          <p:nvPr>
+            <p:ph idx="1"/>
+          </p:nvPr>
+        </p:nvSpPr>
+        <p:spPr>
+          <a:xfrm>
+            <a:off x="838200" y="1188720"/>
+            <a:ext cx="10515600" cy="4988243"/>
+          </a:xfrm>
+        </p:spPr>
+        <p:txBody>
+          <a:bodyPr/>
+          <a:lstStyle/>
+          <a:p>
+            <a:pPr marL="0" indent="0">
+              <a:buNone/>
+            </a:pPr>
+            <a:r>
+              <a:rPr lang="fr-FR" sz="2800" dirty="0"/>
+              <a:t>Sortie graphique finale :</a:t>
+            </a:r>
+          </a:p>
+          <a:p>
+            <a:pPr marL="0" indent="0">
+              <a:buNone/>
+            </a:pPr>
+            <a:endParaRPr lang="fr-FR" dirty="0"/>
+          </a:p>
+          <a:p>
+            <a:r>
+              <a:rPr lang="fr-FR" sz="2400" dirty="0"/>
+              <a:t>Chargement des résultats finaux </a:t>
+            </a:r>
+          </a:p>
+          <a:p>
+            <a:endParaRPr lang="fr-FR" sz="2400" dirty="0"/>
+          </a:p>
+          <a:p>
+            <a:r>
+              <a:rPr lang="fr-FR" sz="2400" dirty="0"/>
+              <a:t>Affichage des différentes visualisation et mesures</a:t>
+            </a:r>
+          </a:p>
+          <a:p>
+            <a:endParaRPr lang="fr-FR" sz="2400" dirty="0"/>
+          </a:p>
+          <a:p>
+            <a:r>
+              <a:rPr lang="fr-FR" sz="2400" dirty="0"/>
+              <a:t>Interaction avec les données (ex : zoom sur graph)</a:t>
+            </a:r>
+          </a:p>
+        </p:txBody>
+      </p:sp>
+    </p:spTree>
+    <p:extLst>
+      <p:ext uri="{BB962C8B-B14F-4D97-AF65-F5344CB8AC3E}">
+        <p14:creationId xmlns:p14="http://schemas.microsoft.com/office/powerpoint/2010/main" val="1893558423"/>
+      </p:ext>
+    </p:extLst>
+  </p:cSld>
+  <p:clrMapOvr>
+    <a:masterClrMapping/>
+  </p:clrMapOvr>
+</p:sld>
+</file>
+
+<file path=ppt/slides/slide3.xml><?xml version="1.0" encoding="utf-8"?>
+<p:sld xmlns:a="http://schemas.openxmlformats.org/drawingml/2006/main" xmlns:r="http://schemas.openxmlformats.org/officeDocument/2006/relationships" xmlns:p="http://schemas.openxmlformats.org/presentationml/2006/main">
+  <p:cSld>
+    <p:spTree>
+      <p:nvGrpSpPr>
+        <p:cNvPr id="1" name=""/>
+        <p:cNvGrpSpPr/>
+        <p:nvPr/>
+      </p:nvGrpSpPr>
+      <p:grpSpPr>
+        <a:xfrm>
+          <a:off x="0" y="0"/>
+          <a:ext cx="0" cy="0"/>
+          <a:chOff x="0" y="0"/>
+          <a:chExt cx="0" cy="0"/>
+        </a:xfrm>
+      </p:grpSpPr>
+      <p:sp>
+        <p:nvSpPr>
+          <p:cNvPr id="2" name="Titre 1">
+            <a:extLst>
+              <a:ext uri="{FF2B5EF4-FFF2-40B4-BE49-F238E27FC236}">
+                <a16:creationId xmlns:a16="http://schemas.microsoft.com/office/drawing/2014/main" id="{653C06E6-1951-0615-C783-D45BF82159DD}"/>
+              </a:ext>
+            </a:extLst>
+          </p:cNvPr>
+          <p:cNvSpPr>
+            <a:spLocks noGrp="1"/>
+          </p:cNvSpPr>
+          <p:nvPr>
+            <p:ph type="title"/>
+          </p:nvPr>
+        </p:nvSpPr>
+        <p:spPr>
+          <a:xfrm>
+            <a:off x="838200" y="365125"/>
+            <a:ext cx="10515600" cy="823595"/>
+          </a:xfrm>
+        </p:spPr>
+        <p:txBody>
+          <a:bodyPr>
+            <a:normAutofit/>
+          </a:bodyPr>
+          <a:lstStyle/>
+          <a:p>
+            <a:r>
+              <a:rPr lang="fr-FR" dirty="0"/>
+              <a:t>Comment a été réalisé le travail ?</a:t>
+            </a:r>
+          </a:p>
+        </p:txBody>
+      </p:sp>
+      <p:sp>
+        <p:nvSpPr>
+          <p:cNvPr id="3" name="Espace réservé du contenu 2">
+            <a:extLst>
+              <a:ext uri="{FF2B5EF4-FFF2-40B4-BE49-F238E27FC236}">
+                <a16:creationId xmlns:a16="http://schemas.microsoft.com/office/drawing/2014/main" id="{B5291E59-A86B-5BA2-A263-771294E4453E}"/>
+              </a:ext>
+            </a:extLst>
+          </p:cNvPr>
+          <p:cNvSpPr>
+            <a:spLocks noGrp="1"/>
+          </p:cNvSpPr>
+          <p:nvPr>
+            <p:ph idx="1"/>
+          </p:nvPr>
+        </p:nvSpPr>
+        <p:spPr>
+          <a:xfrm>
+            <a:off x="838200" y="1188720"/>
+            <a:ext cx="10515600" cy="4988243"/>
+          </a:xfrm>
+        </p:spPr>
+        <p:txBody>
+          <a:bodyPr>
+            <a:normAutofit/>
+          </a:bodyPr>
+          <a:lstStyle/>
+          <a:p>
+            <a:r>
+              <a:rPr lang="fr-FR" sz="2400" dirty="0"/>
+              <a:t>Programmation en Python 3 (via </a:t>
+            </a:r>
+            <a:r>
+              <a:rPr lang="fr-FR" sz="2400" dirty="0" err="1"/>
+              <a:t>Spyder</a:t>
+            </a:r>
+            <a:r>
+              <a:rPr lang="fr-FR" sz="2400" dirty="0"/>
+              <a:t> et </a:t>
+            </a:r>
+            <a:r>
+              <a:rPr lang="fr-FR" sz="2400" dirty="0" err="1"/>
+              <a:t>PyCharm</a:t>
+            </a:r>
+            <a:r>
+              <a:rPr lang="fr-FR" sz="2400" dirty="0"/>
+              <a:t>)</a:t>
+            </a:r>
+          </a:p>
+          <a:p>
+            <a:endParaRPr lang="fr-FR" sz="2400" dirty="0"/>
+          </a:p>
+          <a:p>
+            <a:r>
+              <a:rPr lang="fr-FR" sz="2400" dirty="0"/>
+              <a:t>Utilisation de PyQt5 pour la partie graphique</a:t>
+            </a:r>
+          </a:p>
+          <a:p>
+            <a:endParaRPr lang="fr-FR" sz="2400" dirty="0"/>
+          </a:p>
+          <a:p>
+            <a:r>
+              <a:rPr lang="fr-FR" sz="2400" dirty="0"/>
+              <a:t>Répartition travail : 2 en back 2 en front</a:t>
+            </a:r>
+          </a:p>
+          <a:p>
+            <a:endParaRPr lang="fr-FR" sz="2400" dirty="0"/>
+          </a:p>
+          <a:p>
+            <a:r>
+              <a:rPr lang="fr-FR" sz="2400" dirty="0"/>
+              <a:t>Points d’appuis : Points vu en cours</a:t>
+            </a:r>
+          </a:p>
+          <a:p>
+            <a:endParaRPr lang="fr-FR" sz="2400" dirty="0"/>
+          </a:p>
+          <a:p>
+            <a:r>
+              <a:rPr lang="fr-FR" sz="2400" dirty="0"/>
+              <a:t>Difficultés rencontrées : Manque de communication dans le groupe</a:t>
+            </a:r>
+          </a:p>
+        </p:txBody>
+      </p:sp>
+    </p:spTree>
+    <p:extLst>
+      <p:ext uri="{BB962C8B-B14F-4D97-AF65-F5344CB8AC3E}">
+        <p14:creationId xmlns:p14="http://schemas.microsoft.com/office/powerpoint/2010/main" val="816809509"/>
+      </p:ext>
+    </p:extLst>
+  </p:cSld>
+  <p:clrMapOvr>
+    <a:masterClrMapping/>
+  </p:clrMapOvr>
+</p:sld>
+</file>
+
+<file path=ppt/slides/slide4.xml><?xml version="1.0" encoding="utf-8"?>
+<p:sld xmlns:a="http://schemas.openxmlformats.org/drawingml/2006/main" xmlns:r="http://schemas.openxmlformats.org/officeDocument/2006/relationships" xmlns:p="http://schemas.openxmlformats.org/presentationml/2006/main">
+  <p:cSld>
+    <p:spTree>
+      <p:nvGrpSpPr>
+        <p:cNvPr id="1" name=""/>
+        <p:cNvGrpSpPr/>
+        <p:nvPr/>
+      </p:nvGrpSpPr>
+      <p:grpSpPr>
+        <a:xfrm>
+          <a:off x="0" y="0"/>
+          <a:ext cx="0" cy="0"/>
+          <a:chOff x="0" y="0"/>
+          <a:chExt cx="0" cy="0"/>
+        </a:xfrm>
+      </p:grpSpPr>
+      <p:sp>
+        <p:nvSpPr>
+          <p:cNvPr id="2" name="Titre 1">
+            <a:extLst>
+              <a:ext uri="{FF2B5EF4-FFF2-40B4-BE49-F238E27FC236}">
+                <a16:creationId xmlns:a16="http://schemas.microsoft.com/office/drawing/2014/main" id="{653C06E6-1951-0615-C783-D45BF82159DD}"/>
+              </a:ext>
+            </a:extLst>
+          </p:cNvPr>
+          <p:cNvSpPr>
+            <a:spLocks noGrp="1"/>
+          </p:cNvSpPr>
+          <p:nvPr>
+            <p:ph type="title"/>
+          </p:nvPr>
+        </p:nvSpPr>
+        <p:spPr>
+          <a:xfrm>
+            <a:off x="838200" y="269239"/>
+            <a:ext cx="10515600" cy="823595"/>
+          </a:xfrm>
+        </p:spPr>
+        <p:txBody>
+          <a:bodyPr>
+            <a:normAutofit/>
+          </a:bodyPr>
+          <a:lstStyle/>
+          <a:p>
+            <a:r>
+              <a:rPr lang="fr-FR" dirty="0"/>
+              <a:t>Sortie Finale</a:t>
+            </a:r>
+          </a:p>
+        </p:txBody>
+      </p:sp>
+      <p:sp>
+        <p:nvSpPr>
+          <p:cNvPr id="3" name="Espace réservé du contenu 2">
+            <a:extLst>
+              <a:ext uri="{FF2B5EF4-FFF2-40B4-BE49-F238E27FC236}">
+                <a16:creationId xmlns:a16="http://schemas.microsoft.com/office/drawing/2014/main" id="{B5291E59-A86B-5BA2-A263-771294E4453E}"/>
+              </a:ext>
+            </a:extLst>
+          </p:cNvPr>
+          <p:cNvSpPr>
+            <a:spLocks noGrp="1"/>
+          </p:cNvSpPr>
+          <p:nvPr>
+            <p:ph idx="1"/>
+          </p:nvPr>
+        </p:nvSpPr>
+        <p:spPr>
+          <a:xfrm>
+            <a:off x="838200" y="1092834"/>
+            <a:ext cx="10515600" cy="4988243"/>
+          </a:xfrm>
+        </p:spPr>
+        <p:txBody>
+          <a:bodyPr>
+            <a:normAutofit/>
+          </a:bodyPr>
+          <a:lstStyle/>
+          <a:p>
+            <a:pPr marL="0" indent="0">
+              <a:buNone/>
+            </a:pPr>
+            <a:r>
+              <a:rPr lang="fr-FR" sz="2000" dirty="0"/>
+              <a:t>1ere fenêtre : principale </a:t>
+            </a:r>
+          </a:p>
+        </p:txBody>
+      </p:sp>
+      <p:pic>
+        <p:nvPicPr>
+          <p:cNvPr id="7" name="Image 6">
+            <a:extLst>
+              <a:ext uri="{FF2B5EF4-FFF2-40B4-BE49-F238E27FC236}">
+                <a16:creationId xmlns:a16="http://schemas.microsoft.com/office/drawing/2014/main" id="{6174E816-F745-F356-A194-507A30E3864D}"/>
+              </a:ext>
+            </a:extLst>
+          </p:cNvPr>
+          <p:cNvPicPr>
+            <a:picLocks noChangeAspect="1"/>
+          </p:cNvPicPr>
+          <p:nvPr/>
+        </p:nvPicPr>
+        <p:blipFill>
+          <a:blip r:embed="rId2"/>
+          <a:srcRect l="17509" t="8650" r="18735" b="26737"/>
+          <a:stretch/>
+        </p:blipFill>
+        <p:spPr>
+          <a:xfrm>
+            <a:off x="2295144" y="1643255"/>
+            <a:ext cx="7598664" cy="4670552"/>
+          </a:xfrm>
+          <a:prstGeom prst="rect">
+            <a:avLst/>
+          </a:prstGeom>
+        </p:spPr>
+      </p:pic>
+    </p:spTree>
+    <p:extLst>
+      <p:ext uri="{BB962C8B-B14F-4D97-AF65-F5344CB8AC3E}">
+        <p14:creationId xmlns:p14="http://schemas.microsoft.com/office/powerpoint/2010/main" val="1852737009"/>
+      </p:ext>
+    </p:extLst>
+  </p:cSld>
+  <p:clrMapOvr>
+    <a:masterClrMapping/>
+  </p:clrMapOvr>
+</p:sld>
+</file>
+
+<file path=ppt/slides/slide5.xml><?xml version="1.0" encoding="utf-8"?>
+<p:sld xmlns:a="http://schemas.openxmlformats.org/drawingml/2006/main" xmlns:r="http://schemas.openxmlformats.org/officeDocument/2006/relationships" xmlns:p="http://schemas.openxmlformats.org/presentationml/2006/main">
+  <p:cSld>
+    <p:spTree>
+      <p:nvGrpSpPr>
+        <p:cNvPr id="1" name=""/>
+        <p:cNvGrpSpPr/>
+        <p:nvPr/>
+      </p:nvGrpSpPr>
+      <p:grpSpPr>
+        <a:xfrm>
+          <a:off x="0" y="0"/>
+          <a:ext cx="0" cy="0"/>
+          <a:chOff x="0" y="0"/>
+          <a:chExt cx="0" cy="0"/>
+        </a:xfrm>
+      </p:grpSpPr>
+      <p:sp>
+        <p:nvSpPr>
+          <p:cNvPr id="2" name="Titre 1">
+            <a:extLst>
+              <a:ext uri="{FF2B5EF4-FFF2-40B4-BE49-F238E27FC236}">
+                <a16:creationId xmlns:a16="http://schemas.microsoft.com/office/drawing/2014/main" id="{653C06E6-1951-0615-C783-D45BF82159DD}"/>
+              </a:ext>
+            </a:extLst>
+          </p:cNvPr>
+          <p:cNvSpPr>
+            <a:spLocks noGrp="1"/>
+          </p:cNvSpPr>
+          <p:nvPr>
+            <p:ph type="title"/>
+          </p:nvPr>
+        </p:nvSpPr>
+        <p:spPr>
+          <a:xfrm>
+            <a:off x="838200" y="365125"/>
+            <a:ext cx="10515600" cy="823595"/>
+          </a:xfrm>
+        </p:spPr>
+        <p:txBody>
+          <a:bodyPr>
+            <a:normAutofit/>
+          </a:bodyPr>
+          <a:lstStyle/>
+          <a:p>
+            <a:r>
+              <a:rPr lang="fr-FR" dirty="0"/>
+              <a:t>Sortie Finale</a:t>
+            </a:r>
+          </a:p>
+        </p:txBody>
+      </p:sp>
+      <p:sp>
+        <p:nvSpPr>
+          <p:cNvPr id="3" name="Espace réservé du contenu 2">
+            <a:extLst>
+              <a:ext uri="{FF2B5EF4-FFF2-40B4-BE49-F238E27FC236}">
+                <a16:creationId xmlns:a16="http://schemas.microsoft.com/office/drawing/2014/main" id="{B5291E59-A86B-5BA2-A263-771294E4453E}"/>
+              </a:ext>
+            </a:extLst>
+          </p:cNvPr>
+          <p:cNvSpPr>
+            <a:spLocks noGrp="1"/>
+          </p:cNvSpPr>
+          <p:nvPr>
+            <p:ph idx="1"/>
+          </p:nvPr>
+        </p:nvSpPr>
+        <p:spPr>
+          <a:xfrm>
+            <a:off x="838200" y="1188721"/>
+            <a:ext cx="10515600" cy="457200"/>
+          </a:xfrm>
+        </p:spPr>
+        <p:txBody>
+          <a:bodyPr>
+            <a:normAutofit/>
+          </a:bodyPr>
+          <a:lstStyle/>
+          <a:p>
+            <a:pPr marL="0" indent="0">
+              <a:buNone/>
+            </a:pPr>
+            <a:r>
+              <a:rPr lang="fr-FR" sz="2000" dirty="0"/>
+              <a:t>2e fenêtre : graphique</a:t>
+            </a:r>
+          </a:p>
+        </p:txBody>
+      </p:sp>
+      <p:pic>
+        <p:nvPicPr>
+          <p:cNvPr id="6" name="Image 5">
+            <a:extLst>
+              <a:ext uri="{FF2B5EF4-FFF2-40B4-BE49-F238E27FC236}">
+                <a16:creationId xmlns:a16="http://schemas.microsoft.com/office/drawing/2014/main" id="{04C7DF7C-A12D-ABB8-CD07-1297EBAFD1A3}"/>
+              </a:ext>
+            </a:extLst>
+          </p:cNvPr>
+          <p:cNvPicPr>
+            <a:picLocks noChangeAspect="1"/>
+          </p:cNvPicPr>
+          <p:nvPr/>
+        </p:nvPicPr>
+        <p:blipFill>
+          <a:blip r:embed="rId2"/>
+          <a:srcRect l="825" t="5263" r="10901" b="26993"/>
+          <a:stretch/>
+        </p:blipFill>
+        <p:spPr>
+          <a:xfrm>
+            <a:off x="591312" y="1645920"/>
+            <a:ext cx="10762488" cy="3392424"/>
+          </a:xfrm>
+          <a:prstGeom prst="rect">
+            <a:avLst/>
+          </a:prstGeom>
+        </p:spPr>
+      </p:pic>
+      <p:sp>
+        <p:nvSpPr>
+          <p:cNvPr id="7" name="Espace réservé du contenu 2">
+            <a:extLst>
+              <a:ext uri="{FF2B5EF4-FFF2-40B4-BE49-F238E27FC236}">
+                <a16:creationId xmlns:a16="http://schemas.microsoft.com/office/drawing/2014/main" id="{986399A3-F90D-E44F-BA7C-B56159E3067D}"/>
+              </a:ext>
+            </a:extLst>
+          </p:cNvPr>
+          <p:cNvSpPr txBox="1">
+            <a:spLocks/>
+          </p:cNvSpPr>
+          <p:nvPr/>
+        </p:nvSpPr>
+        <p:spPr>
+          <a:xfrm>
+            <a:off x="838200" y="5285232"/>
+            <a:ext cx="10515600" cy="891731"/>
+          </a:xfrm>
+          <a:prstGeom prst="rect">
+            <a:avLst/>
+          </a:prstGeom>
+        </p:spPr>
+        <p:txBody>
+          <a:bodyPr vert="horz" lIns="91440" tIns="45720" rIns="91440" bIns="45720" rtlCol="0">
+            <a:normAutofit/>
+          </a:bodyPr>
+          <a:lstStyle>
+            <a:lvl1pPr marL="228600" indent="-228600" algn="l" defTabSz="914400" rtl="0" eaLnBrk="1" latinLnBrk="0" hangingPunct="1">
+              <a:lnSpc>
+                <a:spcPct val="90000"/>
+              </a:lnSpc>
+              <a:spcBef>
+                <a:spcPts val="1000"/>
+              </a:spcBef>
+              <a:buFont typeface="Arial" panose="020B0604020202020204" pitchFamily="34" charset="0"/>
+              <a:buChar char="•"/>
+              <a:defRPr sz="2800" kern="1200">
+                <a:solidFill>
+                  <a:schemeClr val="tx1"/>
+                </a:solidFill>
+                <a:latin typeface="+mn-lt"/>
+                <a:ea typeface="+mn-ea"/>
+                <a:cs typeface="+mn-cs"/>
+              </a:defRPr>
+            </a:lvl1pPr>
+            <a:lvl2pPr marL="685800" indent="-228600" algn="l" defTabSz="914400" rtl="0" eaLnBrk="1" latinLnBrk="0" hangingPunct="1">
+              <a:lnSpc>
+                <a:spcPct val="90000"/>
+              </a:lnSpc>
+              <a:spcBef>
+                <a:spcPts val="500"/>
+              </a:spcBef>
+              <a:buFont typeface="Arial" panose="020B0604020202020204" pitchFamily="34" charset="0"/>
+              <a:buChar char="•"/>
+              <a:defRPr sz="2400" kern="1200">
+                <a:solidFill>
+                  <a:schemeClr val="tx1"/>
+                </a:solidFill>
+                <a:latin typeface="+mn-lt"/>
+                <a:ea typeface="+mn-ea"/>
+                <a:cs typeface="+mn-cs"/>
+              </a:defRPr>
+            </a:lvl2pPr>
+            <a:lvl3pPr marL="1143000" indent="-228600" algn="l" defTabSz="914400" rtl="0" eaLnBrk="1" latinLnBrk="0" hangingPunct="1">
+              <a:lnSpc>
+                <a:spcPct val="90000"/>
+              </a:lnSpc>
+              <a:spcBef>
+                <a:spcPts val="500"/>
+              </a:spcBef>
+              <a:buFont typeface="Arial" panose="020B0604020202020204" pitchFamily="34" charset="0"/>
+              <a:buChar char="•"/>
+              <a:defRPr sz="2000" kern="1200">
+                <a:solidFill>
+                  <a:schemeClr val="tx1"/>
+                </a:solidFill>
+                <a:latin typeface="+mn-lt"/>
+                <a:ea typeface="+mn-ea"/>
+                <a:cs typeface="+mn-cs"/>
+              </a:defRPr>
+            </a:lvl3pPr>
+            <a:lvl4pPr marL="1600200" indent="-228600" algn="l" defTabSz="914400" rtl="0" eaLnBrk="1" latinLnBrk="0" hangingPunct="1">
+              <a:lnSpc>
+                <a:spcPct val="90000"/>
+              </a:lnSpc>
+              <a:spcBef>
+                <a:spcPts val="500"/>
+              </a:spcBef>
+              <a:buFont typeface="Arial" panose="020B0604020202020204" pitchFamily="34" charset="0"/>
+              <a:buChar char="•"/>
+              <a:defRPr sz="1800" kern="1200">
+                <a:solidFill>
+                  <a:schemeClr val="tx1"/>
+                </a:solidFill>
+                <a:latin typeface="+mn-lt"/>
+                <a:ea typeface="+mn-ea"/>
+                <a:cs typeface="+mn-cs"/>
+              </a:defRPr>
+            </a:lvl4pPr>
+            <a:lvl5pPr marL="2057400" indent="-228600" algn="l" defTabSz="914400" rtl="0" eaLnBrk="1" latinLnBrk="0" hangingPunct="1">
+              <a:lnSpc>
+                <a:spcPct val="90000"/>
+              </a:lnSpc>
+              <a:spcBef>
+                <a:spcPts val="500"/>
+              </a:spcBef>
+              <a:buFont typeface="Arial" panose="020B0604020202020204" pitchFamily="34" charset="0"/>
+              <a:buChar char="•"/>
+              <a:defRPr sz="1800" kern="1200">
+                <a:solidFill>
+                  <a:schemeClr val="tx1"/>
+                </a:solidFill>
+                <a:latin typeface="+mn-lt"/>
+                <a:ea typeface="+mn-ea"/>
+                <a:cs typeface="+mn-cs"/>
+              </a:defRPr>
+            </a:lvl5pPr>
+            <a:lvl6pPr marL="2514600" indent="-228600" algn="l" defTabSz="914400" rtl="0" eaLnBrk="1" latinLnBrk="0" hangingPunct="1">
+              <a:lnSpc>
+                <a:spcPct val="90000"/>
+              </a:lnSpc>
+              <a:spcBef>
+                <a:spcPts val="500"/>
+              </a:spcBef>
+              <a:buFont typeface="Arial" panose="020B0604020202020204" pitchFamily="34" charset="0"/>
+              <a:buChar char="•"/>
+              <a:defRPr sz="1800" kern="1200">
+                <a:solidFill>
+                  <a:schemeClr val="tx1"/>
+                </a:solidFill>
+                <a:latin typeface="+mn-lt"/>
+                <a:ea typeface="+mn-ea"/>
+                <a:cs typeface="+mn-cs"/>
+              </a:defRPr>
+            </a:lvl6pPr>
+            <a:lvl7pPr marL="2971800" indent="-228600" algn="l" defTabSz="914400" rtl="0" eaLnBrk="1" latinLnBrk="0" hangingPunct="1">
+              <a:lnSpc>
+                <a:spcPct val="90000"/>
+              </a:lnSpc>
+              <a:spcBef>
+                <a:spcPts val="500"/>
+              </a:spcBef>
+              <a:buFont typeface="Arial" panose="020B0604020202020204" pitchFamily="34" charset="0"/>
+              <a:buChar char="•"/>
+              <a:defRPr sz="1800" kern="1200">
+                <a:solidFill>
+                  <a:schemeClr val="tx1"/>
+                </a:solidFill>
+                <a:latin typeface="+mn-lt"/>
+                <a:ea typeface="+mn-ea"/>
+                <a:cs typeface="+mn-cs"/>
+              </a:defRPr>
+            </a:lvl7pPr>
+            <a:lvl8pPr marL="3429000" indent="-228600" algn="l" defTabSz="914400" rtl="0" eaLnBrk="1" latinLnBrk="0" hangingPunct="1">
+              <a:lnSpc>
+                <a:spcPct val="90000"/>
+              </a:lnSpc>
+              <a:spcBef>
+                <a:spcPts val="500"/>
+              </a:spcBef>
+              <a:buFont typeface="Arial" panose="020B0604020202020204" pitchFamily="34" charset="0"/>
+              <a:buChar char="•"/>
+              <a:defRPr sz="1800" kern="1200">
+                <a:solidFill>
+                  <a:schemeClr val="tx1"/>
+                </a:solidFill>
+                <a:latin typeface="+mn-lt"/>
+                <a:ea typeface="+mn-ea"/>
+                <a:cs typeface="+mn-cs"/>
+              </a:defRPr>
+            </a:lvl8pPr>
+            <a:lvl9pPr marL="3886200" indent="-228600" algn="l" defTabSz="914400" rtl="0" eaLnBrk="1" latinLnBrk="0" hangingPunct="1">
+              <a:lnSpc>
+                <a:spcPct val="90000"/>
+              </a:lnSpc>
+              <a:spcBef>
+                <a:spcPts val="500"/>
+              </a:spcBef>
+              <a:buFont typeface="Arial" panose="020B0604020202020204" pitchFamily="34" charset="0"/>
+              <a:buChar char="•"/>
+              <a:defRPr sz="1800" kern="1200">
+                <a:solidFill>
+                  <a:schemeClr val="tx1"/>
+                </a:solidFill>
+                <a:latin typeface="+mn-lt"/>
+                <a:ea typeface="+mn-ea"/>
+                <a:cs typeface="+mn-cs"/>
+              </a:defRPr>
+            </a:lvl9pPr>
+          </a:lstStyle>
+          <a:p>
+            <a:pPr marL="0" indent="0">
+              <a:buFont typeface="Arial" panose="020B0604020202020204" pitchFamily="34" charset="0"/>
+              <a:buNone/>
+            </a:pPr>
+            <a:r>
+              <a:rPr lang="fr-FR" sz="2000" dirty="0"/>
+              <a:t>Boutons pour changer de graph, actualiser, exporter les graphs…</a:t>
+            </a:r>
+          </a:p>
+        </p:txBody>
+      </p:sp>
+    </p:spTree>
+    <p:extLst>
+      <p:ext uri="{BB962C8B-B14F-4D97-AF65-F5344CB8AC3E}">
+        <p14:creationId xmlns:p14="http://schemas.microsoft.com/office/powerpoint/2010/main" val="3726942844"/>
+      </p:ext>
+    </p:extLst>
+  </p:cSld>
+  <p:clrMapOvr>
+    <a:masterClrMapping/>
+  </p:clrMapOvr>
+</p:sld>
+</file>
+
+<file path=ppt/slides/slide6.xml><?xml version="1.0" encoding="utf-8"?>
+<p:sld xmlns:a="http://schemas.openxmlformats.org/drawingml/2006/main" xmlns:r="http://schemas.openxmlformats.org/officeDocument/2006/relationships" xmlns:p="http://schemas.openxmlformats.org/presentationml/2006/main">
+  <p:cSld>
+    <p:spTree>
+      <p:nvGrpSpPr>
+        <p:cNvPr id="1" name=""/>
+        <p:cNvGrpSpPr/>
+        <p:nvPr/>
+      </p:nvGrpSpPr>
+      <p:grpSpPr>
+        <a:xfrm>
+          <a:off x="0" y="0"/>
+          <a:ext cx="0" cy="0"/>
+          <a:chOff x="0" y="0"/>
+          <a:chExt cx="0" cy="0"/>
+        </a:xfrm>
+      </p:grpSpPr>
+      <p:sp>
+        <p:nvSpPr>
+          <p:cNvPr id="2" name="Titre 1">
+            <a:extLst>
+              <a:ext uri="{FF2B5EF4-FFF2-40B4-BE49-F238E27FC236}">
+                <a16:creationId xmlns:a16="http://schemas.microsoft.com/office/drawing/2014/main" id="{653C06E6-1951-0615-C783-D45BF82159DD}"/>
+              </a:ext>
+            </a:extLst>
+          </p:cNvPr>
+          <p:cNvSpPr>
+            <a:spLocks noGrp="1"/>
+          </p:cNvSpPr>
+          <p:nvPr>
+            <p:ph type="title"/>
+          </p:nvPr>
+        </p:nvSpPr>
+        <p:spPr>
+          <a:xfrm>
+            <a:off x="838200" y="365125"/>
+            <a:ext cx="10515600" cy="823595"/>
+          </a:xfrm>
+        </p:spPr>
+        <p:txBody>
+          <a:bodyPr>
+            <a:normAutofit/>
+          </a:bodyPr>
+          <a:lstStyle/>
+          <a:p>
+            <a:r>
+              <a:rPr lang="fr-FR" dirty="0"/>
+              <a:t>Sortie Finale</a:t>
+            </a:r>
+          </a:p>
+        </p:txBody>
+      </p:sp>
+      <p:sp>
+        <p:nvSpPr>
+          <p:cNvPr id="3" name="Espace réservé du contenu 2">
+            <a:extLst>
+              <a:ext uri="{FF2B5EF4-FFF2-40B4-BE49-F238E27FC236}">
+                <a16:creationId xmlns:a16="http://schemas.microsoft.com/office/drawing/2014/main" id="{B5291E59-A86B-5BA2-A263-771294E4453E}"/>
+              </a:ext>
+            </a:extLst>
+          </p:cNvPr>
+          <p:cNvSpPr>
+            <a:spLocks noGrp="1"/>
+          </p:cNvSpPr>
+          <p:nvPr>
+            <p:ph idx="1"/>
+          </p:nvPr>
+        </p:nvSpPr>
+        <p:spPr>
+          <a:xfrm>
+            <a:off x="838200" y="1188721"/>
+            <a:ext cx="10515600" cy="457200"/>
+          </a:xfrm>
+        </p:spPr>
+        <p:txBody>
+          <a:bodyPr>
+            <a:normAutofit/>
+          </a:bodyPr>
+          <a:lstStyle/>
+          <a:p>
+            <a:pPr marL="0" indent="0">
+              <a:buNone/>
+            </a:pPr>
+            <a:r>
+              <a:rPr lang="fr-FR" sz="2000" dirty="0"/>
+              <a:t>2e fenêtre : graphique</a:t>
+            </a:r>
+          </a:p>
+        </p:txBody>
+      </p:sp>
+      <p:sp>
+        <p:nvSpPr>
+          <p:cNvPr id="7" name="Espace réservé du contenu 2">
+            <a:extLst>
+              <a:ext uri="{FF2B5EF4-FFF2-40B4-BE49-F238E27FC236}">
+                <a16:creationId xmlns:a16="http://schemas.microsoft.com/office/drawing/2014/main" id="{986399A3-F90D-E44F-BA7C-B56159E3067D}"/>
+              </a:ext>
+            </a:extLst>
+          </p:cNvPr>
+          <p:cNvSpPr txBox="1">
+            <a:spLocks/>
+          </p:cNvSpPr>
+          <p:nvPr/>
+        </p:nvSpPr>
+        <p:spPr>
+          <a:xfrm>
+            <a:off x="838200" y="5468112"/>
+            <a:ext cx="10515600" cy="891731"/>
+          </a:xfrm>
+          <a:prstGeom prst="rect">
+            <a:avLst/>
+          </a:prstGeom>
+        </p:spPr>
+        <p:txBody>
+          <a:bodyPr vert="horz" lIns="91440" tIns="45720" rIns="91440" bIns="45720" rtlCol="0">
+            <a:normAutofit/>
+          </a:bodyPr>
+          <a:lstStyle>
+            <a:lvl1pPr marL="228600" indent="-228600" algn="l" defTabSz="914400" rtl="0" eaLnBrk="1" latinLnBrk="0" hangingPunct="1">
+              <a:lnSpc>
+                <a:spcPct val="90000"/>
+              </a:lnSpc>
+              <a:spcBef>
+                <a:spcPts val="1000"/>
+              </a:spcBef>
+              <a:buFont typeface="Arial" panose="020B0604020202020204" pitchFamily="34" charset="0"/>
+              <a:buChar char="•"/>
+              <a:defRPr sz="2800" kern="1200">
+                <a:solidFill>
+                  <a:schemeClr val="tx1"/>
+                </a:solidFill>
+                <a:latin typeface="+mn-lt"/>
+                <a:ea typeface="+mn-ea"/>
+                <a:cs typeface="+mn-cs"/>
+              </a:defRPr>
+            </a:lvl1pPr>
+            <a:lvl2pPr marL="685800" indent="-228600" algn="l" defTabSz="914400" rtl="0" eaLnBrk="1" latinLnBrk="0" hangingPunct="1">
+              <a:lnSpc>
+                <a:spcPct val="90000"/>
+              </a:lnSpc>
+              <a:spcBef>
+                <a:spcPts val="500"/>
+              </a:spcBef>
+              <a:buFont typeface="Arial" panose="020B0604020202020204" pitchFamily="34" charset="0"/>
+              <a:buChar char="•"/>
+              <a:defRPr sz="2400" kern="1200">
+                <a:solidFill>
+                  <a:schemeClr val="tx1"/>
+                </a:solidFill>
+                <a:latin typeface="+mn-lt"/>
+                <a:ea typeface="+mn-ea"/>
+                <a:cs typeface="+mn-cs"/>
+              </a:defRPr>
+            </a:lvl2pPr>
+            <a:lvl3pPr marL="1143000" indent="-228600" algn="l" defTabSz="914400" rtl="0" eaLnBrk="1" latinLnBrk="0" hangingPunct="1">
+              <a:lnSpc>
+                <a:spcPct val="90000"/>
+              </a:lnSpc>
+              <a:spcBef>
+                <a:spcPts val="500"/>
+              </a:spcBef>
+              <a:buFont typeface="Arial" panose="020B0604020202020204" pitchFamily="34" charset="0"/>
+              <a:buChar char="•"/>
+              <a:defRPr sz="2000" kern="1200">
+                <a:solidFill>
+                  <a:schemeClr val="tx1"/>
+                </a:solidFill>
+                <a:latin typeface="+mn-lt"/>
+                <a:ea typeface="+mn-ea"/>
+                <a:cs typeface="+mn-cs"/>
+              </a:defRPr>
+            </a:lvl3pPr>
+            <a:lvl4pPr marL="1600200" indent="-228600" algn="l" defTabSz="914400" rtl="0" eaLnBrk="1" latinLnBrk="0" hangingPunct="1">
+              <a:lnSpc>
+                <a:spcPct val="90000"/>
+              </a:lnSpc>
+              <a:spcBef>
+                <a:spcPts val="500"/>
+              </a:spcBef>
+              <a:buFont typeface="Arial" panose="020B0604020202020204" pitchFamily="34" charset="0"/>
+              <a:buChar char="•"/>
+              <a:defRPr sz="1800" kern="1200">
+                <a:solidFill>
+                  <a:schemeClr val="tx1"/>
+                </a:solidFill>
+                <a:latin typeface="+mn-lt"/>
+                <a:ea typeface="+mn-ea"/>
+                <a:cs typeface="+mn-cs"/>
+              </a:defRPr>
+            </a:lvl4pPr>
+            <a:lvl5pPr marL="2057400" indent="-228600" algn="l" defTabSz="914400" rtl="0" eaLnBrk="1" latinLnBrk="0" hangingPunct="1">
+              <a:lnSpc>
+                <a:spcPct val="90000"/>
+              </a:lnSpc>
+              <a:spcBef>
+                <a:spcPts val="500"/>
+              </a:spcBef>
+              <a:buFont typeface="Arial" panose="020B0604020202020204" pitchFamily="34" charset="0"/>
+              <a:buChar char="•"/>
+              <a:defRPr sz="1800" kern="1200">
+                <a:solidFill>
+                  <a:schemeClr val="tx1"/>
+                </a:solidFill>
+                <a:latin typeface="+mn-lt"/>
+                <a:ea typeface="+mn-ea"/>
+                <a:cs typeface="+mn-cs"/>
+              </a:defRPr>
+            </a:lvl5pPr>
+            <a:lvl6pPr marL="2514600" indent="-228600" algn="l" defTabSz="914400" rtl="0" eaLnBrk="1" latinLnBrk="0" hangingPunct="1">
+              <a:lnSpc>
+                <a:spcPct val="90000"/>
+              </a:lnSpc>
+              <a:spcBef>
+                <a:spcPts val="500"/>
+              </a:spcBef>
+              <a:buFont typeface="Arial" panose="020B0604020202020204" pitchFamily="34" charset="0"/>
+              <a:buChar char="•"/>
+              <a:defRPr sz="1800" kern="1200">
+                <a:solidFill>
+                  <a:schemeClr val="tx1"/>
+                </a:solidFill>
+                <a:latin typeface="+mn-lt"/>
+                <a:ea typeface="+mn-ea"/>
+                <a:cs typeface="+mn-cs"/>
+              </a:defRPr>
+            </a:lvl6pPr>
+            <a:lvl7pPr marL="2971800" indent="-228600" algn="l" defTabSz="914400" rtl="0" eaLnBrk="1" latinLnBrk="0" hangingPunct="1">
+              <a:lnSpc>
+                <a:spcPct val="90000"/>
+              </a:lnSpc>
+              <a:spcBef>
+                <a:spcPts val="500"/>
+              </a:spcBef>
+              <a:buFont typeface="Arial" panose="020B0604020202020204" pitchFamily="34" charset="0"/>
+              <a:buChar char="•"/>
+              <a:defRPr sz="1800" kern="1200">
+                <a:solidFill>
+                  <a:schemeClr val="tx1"/>
+                </a:solidFill>
+                <a:latin typeface="+mn-lt"/>
+                <a:ea typeface="+mn-ea"/>
+                <a:cs typeface="+mn-cs"/>
+              </a:defRPr>
+            </a:lvl7pPr>
+            <a:lvl8pPr marL="3429000" indent="-228600" algn="l" defTabSz="914400" rtl="0" eaLnBrk="1" latinLnBrk="0" hangingPunct="1">
+              <a:lnSpc>
+                <a:spcPct val="90000"/>
+              </a:lnSpc>
+              <a:spcBef>
+                <a:spcPts val="500"/>
+              </a:spcBef>
+              <a:buFont typeface="Arial" panose="020B0604020202020204" pitchFamily="34" charset="0"/>
+              <a:buChar char="•"/>
+              <a:defRPr sz="1800" kern="1200">
+                <a:solidFill>
+                  <a:schemeClr val="tx1"/>
+                </a:solidFill>
+                <a:latin typeface="+mn-lt"/>
+                <a:ea typeface="+mn-ea"/>
+                <a:cs typeface="+mn-cs"/>
+              </a:defRPr>
+            </a:lvl8pPr>
+            <a:lvl9pPr marL="3886200" indent="-228600" algn="l" defTabSz="914400" rtl="0" eaLnBrk="1" latinLnBrk="0" hangingPunct="1">
+              <a:lnSpc>
+                <a:spcPct val="90000"/>
+              </a:lnSpc>
+              <a:spcBef>
+                <a:spcPts val="500"/>
+              </a:spcBef>
+              <a:buFont typeface="Arial" panose="020B0604020202020204" pitchFamily="34" charset="0"/>
+              <a:buChar char="•"/>
+              <a:defRPr sz="1800" kern="1200">
+                <a:solidFill>
+                  <a:schemeClr val="tx1"/>
+                </a:solidFill>
+                <a:latin typeface="+mn-lt"/>
+                <a:ea typeface="+mn-ea"/>
+                <a:cs typeface="+mn-cs"/>
+              </a:defRPr>
+            </a:lvl9pPr>
+          </a:lstStyle>
+          <a:p>
+            <a:pPr marL="0" indent="0">
+              <a:buFont typeface="Arial" panose="020B0604020202020204" pitchFamily="34" charset="0"/>
+              <a:buNone/>
+            </a:pPr>
+            <a:r>
+              <a:rPr lang="fr-FR" sz="2000" dirty="0"/>
+              <a:t>Affichage erreur si valeur erronée/non sélectionné</a:t>
+            </a:r>
+          </a:p>
+        </p:txBody>
+      </p:sp>
+      <p:pic>
+        <p:nvPicPr>
+          <p:cNvPr id="5" name="Image 4">
+            <a:extLst>
+              <a:ext uri="{FF2B5EF4-FFF2-40B4-BE49-F238E27FC236}">
+                <a16:creationId xmlns:a16="http://schemas.microsoft.com/office/drawing/2014/main" id="{B537E086-B9B5-906C-5AA0-8955849F6B9D}"/>
+              </a:ext>
+            </a:extLst>
+          </p:cNvPr>
+          <p:cNvPicPr>
+            <a:picLocks noChangeAspect="1"/>
+          </p:cNvPicPr>
+          <p:nvPr/>
+        </p:nvPicPr>
+        <p:blipFill>
+          <a:blip r:embed="rId2"/>
+          <a:stretch>
+            <a:fillRect/>
+          </a:stretch>
+        </p:blipFill>
+        <p:spPr>
+          <a:xfrm>
+            <a:off x="274320" y="1626944"/>
+            <a:ext cx="11448288" cy="3658288"/>
+          </a:xfrm>
+          <a:prstGeom prst="rect">
+            <a:avLst/>
+          </a:prstGeom>
+        </p:spPr>
+      </p:pic>
+    </p:spTree>
+    <p:extLst>
+      <p:ext uri="{BB962C8B-B14F-4D97-AF65-F5344CB8AC3E}">
+        <p14:creationId xmlns:p14="http://schemas.microsoft.com/office/powerpoint/2010/main" val="3495533667"/>
+      </p:ext>
+    </p:extLst>
+  </p:cSld>
+  <p:clrMapOvr>
+    <a:masterClrMapping/>
+  </p:clrMapOvr>
+</p:sld>
+</file>
+
 <file path=ppt/theme/theme1.xml><?xml version="1.0" encoding="utf-8"?>
-<a:theme xmlns:a="http://schemas.openxmlformats.org/drawingml/2006/main" name="Thème Office">
+<a:theme xmlns:a="http://schemas.openxmlformats.org/drawingml/2006/main" name="Facette">
   <a:themeElements>
-    <a:clrScheme name="Office">
+    <a:clrScheme name="Facette">
       <a:dk1>
         <a:sysClr val="windowText" lastClr="000000"/>
       </a:dk1>
@@ -3395,52 +7026,52 @@
         <a:sysClr val="window" lastClr="FFFFFF"/>
       </a:lt1>
       <a:dk2>
-        <a:srgbClr val="0E2841"/>
+        <a:srgbClr val="2C3C43"/>
       </a:dk2>
       <a:lt2>
-        <a:srgbClr val="E8E8E8"/>
+        <a:srgbClr val="EBEBEB"/>
       </a:lt2>
       <a:accent1>
-        <a:srgbClr val="156082"/>
+        <a:srgbClr val="90C226"/>
       </a:accent1>
       <a:accent2>
-        <a:srgbClr val="E97132"/>
+        <a:srgbClr val="54A021"/>
       </a:accent2>
       <a:accent3>
-        <a:srgbClr val="196B24"/>
+        <a:srgbClr val="E6B91E"/>
       </a:accent3>
       <a:accent4>
-        <a:srgbClr val="0F9ED5"/>
+        <a:srgbClr val="E76618"/>
       </a:accent4>
       <a:accent5>
-        <a:srgbClr val="A02B93"/>
+        <a:srgbClr val="C42F1A"/>
       </a:accent5>
       <a:accent6>
-        <a:srgbClr val="4EA72E"/>
+        <a:srgbClr val="918655"/>
       </a:accent6>
       <a:hlink>
-        <a:srgbClr val="467886"/>
+        <a:srgbClr val="99CA3C"/>
       </a:hlink>
       <a:folHlink>
-        <a:srgbClr val="96607D"/>
+        <a:srgbClr val="B9D181"/>
       </a:folHlink>
     </a:clrScheme>
-    <a:fontScheme name="Office">
+    <a:fontScheme name="Facette">
       <a:majorFont>
-        <a:latin typeface="Aptos Display" panose="02110004020202020204"/>
+        <a:latin typeface="Trebuchet MS" panose="020B0603020202020204"/>
         <a:ea typeface=""/>
         <a:cs typeface=""/>
-        <a:font script="Jpan" typeface="游ゴシック Light"/>
+        <a:font script="Jpan" typeface="メイリオ"/>
         <a:font script="Hang" typeface="맑은 고딕"/>
-        <a:font script="Hans" typeface="等线 Light"/>
-        <a:font script="Hant" typeface="新細明體"/>
-        <a:font script="Arab" typeface="Times New Roman"/>
-        <a:font script="Hebr" typeface="Times New Roman"/>
-        <a:font script="Thai" typeface="Angsana New"/>
+        <a:font script="Hans" typeface="方正姚体"/>
+        <a:font script="Hant" typeface="微軟正黑體"/>
+        <a:font script="Arab" typeface="Tahoma"/>
+        <a:font script="Hebr" typeface="Arial"/>
+        <a:font script="Thai" typeface="Cordia New"/>
         <a:font script="Ethi" typeface="Nyala"/>
         <a:font script="Beng" typeface="Vrinda"/>
         <a:font script="Gujr" typeface="Shruti"/>
-        <a:font script="Khmr" typeface="MoolBoran"/>
+        <a:font script="Khmr" typeface="DaunPenh"/>
         <a:font script="Knda" typeface="Tunga"/>
         <a:font script="Guru" typeface="Raavi"/>
         <a:font script="Cans" typeface="Euphemia"/>
@@ -3457,38 +7088,21 @@
         <a:font script="Laoo" typeface="DokChampa"/>
         <a:font script="Sinh" typeface="Iskoola Pota"/>
         <a:font script="Mong" typeface="Mongolian Baiti"/>
-        <a:font script="Viet" typeface="Times New Roman"/>
+        <a:font script="Viet" typeface="Tahoma"/>
         <a:font script="Uigh" typeface="Microsoft Uighur"/>
         <a:font script="Geor" typeface="Sylfaen"/>
-        <a:font script="Armn" typeface="Arial"/>
-        <a:font script="Bugi" typeface="Leelawadee UI"/>
-        <a:font script="Bopo" typeface="Microsoft JhengHei"/>
-        <a:font script="Java" typeface="Javanese Text"/>
-        <a:font script="Lisu" typeface="Segoe UI"/>
-        <a:font script="Mymr" typeface="Myanmar Text"/>
-        <a:font script="Nkoo" typeface="Ebrima"/>
-        <a:font script="Olck" typeface="Nirmala UI"/>
-        <a:font script="Osma" typeface="Ebrima"/>
-        <a:font script="Phag" typeface="Phagspa"/>
-        <a:font script="Syrn" typeface="Estrangelo Edessa"/>
-        <a:font script="Syrj" typeface="Estrangelo Edessa"/>
-        <a:font script="Syre" typeface="Estrangelo Edessa"/>
-        <a:font script="Sora" typeface="Nirmala UI"/>
-        <a:font script="Tale" typeface="Microsoft Tai Le"/>
-        <a:font script="Talu" typeface="Microsoft New Tai Lue"/>
-        <a:font script="Tfng" typeface="Ebrima"/>
       </a:majorFont>
       <a:minorFont>
-        <a:latin typeface="Aptos" panose="02110004020202020204"/>
+        <a:latin typeface="Trebuchet MS" panose="020B0603020202020204"/>
         <a:ea typeface=""/>
         <a:cs typeface=""/>
-        <a:font script="Jpan" typeface="游ゴシック"/>
-        <a:font script="Hang" typeface="맑은 고딕"/>
-        <a:font script="Hans" typeface="等线"/>
-        <a:font script="Hant" typeface="新細明體"/>
-        <a:font script="Arab" typeface="Arial"/>
-        <a:font script="Hebr" typeface="Arial"/>
-        <a:font script="Thai" typeface="Cordia New"/>
+        <a:font script="Jpan" typeface="メイリオ"/>
+        <a:font script="Hang" typeface="HY그래픽M"/>
+        <a:font script="Hans" typeface="华文新魏"/>
+        <a:font script="Hant" typeface="微軟正黑體"/>
+        <a:font script="Arab" typeface="Tahoma"/>
+        <a:font script="Hebr" typeface="Gisha"/>
+        <a:font script="Thai" typeface="IrisUPC"/>
         <a:font script="Ethi" typeface="Nyala"/>
         <a:font script="Beng" typeface="Vrinda"/>
         <a:font script="Gujr" typeface="Shruti"/>
@@ -3512,26 +7126,9 @@
         <a:font script="Viet" typeface="Arial"/>
         <a:font script="Uigh" typeface="Microsoft Uighur"/>
         <a:font script="Geor" typeface="Sylfaen"/>
-        <a:font script="Armn" typeface="Arial"/>
-        <a:font script="Bugi" typeface="Leelawadee UI"/>
-        <a:font script="Bopo" typeface="Microsoft JhengHei"/>
-        <a:font script="Java" typeface="Javanese Text"/>
-        <a:font script="Lisu" typeface="Segoe UI"/>
-        <a:font script="Mymr" typeface="Myanmar Text"/>
-        <a:font script="Nkoo" typeface="Ebrima"/>
-        <a:font script="Olck" typeface="Nirmala UI"/>
-        <a:font script="Osma" typeface="Ebrima"/>
-        <a:font script="Phag" typeface="Phagspa"/>
-        <a:font script="Syrn" typeface="Estrangelo Edessa"/>
-        <a:font script="Syrj" typeface="Estrangelo Edessa"/>
-        <a:font script="Syre" typeface="Estrangelo Edessa"/>
-        <a:font script="Sora" typeface="Nirmala UI"/>
-        <a:font script="Tale" typeface="Microsoft Tai Le"/>
-        <a:font script="Talu" typeface="Microsoft New Tai Lue"/>
-        <a:font script="Tfng" typeface="Ebrima"/>
       </a:minorFont>
     </a:fontScheme>
-    <a:fmtScheme name="Office">
+    <a:fmtScheme name="Facette">
       <a:fillStyleLst>
         <a:solidFill>
           <a:schemeClr val="phClr"/>
@@ -3540,23 +7137,13 @@
           <a:gsLst>
             <a:gs pos="0">
               <a:schemeClr val="phClr">
+                <a:tint val="65000"/>
                 <a:lumMod val="110000"/>
-                <a:satMod val="105000"/>
-                <a:tint val="67000"/>
               </a:schemeClr>
             </a:gs>
-            <a:gs pos="50000">
+            <a:gs pos="88000">
               <a:schemeClr val="phClr">
-                <a:lumMod val="105000"/>
-                <a:satMod val="103000"/>
-                <a:tint val="73000"/>
-              </a:schemeClr>
-            </a:gs>
-            <a:gs pos="100000">
-              <a:schemeClr val="phClr">
-                <a:lumMod val="105000"/>
-                <a:satMod val="109000"/>
-                <a:tint val="81000"/>
+                <a:tint val="90000"/>
               </a:schemeClr>
             </a:gs>
           </a:gsLst>
@@ -3566,23 +7153,14 @@
           <a:gsLst>
             <a:gs pos="0">
               <a:schemeClr val="phClr">
-                <a:satMod val="103000"/>
-                <a:lumMod val="102000"/>
-                <a:tint val="94000"/>
+                <a:tint val="96000"/>
+                <a:lumMod val="100000"/>
               </a:schemeClr>
             </a:gs>
-            <a:gs pos="50000">
+            <a:gs pos="78000">
               <a:schemeClr val="phClr">
-                <a:satMod val="110000"/>
-                <a:lumMod val="100000"/>
-                <a:shade val="100000"/>
-              </a:schemeClr>
-            </a:gs>
-            <a:gs pos="100000">
-              <a:schemeClr val="phClr">
-                <a:lumMod val="99000"/>
-                <a:satMod val="120000"/>
-                <a:shade val="78000"/>
+                <a:shade val="94000"/>
+                <a:lumMod val="94000"/>
               </a:schemeClr>
             </a:gs>
           </a:gsLst>
@@ -3590,26 +7168,23 @@
         </a:gradFill>
       </a:fillStyleLst>
       <a:lnStyleLst>
-        <a:ln w="12700" cap="flat" cmpd="sng" algn="ctr">
+        <a:ln w="12700" cap="rnd" cmpd="sng" algn="ctr">
           <a:solidFill>
             <a:schemeClr val="phClr"/>
           </a:solidFill>
           <a:prstDash val="solid"/>
-          <a:miter lim="800000"/>
         </a:ln>
-        <a:ln w="19050" cap="flat" cmpd="sng" algn="ctr">
+        <a:ln w="19050" cap="rnd" cmpd="sng" algn="ctr">
           <a:solidFill>
             <a:schemeClr val="phClr"/>
           </a:solidFill>
           <a:prstDash val="solid"/>
-          <a:miter lim="800000"/>
         </a:ln>
-        <a:ln w="25400" cap="flat" cmpd="sng" algn="ctr">
+        <a:ln w="25400" cap="rnd" cmpd="sng" algn="ctr">
           <a:solidFill>
             <a:schemeClr val="phClr"/>
           </a:solidFill>
           <a:prstDash val="solid"/>
-          <a:miter lim="800000"/>
         </a:ln>
       </a:lnStyleLst>
       <a:effectStyleLst>
@@ -3617,83 +7192,81 @@
           <a:effectLst/>
         </a:effectStyle>
         <a:effectStyle>
-          <a:effectLst/>
+          <a:effectLst>
+            <a:outerShdw blurRad="38100" dist="25400" dir="5400000" rotWithShape="0">
+              <a:srgbClr val="000000">
+                <a:alpha val="35000"/>
+              </a:srgbClr>
+            </a:outerShdw>
+          </a:effectLst>
         </a:effectStyle>
         <a:effectStyle>
           <a:effectLst>
-            <a:outerShdw blurRad="57150" dist="19050" dir="5400000" algn="ctr" rotWithShape="0">
+            <a:outerShdw blurRad="50800" dist="38100" dir="5400000" rotWithShape="0">
               <a:srgbClr val="000000">
-                <a:alpha val="63000"/>
+                <a:alpha val="35000"/>
               </a:srgbClr>
             </a:outerShdw>
           </a:effectLst>
+          <a:scene3d>
+            <a:camera prst="orthographicFront">
+              <a:rot lat="0" lon="0" rev="0"/>
+            </a:camera>
+            <a:lightRig rig="threePt" dir="tl"/>
+          </a:scene3d>
+          <a:sp3d prstMaterial="plastic">
+            <a:bevelT w="0" h="0"/>
+          </a:sp3d>
         </a:effectStyle>
       </a:effectStyleLst>
       <a:bgFillStyleLst>
         <a:solidFill>
           <a:schemeClr val="phClr"/>
         </a:solidFill>
-        <a:solidFill>
-          <a:schemeClr val="phClr">
-            <a:tint val="95000"/>
-            <a:satMod val="170000"/>
-          </a:schemeClr>
-        </a:solidFill>
         <a:gradFill rotWithShape="1">
           <a:gsLst>
             <a:gs pos="0">
               <a:schemeClr val="phClr">
-                <a:tint val="93000"/>
-                <a:satMod val="150000"/>
-                <a:shade val="98000"/>
-                <a:lumMod val="102000"/>
+                <a:tint val="90000"/>
+                <a:lumMod val="104000"/>
               </a:schemeClr>
             </a:gs>
-            <a:gs pos="50000">
+            <a:gs pos="94000">
               <a:schemeClr val="phClr">
-                <a:tint val="98000"/>
-                <a:satMod val="130000"/>
-                <a:shade val="90000"/>
-                <a:lumMod val="103000"/>
-              </a:schemeClr>
-            </a:gs>
-            <a:gs pos="100000">
-              <a:schemeClr val="phClr">
-                <a:shade val="63000"/>
-                <a:satMod val="120000"/>
+                <a:shade val="96000"/>
+                <a:lumMod val="82000"/>
               </a:schemeClr>
             </a:gs>
           </a:gsLst>
           <a:lin ang="5400000" scaled="0"/>
         </a:gradFill>
+        <a:gradFill rotWithShape="1">
+          <a:gsLst>
+            <a:gs pos="0">
+              <a:schemeClr val="phClr">
+                <a:tint val="90000"/>
+                <a:lumMod val="110000"/>
+              </a:schemeClr>
+            </a:gs>
+            <a:gs pos="100000">
+              <a:schemeClr val="phClr">
+                <a:shade val="94000"/>
+                <a:lumMod val="96000"/>
+              </a:schemeClr>
+            </a:gs>
+          </a:gsLst>
+          <a:path path="circle">
+            <a:fillToRect l="50000" t="50000" r="100000" b="100000"/>
+          </a:path>
+        </a:gradFill>
       </a:bgFillStyleLst>
     </a:fmtScheme>
   </a:themeElements>
-  <a:objectDefaults>
-    <a:lnDef>
-      <a:spPr/>
-      <a:bodyPr/>
-      <a:lstStyle/>
-      <a:style>
-        <a:lnRef idx="2">
-          <a:schemeClr val="accent1"/>
-        </a:lnRef>
-        <a:fillRef idx="0">
-          <a:schemeClr val="accent1"/>
-        </a:fillRef>
-        <a:effectRef idx="1">
-          <a:schemeClr val="accent1"/>
-        </a:effectRef>
-        <a:fontRef idx="minor">
-          <a:schemeClr val="tx1"/>
-        </a:fontRef>
-      </a:style>
-    </a:lnDef>
-  </a:objectDefaults>
+  <a:objectDefaults/>
   <a:extraClrSchemeLst/>
   <a:extLst>
     <a:ext uri="{05A4C25C-085E-4340-85A3-A5531E510DB2}">
-      <thm15:themeFamily xmlns:thm15="http://schemas.microsoft.com/office/thememl/2012/main" name="Office Theme" id="{2E142A2C-CD16-42D6-873A-C26D2A0506FA}" vid="{1BDDFF52-6CD6-40A5-AB3C-68EB2F1E4D0A}"/>
+      <thm15:themeFamily xmlns:thm15="http://schemas.microsoft.com/office/thememl/2012/main" name="Facet" id="{C0C680CD-088A-49FC-A102-D699147F32B2}" vid="{CFBC31BA-B70F-4F30-BCAA-4F3011E16C4D}"/>
     </a:ext>
   </a:extLst>
 </a:theme>
